--- a/marketing/partners/sitall-deck-partner.pptx
+++ b/marketing/partners/sitall-deck-partner.pptx
@@ -4,6 +4,9 @@
   <p:sldMasterIdLst>
     <p:sldMasterId id="2147483648" r:id="rId1"/>
   </p:sldMasterIdLst>
+  <p:notesMasterIdLst>
+    <p:notesMasterId r:id="rId13"/>
+  </p:notesMasterIdLst>
   <p:sldIdLst>
     <p:sldId id="256" r:id="rId2"/>
     <p:sldId id="257" r:id="rId3"/>
@@ -16,11 +19,7 @@
     <p:sldId id="264" r:id="rId10"/>
     <p:sldId id="265" r:id="rId11"/>
     <p:sldId id="266" r:id="rId12"/>
-    <p:sldId id="267" r:id="rId13"/>
   </p:sldIdLst>
-  <p:notesMasterIdLst>
-    <p:notesMasterId r:id="rId14"/>
-  </p:notesMasterIdLst>
   <p:sldSz cx="12192000" cy="6858000"/>
   <p:notesSz cx="6858000" cy="12192000"/>
   <p:defaultTextStyle>
@@ -115,6 +114,11 @@
       </a:defRPr>
     </a:lvl9pPr>
   </p:defaultTextStyle>
+  <p:extLst>
+    <p:ext uri="{EFAFB233-063F-42B5-8137-9DF3F51BA10A}">
+      <p15:sldGuideLst xmlns:p15="http://schemas.microsoft.com/office/powerpoint/2012/main"/>
+    </p:ext>
+  </p:extLst>
 </p:presentation>
 </file>
 
@@ -140,234 +144,10 @@
           <a:chExt cx="0" cy="0"/>
         </a:xfrm>
       </p:grpSpPr>
-      <p:sp>
-        <p:nvSpPr>
-          <p:cNvPr id="2" name="Header Placeholder 1"/>
-          <p:cNvSpPr>
-            <a:spLocks noGrp="1"/>
-          </p:cNvSpPr>
-          <p:nvPr>
-            <p:ph type="hdr" sz="quarter"/>
-          </p:nvPr>
-        </p:nvSpPr>
-        <p:spPr>
-          <a:xfrm>
-            <a:off x="0" y="0"/>
-            <a:ext cx="2971800" cy="458788"/>
-          </a:xfrm>
-          <a:prstGeom prst="rect">
-            <a:avLst/>
-          </a:prstGeom>
-        </p:spPr>
-        <p:txBody>
-          <a:bodyPr vert="horz" lIns="91440" tIns="45720" rIns="91440" bIns="45720" rtlCol="0"/>
-          <a:lstStyle>
-            <a:lvl1pPr algn="l">
-              <a:defRPr sz="1200"/>
-            </a:lvl1pPr>
-          </a:lstStyle>
-          <a:p>
-            <a:endParaRPr lang="en-US"/>
-          </a:p>
-        </p:txBody>
-      </p:sp>
-      <p:sp>
-        <p:nvSpPr>
-          <p:cNvPr id="3" name="Date Placeholder 2"/>
-          <p:cNvSpPr>
-            <a:spLocks noGrp="1"/>
-          </p:cNvSpPr>
-          <p:nvPr>
-            <p:ph type="dt" idx="1"/>
-          </p:nvPr>
-        </p:nvSpPr>
-        <p:spPr>
-          <a:xfrm>
-            <a:off x="3884613" y="0"/>
-            <a:ext cx="2971800" cy="458788"/>
-          </a:xfrm>
-          <a:prstGeom prst="rect">
-            <a:avLst/>
-          </a:prstGeom>
-        </p:spPr>
-        <p:txBody>
-          <a:bodyPr vert="horz" lIns="91440" tIns="45720" rIns="91440" bIns="45720" rtlCol="0"/>
-          <a:lstStyle>
-            <a:lvl1pPr algn="r">
-              <a:defRPr sz="1200"/>
-            </a:lvl1pPr>
-          </a:lstStyle>
-          <a:p>
-            <a:fld id="{5282F153-3F37-0F45-9E97-73ACFA13230C}" type="datetimeFigureOut">
-              <a:rPr lang="en-US"/>
-              <a:t>7/23/19</a:t>
-            </a:fld>
-            <a:endParaRPr lang="en-US"/>
-          </a:p>
-        </p:txBody>
-      </p:sp>
-      <p:sp>
-        <p:nvSpPr>
-          <p:cNvPr id="4" name="Slide Image Placeholder 3"/>
-          <p:cNvSpPr>
-            <a:spLocks noGrp="1" noRot="1" noChangeAspect="1"/>
-          </p:cNvSpPr>
-          <p:nvPr>
-            <p:ph type="sldImg" idx="2"/>
-          </p:nvPr>
-        </p:nvSpPr>
-        <p:spPr>
-          <a:xfrm>
-            <a:off x="685800" y="1143000"/>
-            <a:ext cx="5486400" cy="3086100"/>
-          </a:xfrm>
-          <a:prstGeom prst="rect">
-            <a:avLst/>
-          </a:prstGeom>
-          <a:noFill/>
-          <a:ln w="12700">
-            <a:solidFill>
-              <a:prstClr val="black"/>
-            </a:solidFill>
-          </a:ln>
-        </p:spPr>
-        <p:txBody>
-          <a:bodyPr vert="horz" lIns="91440" tIns="45720" rIns="91440" bIns="45720" rtlCol="0" anchor="ctr"/>
-          <a:lstStyle/>
-          <a:p>
-            <a:endParaRPr lang="en-US"/>
-          </a:p>
-        </p:txBody>
-      </p:sp>
-      <p:sp>
-        <p:nvSpPr>
-          <p:cNvPr id="5" name="Notes Placeholder 4"/>
-          <p:cNvSpPr>
-            <a:spLocks noGrp="1"/>
-          </p:cNvSpPr>
-          <p:nvPr>
-            <p:ph type="body" sz="quarter" idx="3"/>
-          </p:nvPr>
-        </p:nvSpPr>
-        <p:spPr>
-          <a:xfrm>
-            <a:off x="685800" y="4400550"/>
-            <a:ext cx="5486400" cy="3600450"/>
-          </a:xfrm>
-          <a:prstGeom prst="rect">
-            <a:avLst/>
-          </a:prstGeom>
-        </p:spPr>
-        <p:txBody>
-          <a:bodyPr vert="horz" lIns="91440" tIns="45720" rIns="91440" bIns="45720" rtlCol="0"/>
-          <a:lstStyle/>
-          <a:p>
-            <a:pPr lvl="0"/>
-            <a:r>
-              <a:rPr lang="en-US"/>
-              <a:t>Click to edit Master text styles</a:t>
-            </a:r>
-          </a:p>
-          <a:p>
-            <a:pPr lvl="1"/>
-            <a:r>
-              <a:rPr lang="en-US"/>
-              <a:t>Second level</a:t>
-            </a:r>
-          </a:p>
-          <a:p>
-            <a:pPr lvl="2"/>
-            <a:r>
-              <a:rPr lang="en-US"/>
-              <a:t>Third level</a:t>
-            </a:r>
-          </a:p>
-          <a:p>
-            <a:pPr lvl="3"/>
-            <a:r>
-              <a:rPr lang="en-US"/>
-              <a:t>Fourth level</a:t>
-            </a:r>
-          </a:p>
-          <a:p>
-            <a:pPr lvl="4"/>
-            <a:r>
-              <a:rPr lang="en-US"/>
-              <a:t>Fifth level</a:t>
-            </a:r>
-          </a:p>
-        </p:txBody>
-      </p:sp>
-      <p:sp>
-        <p:nvSpPr>
-          <p:cNvPr id="6" name="Footer Placeholder 5"/>
-          <p:cNvSpPr>
-            <a:spLocks noGrp="1"/>
-          </p:cNvSpPr>
-          <p:nvPr>
-            <p:ph type="ftr" sz="quarter" idx="4"/>
-          </p:nvPr>
-        </p:nvSpPr>
-        <p:spPr>
-          <a:xfrm>
-            <a:off x="0" y="8685213"/>
-            <a:ext cx="2971800" cy="458787"/>
-          </a:xfrm>
-          <a:prstGeom prst="rect">
-            <a:avLst/>
-          </a:prstGeom>
-        </p:spPr>
-        <p:txBody>
-          <a:bodyPr vert="horz" lIns="91440" tIns="45720" rIns="91440" bIns="45720" rtlCol="0" anchor="b"/>
-          <a:lstStyle>
-            <a:lvl1pPr algn="l">
-              <a:defRPr sz="1200"/>
-            </a:lvl1pPr>
-          </a:lstStyle>
-          <a:p>
-            <a:endParaRPr lang="en-US"/>
-          </a:p>
-        </p:txBody>
-      </p:sp>
-      <p:sp>
-        <p:nvSpPr>
-          <p:cNvPr id="7" name="Slide Number Placeholder 6"/>
-          <p:cNvSpPr>
-            <a:spLocks noGrp="1"/>
-          </p:cNvSpPr>
-          <p:nvPr>
-            <p:ph type="sldNum" sz="quarter" idx="5"/>
-          </p:nvPr>
-        </p:nvSpPr>
-        <p:spPr>
-          <a:xfrm>
-            <a:off x="3884613" y="8685213"/>
-            <a:ext cx="2971800" cy="458787"/>
-          </a:xfrm>
-          <a:prstGeom prst="rect">
-            <a:avLst/>
-          </a:prstGeom>
-        </p:spPr>
-        <p:txBody>
-          <a:bodyPr vert="horz" lIns="91440" tIns="45720" rIns="91440" bIns="45720" rtlCol="0" anchor="b"/>
-          <a:lstStyle>
-            <a:lvl1pPr algn="r">
-              <a:defRPr sz="1200"/>
-            </a:lvl1pPr>
-          </a:lstStyle>
-          <a:p>
-            <a:fld id="{CE5E9CC1-C706-0F49-92D6-E571CC5EEA8F}" type="slidenum">
-              <a:rPr lang="en-US"/>
-              <a:t>‹#›</a:t>
-            </a:fld>
-            <a:endParaRPr lang="en-US"/>
-          </a:p>
-        </p:txBody>
-      </p:sp>
     </p:spTree>
     <p:extLst>
       <p:ext uri="{BB962C8B-B14F-4D97-AF65-F5344CB8AC3E}">
-        <p14:creationId xmlns:p14="http://schemas.microsoft.com/office/powerpoint/2010/main" val="1024086991"/>
+        <p14:creationId xmlns:p14="http://schemas.microsoft.com/office/powerpoint/2010/main" val="3069470429"/>
       </p:ext>
     </p:extLst>
   </p:cSld>
@@ -511,10 +291,6 @@
           <a:bodyPr/>
           <a:lstStyle/>
           <a:p>
-            <a:r>
-              <a:rPr lang="en-US" dirty="0"/>
-              <a:t/>
-            </a:r>
             <a:endParaRPr lang="en-US" dirty="0"/>
           </a:p>
         </p:txBody>
@@ -599,10 +375,6 @@
           <a:bodyPr/>
           <a:lstStyle/>
           <a:p>
-            <a:r>
-              <a:rPr lang="en-US" dirty="0"/>
-              <a:t/>
-            </a:r>
             <a:endParaRPr lang="en-US" dirty="0"/>
           </a:p>
         </p:txBody>
@@ -687,10 +459,6 @@
           <a:bodyPr/>
           <a:lstStyle/>
           <a:p>
-            <a:r>
-              <a:rPr lang="en-US" dirty="0"/>
-              <a:t/>
-            </a:r>
             <a:endParaRPr lang="en-US" dirty="0"/>
           </a:p>
         </p:txBody>
@@ -713,94 +481,6 @@
             <a:fld id="{F7021451-1387-4CA6-816F-3879F97B5CBC}" type="slidenum">
               <a:rPr lang="en-US"/>
               <a:t>11</a:t>
-            </a:fld>
-            <a:endParaRPr lang="en-US"/>
-          </a:p>
-        </p:txBody>
-      </p:sp>
-    </p:spTree>
-    <p:extLst>
-      <p:ext uri="{BB962C8B-B14F-4D97-AF65-F5344CB8AC3E}">
-        <p14:creationId xmlns:p14="http://schemas.microsoft.com/office/powerpoint/2010/main" val="1024086991"/>
-      </p:ext>
-    </p:extLst>
-  </p:cSld>
-  <p:clrMapOvr>
-    <a:masterClrMapping/>
-  </p:clrMapOvr>
-</p:notes>
-</file>
-
-<file path=ppt/notesSlides/notesSlide12.xml><?xml version="1.0" encoding="utf-8"?>
-<p:notes xmlns:a="http://schemas.openxmlformats.org/drawingml/2006/main" xmlns:r="http://schemas.openxmlformats.org/officeDocument/2006/relationships" xmlns:p="http://schemas.openxmlformats.org/presentationml/2006/main">
-  <p:cSld>
-    <p:spTree>
-      <p:nvGrpSpPr>
-        <p:cNvPr id="1" name=""/>
-        <p:cNvGrpSpPr/>
-        <p:nvPr/>
-      </p:nvGrpSpPr>
-      <p:grpSpPr>
-        <a:xfrm>
-          <a:off x="0" y="0"/>
-          <a:ext cx="0" cy="0"/>
-          <a:chOff x="0" y="0"/>
-          <a:chExt cx="0" cy="0"/>
-        </a:xfrm>
-      </p:grpSpPr>
-      <p:sp>
-        <p:nvSpPr>
-          <p:cNvPr id="2" name="Slide Image Placeholder 1"/>
-          <p:cNvSpPr>
-            <a:spLocks noGrp="1" noRot="1" noChangeAspect="1"/>
-          </p:cNvSpPr>
-          <p:nvPr>
-            <p:ph type="sldImg"/>
-          </p:nvPr>
-        </p:nvSpPr>
-        <p:spPr/>
-      </p:sp>
-      <p:sp>
-        <p:nvSpPr>
-          <p:cNvPr id="3" name="Notes Placeholder 2"/>
-          <p:cNvSpPr>
-            <a:spLocks noGrp="1"/>
-          </p:cNvSpPr>
-          <p:nvPr>
-            <p:ph type="body" idx="1"/>
-          </p:nvPr>
-        </p:nvSpPr>
-        <p:spPr/>
-        <p:txBody>
-          <a:bodyPr/>
-          <a:lstStyle/>
-          <a:p>
-            <a:r>
-              <a:rPr lang="en-US" dirty="0"/>
-              <a:t/>
-            </a:r>
-            <a:endParaRPr lang="en-US" dirty="0"/>
-          </a:p>
-        </p:txBody>
-      </p:sp>
-      <p:sp>
-        <p:nvSpPr>
-          <p:cNvPr id="4" name="Slide Number Placeholder 3"/>
-          <p:cNvSpPr>
-            <a:spLocks noGrp="1"/>
-          </p:cNvSpPr>
-          <p:nvPr>
-            <p:ph type="sldNum" sz="quarter" idx="10"/>
-          </p:nvPr>
-        </p:nvSpPr>
-        <p:spPr/>
-        <p:txBody>
-          <a:bodyPr/>
-          <a:lstStyle/>
-          <a:p>
-            <a:fld id="{F7021451-1387-4CA6-816F-3879F97B5CBC}" type="slidenum">
-              <a:rPr lang="en-US"/>
-              <a:t>12</a:t>
             </a:fld>
             <a:endParaRPr lang="en-US"/>
           </a:p>
@@ -863,10 +543,6 @@
           <a:bodyPr/>
           <a:lstStyle/>
           <a:p>
-            <a:r>
-              <a:rPr lang="en-US" dirty="0"/>
-              <a:t/>
-            </a:r>
             <a:endParaRPr lang="en-US" dirty="0"/>
           </a:p>
         </p:txBody>
@@ -951,10 +627,6 @@
           <a:bodyPr/>
           <a:lstStyle/>
           <a:p>
-            <a:r>
-              <a:rPr lang="en-US" dirty="0"/>
-              <a:t/>
-            </a:r>
             <a:endParaRPr lang="en-US" dirty="0"/>
           </a:p>
         </p:txBody>
@@ -1039,10 +711,6 @@
           <a:bodyPr/>
           <a:lstStyle/>
           <a:p>
-            <a:r>
-              <a:rPr lang="en-US" dirty="0"/>
-              <a:t/>
-            </a:r>
             <a:endParaRPr lang="en-US" dirty="0"/>
           </a:p>
         </p:txBody>
@@ -1127,10 +795,6 @@
           <a:bodyPr/>
           <a:lstStyle/>
           <a:p>
-            <a:r>
-              <a:rPr lang="en-US" dirty="0"/>
-              <a:t/>
-            </a:r>
             <a:endParaRPr lang="en-US" dirty="0"/>
           </a:p>
         </p:txBody>
@@ -1215,10 +879,6 @@
           <a:bodyPr/>
           <a:lstStyle/>
           <a:p>
-            <a:r>
-              <a:rPr lang="en-US" dirty="0"/>
-              <a:t/>
-            </a:r>
             <a:endParaRPr lang="en-US" dirty="0"/>
           </a:p>
         </p:txBody>
@@ -1303,10 +963,6 @@
           <a:bodyPr/>
           <a:lstStyle/>
           <a:p>
-            <a:r>
-              <a:rPr lang="en-US" dirty="0"/>
-              <a:t/>
-            </a:r>
             <a:endParaRPr lang="en-US" dirty="0"/>
           </a:p>
         </p:txBody>
@@ -1391,10 +1047,6 @@
           <a:bodyPr/>
           <a:lstStyle/>
           <a:p>
-            <a:r>
-              <a:rPr lang="en-US" dirty="0"/>
-              <a:t/>
-            </a:r>
             <a:endParaRPr lang="en-US" dirty="0"/>
           </a:p>
         </p:txBody>
@@ -1479,10 +1131,6 @@
           <a:bodyPr/>
           <a:lstStyle/>
           <a:p>
-            <a:r>
-              <a:rPr lang="en-US" dirty="0"/>
-              <a:t/>
-            </a:r>
             <a:endParaRPr lang="en-US" dirty="0"/>
           </a:p>
         </p:txBody>
@@ -1556,6 +1204,11 @@
 <file path=ppt/slideMasters/slideMaster1.xml><?xml version="1.0" encoding="utf-8"?>
 <p:sldMaster xmlns:a="http://schemas.openxmlformats.org/drawingml/2006/main" xmlns:r="http://schemas.openxmlformats.org/officeDocument/2006/relationships" xmlns:p="http://schemas.openxmlformats.org/presentationml/2006/main">
   <p:cSld>
+    <p:bg>
+      <p:bgRef idx="1001">
+        <a:schemeClr val="bg1"/>
+      </p:bgRef>
+    </p:bg>
     <p:spTree>
       <p:nvGrpSpPr>
         <p:cNvPr id="1" name=""/>
@@ -1934,11 +1587,11 @@
           <a:bodyPr wrap="square" lIns="0" tIns="0" rIns="0" bIns="0" rtlCol="0" anchor="ctr"/>
           <a:lstStyle/>
           <a:p>
-            <a:pPr indent="0" marL="0">
-              <a:buNone/>
-            </a:pPr>
-            <a:r>
-              <a:rPr lang="en-US" sz="1300" spc="300" kern="0" dirty="0">
+            <a:pPr marL="0" indent="0">
+              <a:buNone/>
+            </a:pPr>
+            <a:r>
+              <a:rPr lang="en-US" sz="1300" kern="0" spc="300" dirty="0">
                 <a:solidFill>
                   <a:srgbClr val="B4552D"/>
                 </a:solidFill>
@@ -1973,7 +1626,7 @@
           <a:bodyPr wrap="square" lIns="0" tIns="0" rIns="0" bIns="0" rtlCol="0" anchor="ctr"/>
           <a:lstStyle/>
           <a:p>
-            <a:pPr indent="0" marL="0">
+            <a:pPr marL="0" indent="0">
               <a:buNone/>
             </a:pPr>
             <a:r>
@@ -2032,7 +1685,7 @@
           <a:bodyPr wrap="square" lIns="0" tIns="0" rIns="0" bIns="0" rtlCol="0" anchor="ctr"/>
           <a:lstStyle/>
           <a:p>
-            <a:pPr indent="0" marL="0">
+            <a:pPr marL="0" indent="0">
               <a:buNone/>
             </a:pPr>
             <a:r>
@@ -2071,7 +1724,7 @@
           <a:bodyPr wrap="square" lIns="0" tIns="0" rIns="0" bIns="0" rtlCol="0" anchor="ctr"/>
           <a:lstStyle/>
           <a:p>
-            <a:pPr indent="0" marL="0">
+            <a:pPr marL="0" indent="0">
               <a:buNone/>
             </a:pPr>
             <a:r>
@@ -2137,11 +1790,11 @@
           <a:bodyPr wrap="square" lIns="0" tIns="0" rIns="0" bIns="0" rtlCol="0" anchor="ctr"/>
           <a:lstStyle/>
           <a:p>
-            <a:pPr indent="0" marL="0">
-              <a:buNone/>
-            </a:pPr>
-            <a:r>
-              <a:rPr lang="en-US" sz="1800" dirty="0">
+            <a:pPr marL="0" indent="0">
+              <a:buNone/>
+            </a:pPr>
+            <a:r>
+              <a:rPr lang="ru-RU" dirty="0">
                 <a:solidFill>
                   <a:srgbClr val="1E2761"/>
                 </a:solidFill>
@@ -2149,38 +1802,10 @@
                 <a:ea typeface="Segoe UI Semibold" pitchFamily="34" charset="-122"/>
                 <a:cs typeface="Segoe UI Semibold" pitchFamily="34" charset="-120"/>
               </a:rPr>
-              <a:t>Приглашение к партнёрству в регионе</a:t>
-            </a:r>
-            <a:endParaRPr lang="en-US" sz="1800" dirty="0"/>
-          </a:p>
-        </p:txBody>
-      </p:sp>
-      <p:sp>
-        <p:nvSpPr>
-          <p:cNvPr id="12" name="Text 10"/>
-          <p:cNvSpPr txBox="1"/>
-          <p:nvPr/>
-        </p:nvSpPr>
-        <p:spPr>
-          <a:xfrm>
-            <a:off x="502920" y="5943600"/>
-            <a:ext cx="6400800" cy="329184"/>
-          </a:xfrm>
-          <a:prstGeom prst="rect">
-            <a:avLst/>
-          </a:prstGeom>
-          <a:noFill/>
-          <a:ln/>
-        </p:spPr>
-        <p:txBody>
-          <a:bodyPr wrap="square" lIns="0" tIns="0" rIns="0" bIns="0" rtlCol="0" anchor="ctr"/>
-          <a:lstStyle/>
-          <a:p>
-            <a:pPr indent="0" marL="0">
-              <a:buNone/>
-            </a:pPr>
-            <a:r>
-              <a:rPr lang="en-US" sz="1600" dirty="0">
+              <a:t>Борис, п</a:t>
+            </a:r>
+            <a:r>
+              <a:rPr lang="en-US" sz="1800" dirty="0" err="1">
                 <a:solidFill>
                   <a:srgbClr val="1E2761"/>
                 </a:solidFill>
@@ -2188,9 +1813,42 @@
                 <a:ea typeface="Segoe UI Semibold" pitchFamily="34" charset="-122"/>
                 <a:cs typeface="Segoe UI Semibold" pitchFamily="34" charset="-120"/>
               </a:rPr>
-              <a:t>Кирилл Уклонский · uklonskiy.k@ya.ru</a:t>
-            </a:r>
-            <a:endParaRPr lang="en-US" sz="1600" dirty="0"/>
+              <a:t>риглаш</a:t>
+            </a:r>
+            <a:r>
+              <a:rPr lang="ru-RU" sz="1800" dirty="0" err="1">
+                <a:solidFill>
+                  <a:srgbClr val="1E2761"/>
+                </a:solidFill>
+                <a:latin typeface="Segoe UI Semibold" pitchFamily="34" charset="0"/>
+                <a:ea typeface="Segoe UI Semibold" pitchFamily="34" charset="-122"/>
+                <a:cs typeface="Segoe UI Semibold" pitchFamily="34" charset="-120"/>
+              </a:rPr>
+              <a:t>аем</a:t>
+            </a:r>
+            <a:r>
+              <a:rPr lang="en-US" sz="1800" dirty="0">
+                <a:solidFill>
+                  <a:srgbClr val="1E2761"/>
+                </a:solidFill>
+                <a:latin typeface="Segoe UI Semibold" pitchFamily="34" charset="0"/>
+                <a:ea typeface="Segoe UI Semibold" pitchFamily="34" charset="-122"/>
+                <a:cs typeface="Segoe UI Semibold" pitchFamily="34" charset="-120"/>
+              </a:rPr>
+              <a:t> к партнёрству в </a:t>
+            </a:r>
+            <a:r>
+              <a:rPr lang="ru-RU" dirty="0">
+                <a:solidFill>
+                  <a:srgbClr val="1E2761"/>
+                </a:solidFill>
+                <a:latin typeface="Segoe UI Semibold" pitchFamily="34" charset="0"/>
+                <a:ea typeface="Segoe UI Semibold" pitchFamily="34" charset="-122"/>
+                <a:cs typeface="Segoe UI Semibold" pitchFamily="34" charset="-120"/>
+              </a:rPr>
+              <a:t>Краснодарском крае!</a:t>
+            </a:r>
+            <a:endParaRPr lang="en-US" sz="1800" dirty="0"/>
           </a:p>
         </p:txBody>
       </p:sp>
@@ -2240,11 +1898,11 @@
           <a:bodyPr wrap="square" lIns="0" tIns="0" rIns="0" bIns="0" rtlCol="0" anchor="ctr"/>
           <a:lstStyle/>
           <a:p>
-            <a:pPr indent="0" marL="0">
-              <a:buNone/>
-            </a:pPr>
-            <a:r>
-              <a:rPr lang="en-US" sz="1300" spc="300" kern="0" dirty="0">
+            <a:pPr marL="0" indent="0">
+              <a:buNone/>
+            </a:pPr>
+            <a:r>
+              <a:rPr lang="en-US" sz="1300" kern="0" spc="300" dirty="0">
                 <a:solidFill>
                   <a:srgbClr val="B4552D"/>
                 </a:solidFill>
@@ -2279,7 +1937,7 @@
           <a:bodyPr wrap="square" lIns="0" tIns="0" rIns="0" bIns="0" rtlCol="0" anchor="ctr"/>
           <a:lstStyle/>
           <a:p>
-            <a:pPr indent="0" marL="0">
+            <a:pPr marL="0" indent="0">
               <a:buNone/>
             </a:pPr>
             <a:r>
@@ -2343,7 +2001,7 @@
             <a:prstDash val="solid"/>
           </a:ln>
           <a:effectLst>
-            <a:outerShdw sx="100000" sy="100000" kx="0" ky="0" algn="bl" rotWithShape="0" blurRad="177800" dist="50800" dir="5400000">
+            <a:outerShdw blurRad="177800" dist="50800" dir="5400000" algn="bl" rotWithShape="0">
               <a:srgbClr val="7E88A8">
                 <a:alpha val="30000"/>
               </a:srgbClr>
@@ -2392,7 +2050,7 @@
           <a:bodyPr wrap="square" lIns="0" tIns="0" rIns="0" bIns="0" rtlCol="0" anchor="ctr"/>
           <a:lstStyle/>
           <a:p>
-            <a:pPr indent="0" marL="0">
+            <a:pPr marL="0" indent="0">
               <a:buNone/>
             </a:pPr>
             <a:r>
@@ -2431,7 +2089,7 @@
           <a:bodyPr wrap="square" lIns="0" tIns="0" rIns="0" bIns="0" rtlCol="0" anchor="t"/>
           <a:lstStyle/>
           <a:p>
-            <a:pPr indent="0" marL="0">
+            <a:pPr marL="0" indent="0">
               <a:lnSpc>
                 <a:spcPct val="108000"/>
               </a:lnSpc>
@@ -2478,7 +2136,7 @@
             <a:prstDash val="solid"/>
           </a:ln>
           <a:effectLst>
-            <a:outerShdw sx="100000" sy="100000" kx="0" ky="0" algn="bl" rotWithShape="0" blurRad="177800" dist="50800" dir="5400000">
+            <a:outerShdw blurRad="177800" dist="50800" dir="5400000" algn="bl" rotWithShape="0">
               <a:srgbClr val="7E88A8">
                 <a:alpha val="30000"/>
               </a:srgbClr>
@@ -2527,7 +2185,7 @@
           <a:bodyPr wrap="square" lIns="0" tIns="0" rIns="0" bIns="0" rtlCol="0" anchor="ctr"/>
           <a:lstStyle/>
           <a:p>
-            <a:pPr indent="0" marL="0">
+            <a:pPr marL="0" indent="0">
               <a:buNone/>
             </a:pPr>
             <a:r>
@@ -2566,7 +2224,7 @@
           <a:bodyPr wrap="square" lIns="0" tIns="0" rIns="0" bIns="0" rtlCol="0" anchor="t"/>
           <a:lstStyle/>
           <a:p>
-            <a:pPr indent="0" marL="0">
+            <a:pPr marL="0" indent="0">
               <a:lnSpc>
                 <a:spcPct val="108000"/>
               </a:lnSpc>
@@ -2581,7 +2239,62 @@
                 <a:ea typeface="Segoe UI" pitchFamily="34" charset="-122"/>
                 <a:cs typeface="Segoe UI" pitchFamily="34" charset="-120"/>
               </a:rPr>
-              <a:t>доля от выручки по приведённым вами клиентам — весь срок работы с ними, а не только на первой сделке</a:t>
+              <a:t>доля от выручки по приведённым вами </a:t>
+            </a:r>
+            <a:r>
+              <a:rPr lang="en-US" sz="1600" dirty="0" err="1">
+                <a:solidFill>
+                  <a:srgbClr val="1B2140"/>
+                </a:solidFill>
+                <a:latin typeface="Segoe UI" pitchFamily="34" charset="0"/>
+                <a:ea typeface="Segoe UI" pitchFamily="34" charset="-122"/>
+                <a:cs typeface="Segoe UI" pitchFamily="34" charset="-120"/>
+              </a:rPr>
+              <a:t>клиентам</a:t>
+            </a:r>
+            <a:r>
+              <a:rPr lang="en-US" sz="1600" dirty="0">
+                <a:solidFill>
+                  <a:srgbClr val="1B2140"/>
+                </a:solidFill>
+                <a:latin typeface="Segoe UI" pitchFamily="34" charset="0"/>
+                <a:ea typeface="Segoe UI" pitchFamily="34" charset="-122"/>
+                <a:cs typeface="Segoe UI" pitchFamily="34" charset="-120"/>
+              </a:rPr>
+              <a:t> </a:t>
+            </a:r>
+            <a:r>
+              <a:rPr lang="ru-RU" sz="1600" dirty="0">
+                <a:solidFill>
+                  <a:srgbClr val="1B2140"/>
+                </a:solidFill>
+                <a:latin typeface="Segoe UI" pitchFamily="34" charset="0"/>
+                <a:ea typeface="Segoe UI" pitchFamily="34" charset="-122"/>
+                <a:cs typeface="Segoe UI" pitchFamily="34" charset="-120"/>
+              </a:rPr>
+              <a:t>на </a:t>
+            </a:r>
+            <a:r>
+              <a:rPr lang="en-US" sz="1600" dirty="0" err="1">
+                <a:solidFill>
+                  <a:srgbClr val="1B2140"/>
+                </a:solidFill>
+                <a:latin typeface="Segoe UI" pitchFamily="34" charset="0"/>
+                <a:ea typeface="Segoe UI" pitchFamily="34" charset="-122"/>
+                <a:cs typeface="Segoe UI" pitchFamily="34" charset="-120"/>
+              </a:rPr>
+              <a:t>весь</a:t>
+            </a:r>
+            <a:r>
+              <a:rPr lang="en-US" sz="1600" dirty="0">
+                <a:solidFill>
+                  <a:srgbClr val="1B2140"/>
+                </a:solidFill>
+                <a:latin typeface="Segoe UI" pitchFamily="34" charset="0"/>
+                <a:ea typeface="Segoe UI" pitchFamily="34" charset="-122"/>
+                <a:cs typeface="Segoe UI" pitchFamily="34" charset="-120"/>
+              </a:rPr>
+              <a:t> срок работы с ними, а не только на первой сделке</a:t>
             </a:r>
             <a:endParaRPr lang="en-US" sz="1600" dirty="0"/>
           </a:p>
@@ -2613,7 +2326,7 @@
             <a:prstDash val="solid"/>
           </a:ln>
           <a:effectLst>
-            <a:outerShdw sx="100000" sy="100000" kx="0" ky="0" algn="bl" rotWithShape="0" blurRad="177800" dist="50800" dir="5400000">
+            <a:outerShdw blurRad="177800" dist="50800" dir="5400000" algn="bl" rotWithShape="0">
               <a:srgbClr val="7E88A8">
                 <a:alpha val="30000"/>
               </a:srgbClr>
@@ -2662,7 +2375,7 @@
           <a:bodyPr wrap="square" lIns="0" tIns="0" rIns="0" bIns="0" rtlCol="0" anchor="ctr"/>
           <a:lstStyle/>
           <a:p>
-            <a:pPr indent="0" marL="0">
+            <a:pPr marL="0" indent="0">
               <a:buNone/>
             </a:pPr>
             <a:r>
@@ -2701,7 +2414,7 @@
           <a:bodyPr wrap="square" lIns="0" tIns="0" rIns="0" bIns="0" rtlCol="0" anchor="t"/>
           <a:lstStyle/>
           <a:p>
-            <a:pPr indent="0" marL="0">
+            <a:pPr marL="0" indent="0">
               <a:lnSpc>
                 <a:spcPct val="108000"/>
               </a:lnSpc>
@@ -2748,7 +2461,7 @@
             <a:prstDash val="solid"/>
           </a:ln>
           <a:effectLst>
-            <a:outerShdw sx="100000" sy="100000" kx="0" ky="0" algn="bl" rotWithShape="0" blurRad="177800" dist="50800" dir="5400000">
+            <a:outerShdw blurRad="177800" dist="50800" dir="5400000" algn="bl" rotWithShape="0">
               <a:srgbClr val="7E88A8">
                 <a:alpha val="30000"/>
               </a:srgbClr>
@@ -2797,7 +2510,7 @@
           <a:bodyPr wrap="square" lIns="0" tIns="0" rIns="0" bIns="0" rtlCol="0" anchor="ctr"/>
           <a:lstStyle/>
           <a:p>
-            <a:pPr indent="0" marL="0">
+            <a:pPr marL="0" indent="0">
               <a:buNone/>
             </a:pPr>
             <a:r>
@@ -2836,7 +2549,7 @@
           <a:bodyPr wrap="square" lIns="0" tIns="0" rIns="0" bIns="0" rtlCol="0" anchor="t"/>
           <a:lstStyle/>
           <a:p>
-            <a:pPr indent="0" marL="0">
+            <a:pPr marL="0" indent="0">
               <a:lnSpc>
                 <a:spcPct val="108000"/>
               </a:lnSpc>
@@ -2859,68 +2572,6 @@
       </p:sp>
       <p:sp>
         <p:nvSpPr>
-          <p:cNvPr id="21" name="Shape 19"/>
-          <p:cNvSpPr/>
-          <p:nvPr/>
-        </p:nvSpPr>
-        <p:spPr>
-          <a:xfrm>
-            <a:off x="502920" y="5925312"/>
-            <a:ext cx="64008" cy="548640"/>
-          </a:xfrm>
-          <a:prstGeom prst="rect">
-            <a:avLst/>
-          </a:prstGeom>
-          <a:solidFill>
-            <a:srgbClr val="1E2761"/>
-          </a:solidFill>
-          <a:ln/>
-        </p:spPr>
-      </p:sp>
-      <p:sp>
-        <p:nvSpPr>
-          <p:cNvPr id="22" name="Text 20"/>
-          <p:cNvSpPr txBox="1"/>
-          <p:nvPr/>
-        </p:nvSpPr>
-        <p:spPr>
-          <a:xfrm>
-            <a:off x="758952" y="5897880"/>
-            <a:ext cx="10820095" cy="603504"/>
-          </a:xfrm>
-          <a:prstGeom prst="rect">
-            <a:avLst/>
-          </a:prstGeom>
-          <a:noFill/>
-          <a:ln/>
-        </p:spPr>
-        <p:txBody>
-          <a:bodyPr wrap="square" lIns="0" tIns="0" rIns="0" bIns="0" rtlCol="0" anchor="ctr"/>
-          <a:lstStyle/>
-          <a:p>
-            <a:pPr indent="0" marL="0">
-              <a:lnSpc>
-                <a:spcPct val="105000"/>
-              </a:lnSpc>
-              <a:buNone/>
-            </a:pPr>
-            <a:r>
-              <a:rPr lang="en-US" sz="2000" dirty="0">
-                <a:solidFill>
-                  <a:srgbClr val="1E2761"/>
-                </a:solidFill>
-                <a:latin typeface="Segoe UI Semibold" pitchFamily="34" charset="0"/>
-                <a:ea typeface="Segoe UI Semibold" pitchFamily="34" charset="-122"/>
-                <a:cs typeface="Segoe UI Semibold" pitchFamily="34" charset="-120"/>
-              </a:rPr>
-              <a:t>Размер доли и границы полномочий обсуждаем при личной встрече</a:t>
-            </a:r>
-            <a:endParaRPr lang="en-US" sz="2000" dirty="0"/>
-          </a:p>
-        </p:txBody>
-      </p:sp>
-      <p:sp>
-        <p:nvSpPr>
           <p:cNvPr id="23" name="Text 21"/>
           <p:cNvSpPr txBox="1"/>
           <p:nvPr/>
@@ -2940,7 +2591,7 @@
           <a:bodyPr wrap="square" lIns="0" tIns="0" rIns="0" bIns="0" rtlCol="0" anchor="ctr"/>
           <a:lstStyle/>
           <a:p>
-            <a:pPr indent="0" marL="0">
+            <a:pPr marL="0" indent="0">
               <a:buNone/>
             </a:pPr>
             <a:r>
@@ -2979,7 +2630,7 @@
           <a:bodyPr wrap="square" lIns="0" tIns="0" rIns="0" bIns="0" rtlCol="0" anchor="ctr"/>
           <a:lstStyle/>
           <a:p>
-            <a:pPr algn="r" indent="0" marL="0">
+            <a:pPr marL="0" indent="0" algn="r">
               <a:buNone/>
             </a:pPr>
             <a:r>
@@ -3043,11 +2694,11 @@
           <a:bodyPr wrap="square" lIns="0" tIns="0" rIns="0" bIns="0" rtlCol="0" anchor="ctr"/>
           <a:lstStyle/>
           <a:p>
-            <a:pPr indent="0" marL="0">
-              <a:buNone/>
-            </a:pPr>
-            <a:r>
-              <a:rPr lang="en-US" sz="1300" spc="300" kern="0" dirty="0">
+            <a:pPr marL="0" indent="0">
+              <a:buNone/>
+            </a:pPr>
+            <a:r>
+              <a:rPr lang="en-US" sz="1300" kern="0" spc="300" dirty="0">
                 <a:solidFill>
                   <a:srgbClr val="B4552D"/>
                 </a:solidFill>
@@ -3082,7 +2733,7 @@
           <a:bodyPr wrap="square" lIns="0" tIns="0" rIns="0" bIns="0" rtlCol="0" anchor="ctr"/>
           <a:lstStyle/>
           <a:p>
-            <a:pPr indent="0" marL="0">
+            <a:pPr marL="0" indent="0">
               <a:buNone/>
             </a:pPr>
             <a:r>
@@ -3146,7 +2797,7 @@
             <a:prstDash val="solid"/>
           </a:ln>
           <a:effectLst>
-            <a:outerShdw sx="100000" sy="100000" kx="0" ky="0" algn="bl" rotWithShape="0" blurRad="177800" dist="50800" dir="5400000">
+            <a:outerShdw blurRad="177800" dist="50800" dir="5400000" algn="bl" rotWithShape="0">
               <a:srgbClr val="7E88A8">
                 <a:alpha val="30000"/>
               </a:srgbClr>
@@ -3195,7 +2846,7 @@
           <a:bodyPr wrap="square" lIns="0" tIns="0" rIns="0" bIns="0" rtlCol="0" anchor="ctr"/>
           <a:lstStyle/>
           <a:p>
-            <a:pPr algn="ctr" indent="0" marL="0">
+            <a:pPr marL="0" indent="0" algn="ctr">
               <a:buNone/>
             </a:pPr>
             <a:r>
@@ -3234,7 +2885,7 @@
           <a:bodyPr wrap="square" lIns="0" tIns="0" rIns="0" bIns="0" rtlCol="0" anchor="t"/>
           <a:lstStyle/>
           <a:p>
-            <a:pPr indent="0" marL="0">
+            <a:pPr marL="0" indent="0">
               <a:lnSpc>
                 <a:spcPct val="102000"/>
               </a:lnSpc>
@@ -3276,7 +2927,7 @@
           <a:bodyPr wrap="square" lIns="0" tIns="0" rIns="0" bIns="0" rtlCol="0" anchor="t"/>
           <a:lstStyle/>
           <a:p>
-            <a:pPr indent="0" marL="0">
+            <a:pPr marL="0" indent="0">
               <a:lnSpc>
                 <a:spcPct val="108000"/>
               </a:lnSpc>
@@ -3291,7 +2942,40 @@
                 <a:ea typeface="Segoe UI" pitchFamily="34" charset="-122"/>
                 <a:cs typeface="Segoe UI" pitchFamily="34" charset="-120"/>
               </a:rPr>
-              <a:t>С людьми, которых вы сами считаете нужными. Материалы готовим и разговор ведём мы</a:t>
+              <a:t>С людьми, которых вы сами считаете нужными. Материалы </a:t>
+            </a:r>
+            <a:r>
+              <a:rPr lang="en-US" sz="1600" dirty="0" err="1">
+                <a:solidFill>
+                  <a:srgbClr val="1B2140"/>
+                </a:solidFill>
+                <a:latin typeface="Segoe UI" pitchFamily="34" charset="0"/>
+                <a:ea typeface="Segoe UI" pitchFamily="34" charset="-122"/>
+                <a:cs typeface="Segoe UI" pitchFamily="34" charset="-120"/>
+              </a:rPr>
+              <a:t>готовим</a:t>
+            </a:r>
+            <a:r>
+              <a:rPr lang="en-US" sz="1600" dirty="0">
+                <a:solidFill>
+                  <a:srgbClr val="1B2140"/>
+                </a:solidFill>
+                <a:latin typeface="Segoe UI" pitchFamily="34" charset="0"/>
+                <a:ea typeface="Segoe UI" pitchFamily="34" charset="-122"/>
+                <a:cs typeface="Segoe UI" pitchFamily="34" charset="-120"/>
+              </a:rPr>
+              <a:t> </a:t>
+            </a:r>
+            <a:r>
+              <a:rPr lang="ru-RU" sz="1600" dirty="0">
+                <a:solidFill>
+                  <a:srgbClr val="1B2140"/>
+                </a:solidFill>
+                <a:latin typeface="Segoe UI" pitchFamily="34" charset="0"/>
+                <a:ea typeface="Segoe UI" pitchFamily="34" charset="-122"/>
+                <a:cs typeface="Segoe UI" pitchFamily="34" charset="-120"/>
+              </a:rPr>
+              <a:t>вместе, с тезисами и переговорами поможем</a:t>
             </a:r>
             <a:endParaRPr lang="en-US" sz="1600" dirty="0"/>
           </a:p>
@@ -3299,13 +2983,234 @@
       </p:sp>
       <p:sp>
         <p:nvSpPr>
-          <p:cNvPr id="10" name="Shape 8"/>
+          <p:cNvPr id="15" name="Shape 13"/>
           <p:cNvSpPr/>
           <p:nvPr/>
         </p:nvSpPr>
         <p:spPr>
           <a:xfrm>
-            <a:off x="6251296" y="1481328"/>
+            <a:off x="6251296" y="1449324"/>
+            <a:ext cx="5437480" cy="2075688"/>
+          </a:xfrm>
+          <a:prstGeom prst="roundRect">
+            <a:avLst>
+              <a:gd name="adj" fmla="val 3965"/>
+            </a:avLst>
+          </a:prstGeom>
+          <a:solidFill>
+            <a:srgbClr val="FFFFFF"/>
+          </a:solidFill>
+          <a:ln w="12700">
+            <a:solidFill>
+              <a:srgbClr val="C9D3EA"/>
+            </a:solidFill>
+            <a:prstDash val="solid"/>
+          </a:ln>
+          <a:effectLst>
+            <a:outerShdw blurRad="177800" dist="50800" dir="5400000" algn="bl" rotWithShape="0">
+              <a:srgbClr val="7E88A8">
+                <a:alpha val="30000"/>
+              </a:srgbClr>
+            </a:outerShdw>
+          </a:effectLst>
+        </p:spPr>
+      </p:sp>
+      <p:sp>
+        <p:nvSpPr>
+          <p:cNvPr id="16" name="Shape 14"/>
+          <p:cNvSpPr/>
+          <p:nvPr/>
+        </p:nvSpPr>
+        <p:spPr>
+          <a:xfrm>
+            <a:off x="6543904" y="1687068"/>
+            <a:ext cx="384048" cy="384048"/>
+          </a:xfrm>
+          <a:prstGeom prst="ellipse">
+            <a:avLst/>
+          </a:prstGeom>
+          <a:solidFill>
+            <a:srgbClr val="1E2761"/>
+          </a:solidFill>
+          <a:ln/>
+        </p:spPr>
+      </p:sp>
+      <p:sp>
+        <p:nvSpPr>
+          <p:cNvPr id="17" name="Text 15"/>
+          <p:cNvSpPr txBox="1"/>
+          <p:nvPr/>
+        </p:nvSpPr>
+        <p:spPr>
+          <a:xfrm>
+            <a:off x="6543904" y="1687068"/>
+            <a:ext cx="384048" cy="384048"/>
+          </a:xfrm>
+          <a:prstGeom prst="rect">
+            <a:avLst/>
+          </a:prstGeom>
+          <a:noFill/>
+          <a:ln/>
+        </p:spPr>
+        <p:txBody>
+          <a:bodyPr wrap="square" lIns="0" tIns="0" rIns="0" bIns="0" rtlCol="0" anchor="ctr"/>
+          <a:lstStyle/>
+          <a:p>
+            <a:pPr marL="0" indent="0" algn="ctr">
+              <a:buNone/>
+            </a:pPr>
+            <a:r>
+              <a:rPr lang="en-US" sz="1600" dirty="0">
+                <a:solidFill>
+                  <a:srgbClr val="FFFFFF"/>
+                </a:solidFill>
+                <a:latin typeface="Segoe UI Semibold" pitchFamily="34" charset="0"/>
+                <a:ea typeface="Segoe UI Semibold" pitchFamily="34" charset="-122"/>
+                <a:cs typeface="Segoe UI Semibold" pitchFamily="34" charset="-120"/>
+              </a:rPr>
+              <a:t>3</a:t>
+            </a:r>
+            <a:endParaRPr lang="en-US" sz="1600" dirty="0"/>
+          </a:p>
+        </p:txBody>
+      </p:sp>
+      <p:sp>
+        <p:nvSpPr>
+          <p:cNvPr id="18" name="Text 16"/>
+          <p:cNvSpPr txBox="1"/>
+          <p:nvPr/>
+        </p:nvSpPr>
+        <p:spPr>
+          <a:xfrm>
+            <a:off x="6543904" y="2162556"/>
+            <a:ext cx="4852264" cy="365760"/>
+          </a:xfrm>
+          <a:prstGeom prst="rect">
+            <a:avLst/>
+          </a:prstGeom>
+          <a:noFill/>
+          <a:ln/>
+        </p:spPr>
+        <p:txBody>
+          <a:bodyPr wrap="square" lIns="0" tIns="0" rIns="0" bIns="0" rtlCol="0" anchor="t"/>
+          <a:lstStyle/>
+          <a:p>
+            <a:pPr marL="0" indent="0">
+              <a:lnSpc>
+                <a:spcPct val="102000"/>
+              </a:lnSpc>
+              <a:buNone/>
+            </a:pPr>
+            <a:r>
+              <a:rPr lang="en-US" sz="2000" dirty="0">
+                <a:solidFill>
+                  <a:srgbClr val="1E2761"/>
+                </a:solidFill>
+                <a:latin typeface="Segoe UI Semibold" pitchFamily="34" charset="0"/>
+                <a:ea typeface="Segoe UI Semibold" pitchFamily="34" charset="-122"/>
+                <a:cs typeface="Segoe UI Semibold" pitchFamily="34" charset="-120"/>
+              </a:rPr>
+              <a:t>Одна задача предприятия</a:t>
+            </a:r>
+            <a:endParaRPr lang="en-US" sz="2000" dirty="0"/>
+          </a:p>
+        </p:txBody>
+      </p:sp>
+      <p:sp>
+        <p:nvSpPr>
+          <p:cNvPr id="19" name="Text 17"/>
+          <p:cNvSpPr txBox="1"/>
+          <p:nvPr/>
+        </p:nvSpPr>
+        <p:spPr>
+          <a:xfrm>
+            <a:off x="6543904" y="2601468"/>
+            <a:ext cx="4852264" cy="777240"/>
+          </a:xfrm>
+          <a:prstGeom prst="rect">
+            <a:avLst/>
+          </a:prstGeom>
+          <a:noFill/>
+          <a:ln/>
+        </p:spPr>
+        <p:txBody>
+          <a:bodyPr wrap="square" lIns="0" tIns="0" rIns="0" bIns="0" rtlCol="0" anchor="t"/>
+          <a:lstStyle/>
+          <a:p>
+            <a:pPr marL="0" indent="0">
+              <a:lnSpc>
+                <a:spcPct val="108000"/>
+              </a:lnSpc>
+              <a:buNone/>
+            </a:pPr>
+            <a:r>
+              <a:rPr lang="en-US" sz="1600" dirty="0">
+                <a:solidFill>
+                  <a:srgbClr val="1B2140"/>
+                </a:solidFill>
+                <a:latin typeface="Segoe UI" pitchFamily="34" charset="0"/>
+                <a:ea typeface="Segoe UI" pitchFamily="34" charset="-122"/>
+                <a:cs typeface="Segoe UI" pitchFamily="34" charset="-120"/>
+              </a:rPr>
+              <a:t>Берём в работу и показываем </a:t>
+            </a:r>
+            <a:r>
+              <a:rPr lang="en-US" sz="1600" dirty="0" err="1">
+                <a:solidFill>
+                  <a:srgbClr val="1B2140"/>
+                </a:solidFill>
+                <a:latin typeface="Segoe UI" pitchFamily="34" charset="0"/>
+                <a:ea typeface="Segoe UI" pitchFamily="34" charset="-122"/>
+                <a:cs typeface="Segoe UI" pitchFamily="34" charset="-120"/>
+              </a:rPr>
+              <a:t>результат</a:t>
+            </a:r>
+            <a:r>
+              <a:rPr lang="en-US" sz="1600" dirty="0">
+                <a:solidFill>
+                  <a:srgbClr val="1B2140"/>
+                </a:solidFill>
+                <a:latin typeface="Segoe UI" pitchFamily="34" charset="0"/>
+                <a:ea typeface="Segoe UI" pitchFamily="34" charset="-122"/>
+                <a:cs typeface="Segoe UI" pitchFamily="34" charset="-120"/>
+              </a:rPr>
+              <a:t> </a:t>
+            </a:r>
+            <a:r>
+              <a:rPr lang="en-US" sz="1600" dirty="0" err="1">
+                <a:solidFill>
+                  <a:srgbClr val="1B2140"/>
+                </a:solidFill>
+                <a:latin typeface="Segoe UI" pitchFamily="34" charset="0"/>
+                <a:ea typeface="Segoe UI" pitchFamily="34" charset="-122"/>
+                <a:cs typeface="Segoe UI" pitchFamily="34" charset="-120"/>
+              </a:rPr>
+              <a:t>подбора</a:t>
+            </a:r>
+            <a:r>
+              <a:rPr lang="ru-RU" sz="1600" dirty="0">
+                <a:solidFill>
+                  <a:srgbClr val="1B2140"/>
+                </a:solidFill>
+                <a:latin typeface="Segoe UI" pitchFamily="34" charset="0"/>
+                <a:ea typeface="Segoe UI" pitchFamily="34" charset="-122"/>
+                <a:cs typeface="Segoe UI" pitchFamily="34" charset="-120"/>
+              </a:rPr>
+              <a:t> + прорабатываем варианты сделок</a:t>
+            </a:r>
+            <a:endParaRPr lang="en-US" sz="1600" dirty="0"/>
+          </a:p>
+        </p:txBody>
+      </p:sp>
+      <p:sp>
+        <p:nvSpPr>
+          <p:cNvPr id="20" name="Shape 18"/>
+          <p:cNvSpPr/>
+          <p:nvPr/>
+        </p:nvSpPr>
+        <p:spPr>
+          <a:xfrm>
+            <a:off x="3377260" y="3939703"/>
             <a:ext cx="5437480" cy="2075688"/>
           </a:xfrm>
           <a:prstGeom prst="roundRect">
@@ -3323,23 +3228,30 @@
             <a:prstDash val="solid"/>
           </a:ln>
           <a:effectLst>
-            <a:outerShdw sx="100000" sy="100000" kx="0" ky="0" algn="bl" rotWithShape="0" blurRad="177800" dist="50800" dir="5400000">
+            <a:outerShdw blurRad="177800" dist="50800" dir="5400000" algn="bl" rotWithShape="0">
               <a:srgbClr val="7E88A8">
                 <a:alpha val="30000"/>
               </a:srgbClr>
             </a:outerShdw>
           </a:effectLst>
         </p:spPr>
-      </p:sp>
-      <p:sp>
-        <p:nvSpPr>
-          <p:cNvPr id="11" name="Shape 9"/>
+        <p:txBody>
+          <a:bodyPr/>
+          <a:lstStyle/>
+          <a:p>
+            <a:endParaRPr lang="ru-RU"/>
+          </a:p>
+        </p:txBody>
+      </p:sp>
+      <p:sp>
+        <p:nvSpPr>
+          <p:cNvPr id="21" name="Shape 19"/>
           <p:cNvSpPr/>
           <p:nvPr/>
         </p:nvSpPr>
         <p:spPr>
           <a:xfrm>
-            <a:off x="6543904" y="1719072"/>
+            <a:off x="3669868" y="4177447"/>
             <a:ext cx="384048" cy="384048"/>
           </a:xfrm>
           <a:prstGeom prst="ellipse">
@@ -3353,13 +3265,13 @@
       </p:sp>
       <p:sp>
         <p:nvSpPr>
-          <p:cNvPr id="12" name="Text 10"/>
-          <p:cNvSpPr txBox="1"/>
-          <p:nvPr/>
-        </p:nvSpPr>
-        <p:spPr>
-          <a:xfrm>
-            <a:off x="6543904" y="1719072"/>
+          <p:cNvPr id="22" name="Text 20"/>
+          <p:cNvSpPr txBox="1"/>
+          <p:nvPr/>
+        </p:nvSpPr>
+        <p:spPr>
+          <a:xfrm>
+            <a:off x="3669868" y="4177447"/>
             <a:ext cx="384048" cy="384048"/>
           </a:xfrm>
           <a:prstGeom prst="rect">
@@ -3372,34 +3284,75 @@
           <a:bodyPr wrap="square" lIns="0" tIns="0" rIns="0" bIns="0" rtlCol="0" anchor="ctr"/>
           <a:lstStyle/>
           <a:p>
-            <a:pPr algn="ctr" indent="0" marL="0">
-              <a:buNone/>
-            </a:pPr>
-            <a:r>
-              <a:rPr lang="en-US" sz="1600" dirty="0">
+            <a:pPr marL="0" indent="0" algn="ctr">
+              <a:buNone/>
+            </a:pPr>
+            <a:r>
+              <a:rPr lang="ru-RU" sz="1600" dirty="0">
                 <a:solidFill>
                   <a:srgbClr val="FFFFFF"/>
+                </a:solidFill>
+                <a:latin typeface="Segoe UI Semibold" pitchFamily="34" charset="0"/>
+                <a:cs typeface="Segoe UI Semibold" pitchFamily="34" charset="-120"/>
+              </a:rPr>
+              <a:t>3</a:t>
+            </a:r>
+            <a:endParaRPr lang="en-US" sz="1600" dirty="0"/>
+          </a:p>
+        </p:txBody>
+      </p:sp>
+      <p:sp>
+        <p:nvSpPr>
+          <p:cNvPr id="23" name="Text 21"/>
+          <p:cNvSpPr txBox="1"/>
+          <p:nvPr/>
+        </p:nvSpPr>
+        <p:spPr>
+          <a:xfrm>
+            <a:off x="3669868" y="4652935"/>
+            <a:ext cx="4852264" cy="365760"/>
+          </a:xfrm>
+          <a:prstGeom prst="rect">
+            <a:avLst/>
+          </a:prstGeom>
+          <a:noFill/>
+          <a:ln/>
+        </p:spPr>
+        <p:txBody>
+          <a:bodyPr wrap="square" lIns="0" tIns="0" rIns="0" bIns="0" rtlCol="0" anchor="t"/>
+          <a:lstStyle/>
+          <a:p>
+            <a:pPr marL="0" indent="0">
+              <a:lnSpc>
+                <a:spcPct val="102000"/>
+              </a:lnSpc>
+              <a:buNone/>
+            </a:pPr>
+            <a:r>
+              <a:rPr lang="ru-RU" sz="2000" dirty="0">
+                <a:solidFill>
+                  <a:srgbClr val="1E2761"/>
                 </a:solidFill>
                 <a:latin typeface="Segoe UI Semibold" pitchFamily="34" charset="0"/>
                 <a:ea typeface="Segoe UI Semibold" pitchFamily="34" charset="-122"/>
                 <a:cs typeface="Segoe UI Semibold" pitchFamily="34" charset="-120"/>
               </a:rPr>
-              <a:t>2</a:t>
-            </a:r>
-            <a:endParaRPr lang="en-US" sz="1600" dirty="0"/>
-          </a:p>
-        </p:txBody>
-      </p:sp>
-      <p:sp>
-        <p:nvSpPr>
-          <p:cNvPr id="13" name="Text 11"/>
-          <p:cNvSpPr txBox="1"/>
-          <p:nvPr/>
-        </p:nvSpPr>
-        <p:spPr>
-          <a:xfrm>
-            <a:off x="6543904" y="2194560"/>
-            <a:ext cx="4852264" cy="365760"/>
+              <a:t>Оцениваем, решаем</a:t>
+            </a:r>
+            <a:endParaRPr lang="en-US" sz="2000" dirty="0"/>
+          </a:p>
+        </p:txBody>
+      </p:sp>
+      <p:sp>
+        <p:nvSpPr>
+          <p:cNvPr id="24" name="Text 22"/>
+          <p:cNvSpPr txBox="1"/>
+          <p:nvPr/>
+        </p:nvSpPr>
+        <p:spPr>
+          <a:xfrm>
+            <a:off x="3669868" y="5091847"/>
+            <a:ext cx="4852264" cy="777240"/>
           </a:xfrm>
           <a:prstGeom prst="rect">
             <a:avLst/>
@@ -3411,49 +3364,7 @@
           <a:bodyPr wrap="square" lIns="0" tIns="0" rIns="0" bIns="0" rtlCol="0" anchor="t"/>
           <a:lstStyle/>
           <a:p>
-            <a:pPr indent="0" marL="0">
-              <a:lnSpc>
-                <a:spcPct val="102000"/>
-              </a:lnSpc>
-              <a:buNone/>
-            </a:pPr>
-            <a:r>
-              <a:rPr lang="en-US" sz="2000" dirty="0">
-                <a:solidFill>
-                  <a:srgbClr val="1E2761"/>
-                </a:solidFill>
-                <a:latin typeface="Segoe UI Semibold" pitchFamily="34" charset="0"/>
-                <a:ea typeface="Segoe UI Semibold" pitchFamily="34" charset="-122"/>
-                <a:cs typeface="Segoe UI Semibold" pitchFamily="34" charset="-120"/>
-              </a:rPr>
-              <a:t>Ваше присутствие</a:t>
-            </a:r>
-            <a:endParaRPr lang="en-US" sz="2000" dirty="0"/>
-          </a:p>
-        </p:txBody>
-      </p:sp>
-      <p:sp>
-        <p:nvSpPr>
-          <p:cNvPr id="14" name="Text 12"/>
-          <p:cNvSpPr txBox="1"/>
-          <p:nvPr/>
-        </p:nvSpPr>
-        <p:spPr>
-          <a:xfrm>
-            <a:off x="6543904" y="2633472"/>
-            <a:ext cx="4852264" cy="777240"/>
-          </a:xfrm>
-          <a:prstGeom prst="rect">
-            <a:avLst/>
-          </a:prstGeom>
-          <a:noFill/>
-          <a:ln/>
-        </p:spPr>
-        <p:txBody>
-          <a:bodyPr wrap="square" lIns="0" tIns="0" rIns="0" bIns="0" rtlCol="0" anchor="t"/>
-          <a:lstStyle/>
-          <a:p>
-            <a:pPr indent="0" marL="0">
+            <a:pPr marL="0" indent="0">
               <a:lnSpc>
                 <a:spcPct val="108000"/>
               </a:lnSpc>
@@ -3468,176 +3379,10 @@
                 <a:ea typeface="Segoe UI" pitchFamily="34" charset="-122"/>
                 <a:cs typeface="Segoe UI" pitchFamily="34" charset="-120"/>
               </a:rPr>
-              <a:t>Важнее любого доклада с вашей стороны</a:t>
-            </a:r>
-            <a:endParaRPr lang="en-US" sz="1600" dirty="0"/>
-          </a:p>
-        </p:txBody>
-      </p:sp>
-      <p:sp>
-        <p:nvSpPr>
-          <p:cNvPr id="15" name="Shape 13"/>
-          <p:cNvSpPr/>
-          <p:nvPr/>
-        </p:nvSpPr>
-        <p:spPr>
-          <a:xfrm>
-            <a:off x="502920" y="3867912"/>
-            <a:ext cx="5437480" cy="2075688"/>
-          </a:xfrm>
-          <a:prstGeom prst="roundRect">
-            <a:avLst>
-              <a:gd name="adj" fmla="val 3965"/>
-            </a:avLst>
-          </a:prstGeom>
-          <a:solidFill>
-            <a:srgbClr val="FFFFFF"/>
-          </a:solidFill>
-          <a:ln w="12700">
-            <a:solidFill>
-              <a:srgbClr val="C9D3EA"/>
-            </a:solidFill>
-            <a:prstDash val="solid"/>
-          </a:ln>
-          <a:effectLst>
-            <a:outerShdw sx="100000" sy="100000" kx="0" ky="0" algn="bl" rotWithShape="0" blurRad="177800" dist="50800" dir="5400000">
-              <a:srgbClr val="7E88A8">
-                <a:alpha val="30000"/>
-              </a:srgbClr>
-            </a:outerShdw>
-          </a:effectLst>
-        </p:spPr>
-      </p:sp>
-      <p:sp>
-        <p:nvSpPr>
-          <p:cNvPr id="16" name="Shape 14"/>
-          <p:cNvSpPr/>
-          <p:nvPr/>
-        </p:nvSpPr>
-        <p:spPr>
-          <a:xfrm>
-            <a:off x="795528" y="4105656"/>
-            <a:ext cx="384048" cy="384048"/>
-          </a:xfrm>
-          <a:prstGeom prst="ellipse">
-            <a:avLst/>
-          </a:prstGeom>
-          <a:solidFill>
-            <a:srgbClr val="1E2761"/>
-          </a:solidFill>
-          <a:ln/>
-        </p:spPr>
-      </p:sp>
-      <p:sp>
-        <p:nvSpPr>
-          <p:cNvPr id="17" name="Text 15"/>
-          <p:cNvSpPr txBox="1"/>
-          <p:nvPr/>
-        </p:nvSpPr>
-        <p:spPr>
-          <a:xfrm>
-            <a:off x="795528" y="4105656"/>
-            <a:ext cx="384048" cy="384048"/>
-          </a:xfrm>
-          <a:prstGeom prst="rect">
-            <a:avLst/>
-          </a:prstGeom>
-          <a:noFill/>
-          <a:ln/>
-        </p:spPr>
-        <p:txBody>
-          <a:bodyPr wrap="square" lIns="0" tIns="0" rIns="0" bIns="0" rtlCol="0" anchor="ctr"/>
-          <a:lstStyle/>
-          <a:p>
-            <a:pPr algn="ctr" indent="0" marL="0">
-              <a:buNone/>
-            </a:pPr>
-            <a:r>
-              <a:rPr lang="en-US" sz="1600" dirty="0">
-                <a:solidFill>
-                  <a:srgbClr val="FFFFFF"/>
-                </a:solidFill>
-                <a:latin typeface="Segoe UI Semibold" pitchFamily="34" charset="0"/>
-                <a:ea typeface="Segoe UI Semibold" pitchFamily="34" charset="-122"/>
-                <a:cs typeface="Segoe UI Semibold" pitchFamily="34" charset="-120"/>
-              </a:rPr>
-              <a:t>3</a:t>
-            </a:r>
-            <a:endParaRPr lang="en-US" sz="1600" dirty="0"/>
-          </a:p>
-        </p:txBody>
-      </p:sp>
-      <p:sp>
-        <p:nvSpPr>
-          <p:cNvPr id="18" name="Text 16"/>
-          <p:cNvSpPr txBox="1"/>
-          <p:nvPr/>
-        </p:nvSpPr>
-        <p:spPr>
-          <a:xfrm>
-            <a:off x="795528" y="4581144"/>
-            <a:ext cx="4852264" cy="365760"/>
-          </a:xfrm>
-          <a:prstGeom prst="rect">
-            <a:avLst/>
-          </a:prstGeom>
-          <a:noFill/>
-          <a:ln/>
-        </p:spPr>
-        <p:txBody>
-          <a:bodyPr wrap="square" lIns="0" tIns="0" rIns="0" bIns="0" rtlCol="0" anchor="t"/>
-          <a:lstStyle/>
-          <a:p>
-            <a:pPr indent="0" marL="0">
-              <a:lnSpc>
-                <a:spcPct val="102000"/>
-              </a:lnSpc>
-              <a:buNone/>
-            </a:pPr>
-            <a:r>
-              <a:rPr lang="en-US" sz="2000" dirty="0">
-                <a:solidFill>
-                  <a:srgbClr val="1E2761"/>
-                </a:solidFill>
-                <a:latin typeface="Segoe UI Semibold" pitchFamily="34" charset="0"/>
-                <a:ea typeface="Segoe UI Semibold" pitchFamily="34" charset="-122"/>
-                <a:cs typeface="Segoe UI Semibold" pitchFamily="34" charset="-120"/>
-              </a:rPr>
-              <a:t>Одна задача предприятия</a:t>
-            </a:r>
-            <a:endParaRPr lang="en-US" sz="2000" dirty="0"/>
-          </a:p>
-        </p:txBody>
-      </p:sp>
-      <p:sp>
-        <p:nvSpPr>
-          <p:cNvPr id="19" name="Text 17"/>
-          <p:cNvSpPr txBox="1"/>
-          <p:nvPr/>
-        </p:nvSpPr>
-        <p:spPr>
-          <a:xfrm>
-            <a:off x="795528" y="5020056"/>
-            <a:ext cx="4852264" cy="777240"/>
-          </a:xfrm>
-          <a:prstGeom prst="rect">
-            <a:avLst/>
-          </a:prstGeom>
-          <a:noFill/>
-          <a:ln/>
-        </p:spPr>
-        <p:txBody>
-          <a:bodyPr wrap="square" lIns="0" tIns="0" rIns="0" bIns="0" rtlCol="0" anchor="t"/>
-          <a:lstStyle/>
-          <a:p>
-            <a:pPr indent="0" marL="0">
-              <a:lnSpc>
-                <a:spcPct val="108000"/>
-              </a:lnSpc>
-              <a:buNone/>
-            </a:pPr>
-            <a:r>
-              <a:rPr lang="en-US" sz="1600" dirty="0">
+              <a:t>Не </a:t>
+            </a:r>
+            <a:r>
+              <a:rPr lang="en-US" sz="1600" dirty="0" err="1">
                 <a:solidFill>
                   <a:srgbClr val="1B2140"/>
                 </a:solidFill>
@@ -3645,174 +3390,8 @@
                 <a:ea typeface="Segoe UI" pitchFamily="34" charset="-122"/>
                 <a:cs typeface="Segoe UI" pitchFamily="34" charset="-120"/>
               </a:rPr>
-              <a:t>Берём в работу и показываем результат подбора</a:t>
-            </a:r>
-            <a:endParaRPr lang="en-US" sz="1600" dirty="0"/>
-          </a:p>
-        </p:txBody>
-      </p:sp>
-      <p:sp>
-        <p:nvSpPr>
-          <p:cNvPr id="20" name="Shape 18"/>
-          <p:cNvSpPr/>
-          <p:nvPr/>
-        </p:nvSpPr>
-        <p:spPr>
-          <a:xfrm>
-            <a:off x="6251296" y="3867912"/>
-            <a:ext cx="5437480" cy="2075688"/>
-          </a:xfrm>
-          <a:prstGeom prst="roundRect">
-            <a:avLst>
-              <a:gd name="adj" fmla="val 3965"/>
-            </a:avLst>
-          </a:prstGeom>
-          <a:solidFill>
-            <a:srgbClr val="FFFFFF"/>
-          </a:solidFill>
-          <a:ln w="22225">
-            <a:solidFill>
-              <a:srgbClr val="B4552D"/>
-            </a:solidFill>
-            <a:prstDash val="solid"/>
-          </a:ln>
-          <a:effectLst>
-            <a:outerShdw sx="100000" sy="100000" kx="0" ky="0" algn="bl" rotWithShape="0" blurRad="177800" dist="50800" dir="5400000">
-              <a:srgbClr val="7E88A8">
-                <a:alpha val="30000"/>
-              </a:srgbClr>
-            </a:outerShdw>
-          </a:effectLst>
-        </p:spPr>
-      </p:sp>
-      <p:sp>
-        <p:nvSpPr>
-          <p:cNvPr id="21" name="Shape 19"/>
-          <p:cNvSpPr/>
-          <p:nvPr/>
-        </p:nvSpPr>
-        <p:spPr>
-          <a:xfrm>
-            <a:off x="6543904" y="4105656"/>
-            <a:ext cx="384048" cy="384048"/>
-          </a:xfrm>
-          <a:prstGeom prst="ellipse">
-            <a:avLst/>
-          </a:prstGeom>
-          <a:solidFill>
-            <a:srgbClr val="B4552D"/>
-          </a:solidFill>
-          <a:ln/>
-        </p:spPr>
-      </p:sp>
-      <p:sp>
-        <p:nvSpPr>
-          <p:cNvPr id="22" name="Text 20"/>
-          <p:cNvSpPr txBox="1"/>
-          <p:nvPr/>
-        </p:nvSpPr>
-        <p:spPr>
-          <a:xfrm>
-            <a:off x="6543904" y="4105656"/>
-            <a:ext cx="384048" cy="384048"/>
-          </a:xfrm>
-          <a:prstGeom prst="rect">
-            <a:avLst/>
-          </a:prstGeom>
-          <a:noFill/>
-          <a:ln/>
-        </p:spPr>
-        <p:txBody>
-          <a:bodyPr wrap="square" lIns="0" tIns="0" rIns="0" bIns="0" rtlCol="0" anchor="ctr"/>
-          <a:lstStyle/>
-          <a:p>
-            <a:pPr algn="ctr" indent="0" marL="0">
-              <a:buNone/>
-            </a:pPr>
-            <a:r>
-              <a:rPr lang="en-US" sz="1600" dirty="0">
-                <a:solidFill>
-                  <a:srgbClr val="FFFFFF"/>
-                </a:solidFill>
-                <a:latin typeface="Segoe UI Semibold" pitchFamily="34" charset="0"/>
-                <a:ea typeface="Segoe UI Semibold" pitchFamily="34" charset="-122"/>
-                <a:cs typeface="Segoe UI Semibold" pitchFamily="34" charset="-120"/>
-              </a:rPr>
-              <a:t>4</a:t>
-            </a:r>
-            <a:endParaRPr lang="en-US" sz="1600" dirty="0"/>
-          </a:p>
-        </p:txBody>
-      </p:sp>
-      <p:sp>
-        <p:nvSpPr>
-          <p:cNvPr id="23" name="Text 21"/>
-          <p:cNvSpPr txBox="1"/>
-          <p:nvPr/>
-        </p:nvSpPr>
-        <p:spPr>
-          <a:xfrm>
-            <a:off x="6543904" y="4581144"/>
-            <a:ext cx="4852264" cy="365760"/>
-          </a:xfrm>
-          <a:prstGeom prst="rect">
-            <a:avLst/>
-          </a:prstGeom>
-          <a:noFill/>
-          <a:ln/>
-        </p:spPr>
-        <p:txBody>
-          <a:bodyPr wrap="square" lIns="0" tIns="0" rIns="0" bIns="0" rtlCol="0" anchor="t"/>
-          <a:lstStyle/>
-          <a:p>
-            <a:pPr indent="0" marL="0">
-              <a:lnSpc>
-                <a:spcPct val="102000"/>
-              </a:lnSpc>
-              <a:buNone/>
-            </a:pPr>
-            <a:r>
-              <a:rPr lang="en-US" sz="2000" dirty="0">
-                <a:solidFill>
-                  <a:srgbClr val="1E2761"/>
-                </a:solidFill>
-                <a:latin typeface="Segoe UI Semibold" pitchFamily="34" charset="0"/>
-                <a:ea typeface="Segoe UI Semibold" pitchFamily="34" charset="-122"/>
-                <a:cs typeface="Segoe UI Semibold" pitchFamily="34" charset="-120"/>
-              </a:rPr>
-              <a:t>Дальше решаете вы</a:t>
-            </a:r>
-            <a:endParaRPr lang="en-US" sz="2000" dirty="0"/>
-          </a:p>
-        </p:txBody>
-      </p:sp>
-      <p:sp>
-        <p:nvSpPr>
-          <p:cNvPr id="24" name="Text 22"/>
-          <p:cNvSpPr txBox="1"/>
-          <p:nvPr/>
-        </p:nvSpPr>
-        <p:spPr>
-          <a:xfrm>
-            <a:off x="6543904" y="5020056"/>
-            <a:ext cx="4852264" cy="777240"/>
-          </a:xfrm>
-          <a:prstGeom prst="rect">
-            <a:avLst/>
-          </a:prstGeom>
-          <a:noFill/>
-          <a:ln/>
-        </p:spPr>
-        <p:txBody>
-          <a:bodyPr wrap="square" lIns="0" tIns="0" rIns="0" bIns="0" rtlCol="0" anchor="t"/>
-          <a:lstStyle/>
-          <a:p>
-            <a:pPr indent="0" marL="0">
-              <a:lnSpc>
-                <a:spcPct val="108000"/>
-              </a:lnSpc>
-              <a:buNone/>
-            </a:pPr>
+              <a:t>увидели</a:t>
+            </a:r>
             <a:r>
               <a:rPr lang="en-US" sz="1600" dirty="0">
                 <a:solidFill>
@@ -3822,164 +3401,55 @@
                 <a:ea typeface="Segoe UI" pitchFamily="34" charset="-122"/>
                 <a:cs typeface="Segoe UI" pitchFamily="34" charset="-120"/>
               </a:rPr>
-              <a:t>Не увидели смысла — расходимся без обязательств</a:t>
-            </a:r>
-            <a:endParaRPr lang="en-US" sz="1600" dirty="0"/>
-          </a:p>
-        </p:txBody>
-      </p:sp>
-      <p:sp>
-        <p:nvSpPr>
-          <p:cNvPr id="25" name="Text 23"/>
-          <p:cNvSpPr txBox="1"/>
-          <p:nvPr/>
-        </p:nvSpPr>
-        <p:spPr>
-          <a:xfrm>
-            <a:off x="502920" y="6053328"/>
-            <a:ext cx="11185855" cy="329184"/>
-          </a:xfrm>
-          <a:prstGeom prst="rect">
-            <a:avLst/>
-          </a:prstGeom>
-          <a:noFill/>
-          <a:ln/>
-        </p:spPr>
-        <p:txBody>
-          <a:bodyPr wrap="square" lIns="0" tIns="0" rIns="0" bIns="0" rtlCol="0" anchor="ctr"/>
-          <a:lstStyle/>
-          <a:p>
-            <a:pPr indent="0" marL="0">
-              <a:buNone/>
-            </a:pPr>
-            <a:r>
-              <a:rPr lang="en-US" sz="1600" i="1" dirty="0">
-                <a:solidFill>
-                  <a:srgbClr val="6B7699"/>
+              <a:t> </a:t>
+            </a:r>
+            <a:r>
+              <a:rPr lang="en-US" sz="1600" dirty="0" err="1">
+                <a:solidFill>
+                  <a:srgbClr val="1B2140"/>
                 </a:solidFill>
                 <a:latin typeface="Segoe UI" pitchFamily="34" charset="0"/>
                 <a:ea typeface="Segoe UI" pitchFamily="34" charset="-122"/>
                 <a:cs typeface="Segoe UI" pitchFamily="34" charset="-120"/>
               </a:rPr>
-              <a:t>Планов по звонкам, отчётности и часов в неделю не будет</a:t>
-            </a:r>
-            <a:endParaRPr lang="en-US" sz="1600" dirty="0"/>
-          </a:p>
-        </p:txBody>
-      </p:sp>
-      <p:sp>
-        <p:nvSpPr>
-          <p:cNvPr id="26" name="Text 24"/>
-          <p:cNvSpPr txBox="1"/>
-          <p:nvPr/>
-        </p:nvSpPr>
-        <p:spPr>
-          <a:xfrm>
-            <a:off x="502920" y="6473952"/>
-            <a:ext cx="1828800" cy="274320"/>
-          </a:xfrm>
-          <a:prstGeom prst="rect">
-            <a:avLst/>
-          </a:prstGeom>
-          <a:noFill/>
-          <a:ln/>
-        </p:spPr>
-        <p:txBody>
-          <a:bodyPr wrap="square" lIns="0" tIns="0" rIns="0" bIns="0" rtlCol="0" anchor="ctr"/>
-          <a:lstStyle/>
-          <a:p>
-            <a:pPr indent="0" marL="0">
-              <a:buNone/>
-            </a:pPr>
-            <a:r>
-              <a:rPr lang="en-US" sz="1200" dirty="0">
-                <a:solidFill>
-                  <a:srgbClr val="6B7699"/>
+              <a:t>смысла</a:t>
+            </a:r>
+            <a:r>
+              <a:rPr lang="ru-RU" sz="1600" dirty="0">
+                <a:solidFill>
+                  <a:srgbClr val="1B2140"/>
                 </a:solidFill>
                 <a:latin typeface="Segoe UI" pitchFamily="34" charset="0"/>
                 <a:ea typeface="Segoe UI" pitchFamily="34" charset="-122"/>
                 <a:cs typeface="Segoe UI" pitchFamily="34" charset="-120"/>
               </a:rPr>
-              <a:t>Ситалл</a:t>
-            </a:r>
-            <a:endParaRPr lang="en-US" sz="1200" dirty="0"/>
-          </a:p>
-        </p:txBody>
-      </p:sp>
-      <p:sp>
-        <p:nvSpPr>
-          <p:cNvPr id="27" name="Text 25"/>
-          <p:cNvSpPr txBox="1"/>
-          <p:nvPr/>
-        </p:nvSpPr>
-        <p:spPr>
-          <a:xfrm>
-            <a:off x="10774375" y="6473952"/>
-            <a:ext cx="914400" cy="274320"/>
-          </a:xfrm>
-          <a:prstGeom prst="rect">
-            <a:avLst/>
-          </a:prstGeom>
-          <a:noFill/>
-          <a:ln/>
-        </p:spPr>
-        <p:txBody>
-          <a:bodyPr wrap="square" lIns="0" tIns="0" rIns="0" bIns="0" rtlCol="0" anchor="ctr"/>
-          <a:lstStyle/>
-          <a:p>
-            <a:pPr algn="r" indent="0" marL="0">
-              <a:buNone/>
-            </a:pPr>
-            <a:r>
-              <a:rPr lang="en-US" sz="1200" dirty="0">
-                <a:solidFill>
-                  <a:srgbClr val="6B7699"/>
+              <a:t>, разойдёмся</a:t>
+            </a:r>
+            <a:r>
+              <a:rPr lang="en-US" sz="1600" dirty="0">
+                <a:solidFill>
+                  <a:srgbClr val="1B2140"/>
                 </a:solidFill>
                 <a:latin typeface="Segoe UI" pitchFamily="34" charset="0"/>
                 <a:ea typeface="Segoe UI" pitchFamily="34" charset="-122"/>
                 <a:cs typeface="Segoe UI" pitchFamily="34" charset="-120"/>
               </a:rPr>
-              <a:t>11 / 12</a:t>
-            </a:r>
-            <a:endParaRPr lang="en-US" sz="1200" dirty="0"/>
-          </a:p>
-        </p:txBody>
-      </p:sp>
-    </p:spTree>
-  </p:cSld>
-  <p:clrMapOvr>
-    <a:masterClrMapping/>
-  </p:clrMapOvr>
-</p:sld>
-</file>
-
-<file path=ppt/slides/slide12.xml><?xml version="1.0" encoding="utf-8"?>
-<p:sld xmlns:a="http://schemas.openxmlformats.org/drawingml/2006/main" xmlns:r="http://schemas.openxmlformats.org/officeDocument/2006/relationships" xmlns:p="http://schemas.openxmlformats.org/presentationml/2006/main">
-  <p:cSld name="Slide 12">
-    <p:spTree>
-      <p:nvGrpSpPr>
-        <p:cNvPr id="1" name=""/>
-        <p:cNvGrpSpPr/>
-        <p:nvPr/>
-      </p:nvGrpSpPr>
-      <p:grpSpPr>
-        <a:xfrm>
-          <a:off x="0" y="0"/>
-          <a:ext cx="0" cy="0"/>
-          <a:chOff x="0" y="0"/>
-          <a:chExt cx="0" cy="0"/>
-        </a:xfrm>
-      </p:grpSpPr>
-      <p:sp>
-        <p:nvSpPr>
-          <p:cNvPr id="2" name="Text 0"/>
-          <p:cNvSpPr txBox="1"/>
-          <p:nvPr/>
-        </p:nvSpPr>
-        <p:spPr>
-          <a:xfrm>
-            <a:off x="502920" y="219456"/>
-            <a:ext cx="11185855" cy="274320"/>
+              <a:t> без обязательств</a:t>
+            </a:r>
+            <a:endParaRPr lang="en-US" sz="1600" dirty="0"/>
+          </a:p>
+        </p:txBody>
+      </p:sp>
+      <p:sp>
+        <p:nvSpPr>
+          <p:cNvPr id="26" name="Text 24"/>
+          <p:cNvSpPr txBox="1"/>
+          <p:nvPr/>
+        </p:nvSpPr>
+        <p:spPr>
+          <a:xfrm>
+            <a:off x="502920" y="6473952"/>
+            <a:ext cx="1828800" cy="274320"/>
           </a:xfrm>
           <a:prstGeom prst="rect">
             <a:avLst/>
@@ -3991,228 +3461,34 @@
           <a:bodyPr wrap="square" lIns="0" tIns="0" rIns="0" bIns="0" rtlCol="0" anchor="ctr"/>
           <a:lstStyle/>
           <a:p>
-            <a:pPr indent="0" marL="0">
-              <a:buNone/>
-            </a:pPr>
-            <a:r>
-              <a:rPr lang="en-US" sz="1300" spc="300" kern="0" dirty="0">
-                <a:solidFill>
-                  <a:srgbClr val="B4552D"/>
-                </a:solidFill>
-                <a:latin typeface="Segoe UI Semibold" pitchFamily="34" charset="0"/>
-                <a:ea typeface="Segoe UI Semibold" pitchFamily="34" charset="-122"/>
-                <a:cs typeface="Segoe UI Semibold" pitchFamily="34" charset="-120"/>
-              </a:rPr>
-              <a:t>ПОЧЕМУ СЕЙЧАС</a:t>
-            </a:r>
-            <a:endParaRPr lang="en-US" sz="1300" dirty="0"/>
-          </a:p>
-        </p:txBody>
-      </p:sp>
-      <p:sp>
-        <p:nvSpPr>
-          <p:cNvPr id="3" name="Text 1"/>
-          <p:cNvSpPr txBox="1"/>
-          <p:nvPr/>
-        </p:nvSpPr>
-        <p:spPr>
-          <a:xfrm>
-            <a:off x="484632" y="512064"/>
-            <a:ext cx="11185855" cy="566928"/>
-          </a:xfrm>
-          <a:prstGeom prst="rect">
-            <a:avLst/>
-          </a:prstGeom>
-          <a:noFill/>
-          <a:ln/>
-        </p:spPr>
-        <p:txBody>
-          <a:bodyPr wrap="square" lIns="0" tIns="0" rIns="0" bIns="0" rtlCol="0" anchor="ctr"/>
-          <a:lstStyle/>
-          <a:p>
-            <a:pPr indent="0" marL="0">
-              <a:buNone/>
-            </a:pPr>
-            <a:r>
-              <a:rPr lang="en-US" sz="2700" dirty="0">
-                <a:solidFill>
-                  <a:srgbClr val="1E2761"/>
-                </a:solidFill>
-                <a:latin typeface="Segoe UI Semibold" pitchFamily="34" charset="0"/>
-                <a:ea typeface="Segoe UI Semibold" pitchFamily="34" charset="-122"/>
-                <a:cs typeface="Segoe UI Semibold" pitchFamily="34" charset="-120"/>
-              </a:rPr>
-              <a:t>Место рядом ещё свободно</a:t>
-            </a:r>
-            <a:endParaRPr lang="en-US" sz="2700" dirty="0"/>
-          </a:p>
-        </p:txBody>
-      </p:sp>
-      <p:sp>
-        <p:nvSpPr>
-          <p:cNvPr id="4" name="Shape 2"/>
-          <p:cNvSpPr/>
-          <p:nvPr/>
-        </p:nvSpPr>
-        <p:spPr>
-          <a:xfrm>
-            <a:off x="502920" y="1133856"/>
-            <a:ext cx="1097280" cy="64008"/>
-          </a:xfrm>
-          <a:prstGeom prst="rect">
-            <a:avLst/>
-          </a:prstGeom>
-          <a:solidFill>
-            <a:srgbClr val="B4552D"/>
-          </a:solidFill>
-          <a:ln/>
-        </p:spPr>
-      </p:sp>
-      <p:sp>
-        <p:nvSpPr>
-          <p:cNvPr id="5" name="Shape 3"/>
-          <p:cNvSpPr/>
-          <p:nvPr/>
-        </p:nvSpPr>
-        <p:spPr>
-          <a:xfrm>
-            <a:off x="502920" y="1481328"/>
-            <a:ext cx="5394960" cy="2286000"/>
-          </a:xfrm>
-          <a:prstGeom prst="roundRect">
-            <a:avLst>
-              <a:gd name="adj" fmla="val 3600"/>
-            </a:avLst>
-          </a:prstGeom>
-          <a:solidFill>
-            <a:srgbClr val="FFFFFF"/>
-          </a:solidFill>
-          <a:ln w="22225">
-            <a:solidFill>
-              <a:srgbClr val="B4552D"/>
-            </a:solidFill>
-            <a:prstDash val="solid"/>
-          </a:ln>
-          <a:effectLst>
-            <a:outerShdw sx="100000" sy="100000" kx="0" ky="0" algn="bl" rotWithShape="0" blurRad="177800" dist="50800" dir="5400000">
-              <a:srgbClr val="7E88A8">
-                <a:alpha val="30000"/>
-              </a:srgbClr>
-            </a:outerShdw>
-          </a:effectLst>
-        </p:spPr>
-      </p:sp>
-      <p:sp>
-        <p:nvSpPr>
-          <p:cNvPr id="6" name="Shape 4"/>
-          <p:cNvSpPr/>
-          <p:nvPr/>
-        </p:nvSpPr>
-        <p:spPr>
-          <a:xfrm>
-            <a:off x="795528" y="1737360"/>
-            <a:ext cx="384048" cy="45720"/>
-          </a:xfrm>
-          <a:prstGeom prst="rect">
-            <a:avLst/>
-          </a:prstGeom>
-          <a:solidFill>
-            <a:srgbClr val="B4552D"/>
-          </a:solidFill>
-          <a:ln/>
-        </p:spPr>
-      </p:sp>
-      <p:sp>
-        <p:nvSpPr>
-          <p:cNvPr id="7" name="Text 5"/>
-          <p:cNvSpPr txBox="1"/>
-          <p:nvPr/>
-        </p:nvSpPr>
-        <p:spPr>
-          <a:xfrm>
-            <a:off x="795528" y="1810512"/>
-            <a:ext cx="4809744" cy="713232"/>
-          </a:xfrm>
-          <a:prstGeom prst="rect">
-            <a:avLst/>
-          </a:prstGeom>
-          <a:noFill/>
-          <a:ln/>
-        </p:spPr>
-        <p:txBody>
-          <a:bodyPr wrap="square" lIns="0" tIns="0" rIns="0" bIns="0" rtlCol="0" anchor="ctr"/>
-          <a:lstStyle/>
-          <a:p>
-            <a:pPr indent="0" marL="0">
-              <a:buNone/>
-            </a:pPr>
-            <a:r>
-              <a:rPr lang="en-US" sz="4000" dirty="0">
-                <a:solidFill>
-                  <a:srgbClr val="B4552D"/>
-                </a:solidFill>
-                <a:latin typeface="Segoe UI Semibold" pitchFamily="34" charset="0"/>
-                <a:ea typeface="Segoe UI Semibold" pitchFamily="34" charset="-122"/>
-                <a:cs typeface="Segoe UI Semibold" pitchFamily="34" charset="-120"/>
-              </a:rPr>
-              <a:t>200+</a:t>
-            </a:r>
-            <a:endParaRPr lang="en-US" sz="4000" dirty="0"/>
-          </a:p>
-        </p:txBody>
-      </p:sp>
-      <p:sp>
-        <p:nvSpPr>
-          <p:cNvPr id="8" name="Text 6"/>
-          <p:cNvSpPr txBox="1"/>
-          <p:nvPr/>
-        </p:nvSpPr>
-        <p:spPr>
-          <a:xfrm>
-            <a:off x="795528" y="2542032"/>
-            <a:ext cx="4809744" cy="822960"/>
-          </a:xfrm>
-          <a:prstGeom prst="rect">
-            <a:avLst/>
-          </a:prstGeom>
-          <a:noFill/>
-          <a:ln/>
-        </p:spPr>
-        <p:txBody>
-          <a:bodyPr wrap="square" lIns="0" tIns="0" rIns="0" bIns="0" rtlCol="0" anchor="t"/>
-          <a:lstStyle/>
-          <a:p>
-            <a:pPr indent="0" marL="0">
-              <a:lnSpc>
-                <a:spcPct val="108000"/>
-              </a:lnSpc>
-              <a:buNone/>
-            </a:pPr>
-            <a:r>
-              <a:rPr lang="en-US" sz="1600" dirty="0">
-                <a:solidFill>
-                  <a:srgbClr val="1B2140"/>
+            <a:pPr marL="0" indent="0">
+              <a:buNone/>
+            </a:pPr>
+            <a:r>
+              <a:rPr lang="en-US" sz="1200" dirty="0">
+                <a:solidFill>
+                  <a:srgbClr val="6B7699"/>
                 </a:solidFill>
                 <a:latin typeface="Segoe UI" pitchFamily="34" charset="0"/>
                 <a:ea typeface="Segoe UI" pitchFamily="34" charset="-122"/>
                 <a:cs typeface="Segoe UI" pitchFamily="34" charset="-120"/>
               </a:rPr>
-              <a:t>техноброкеров подготовил Роспатент. Работодателя для них в стране нет</a:t>
-            </a:r>
-            <a:endParaRPr lang="en-US" sz="1600" dirty="0"/>
-          </a:p>
-        </p:txBody>
-      </p:sp>
-      <p:sp>
-        <p:nvSpPr>
-          <p:cNvPr id="9" name="Text 7"/>
-          <p:cNvSpPr txBox="1"/>
-          <p:nvPr/>
-        </p:nvSpPr>
-        <p:spPr>
-          <a:xfrm>
-            <a:off x="795528" y="3419856"/>
-            <a:ext cx="4809744" cy="237744"/>
+              <a:t>Ситалл</a:t>
+            </a:r>
+            <a:endParaRPr lang="en-US" sz="1200" dirty="0"/>
+          </a:p>
+        </p:txBody>
+      </p:sp>
+      <p:sp>
+        <p:nvSpPr>
+          <p:cNvPr id="27" name="Text 25"/>
+          <p:cNvSpPr txBox="1"/>
+          <p:nvPr/>
+        </p:nvSpPr>
+        <p:spPr>
+          <a:xfrm>
+            <a:off x="10774375" y="6473952"/>
+            <a:ext cx="914400" cy="274320"/>
           </a:xfrm>
           <a:prstGeom prst="rect">
             <a:avLst/>
@@ -4224,11 +3500,11 @@
           <a:bodyPr wrap="square" lIns="0" tIns="0" rIns="0" bIns="0" rtlCol="0" anchor="ctr"/>
           <a:lstStyle/>
           <a:p>
-            <a:pPr indent="0" marL="0">
-              <a:buNone/>
-            </a:pPr>
-            <a:r>
-              <a:rPr lang="en-US" sz="1200" i="1" dirty="0">
+            <a:pPr marL="0" indent="0" algn="r">
+              <a:buNone/>
+            </a:pPr>
+            <a:r>
+              <a:rPr lang="en-US" sz="1200" dirty="0">
                 <a:solidFill>
                   <a:srgbClr val="6B7699"/>
                 </a:solidFill>
@@ -4236,470 +3512,7 @@
                 <a:ea typeface="Segoe UI" pitchFamily="34" charset="-122"/>
                 <a:cs typeface="Segoe UI" pitchFamily="34" charset="-120"/>
               </a:rPr>
-              <a:t>Источник: </a:t>
-            </a:r>
-            <a:pPr indent="0" marL="0">
-              <a:buNone/>
-            </a:pPr>
-            <a:r>
-              <a:rPr lang="en-US" sz="1200" i="1" u="sng" dirty="0">
-                <a:solidFill>
-                  <a:srgbClr val="6B7699"/>
-                </a:solidFill>
-                <a:latin typeface="Segoe UI" pitchFamily="34" charset="0"/>
-                <a:ea typeface="Segoe UI" pitchFamily="34" charset="-122"/>
-                <a:cs typeface="Segoe UI" pitchFamily="34" charset="-120"/>
-                <a:hlinkClick r:id="rId1" invalidUrl="" action="" tgtFrame="" tooltip="" history="1" highlightClick="0" endSnd="0">
-                  <a:extLst>
-                    <a:ext uri="{A12FA001-AC4F-418D-AE19-62706E023703}">
-                      <ahyp:hlinkClr xmlns:ahyp="http://schemas.microsoft.com/office/drawing/2018/hyperlinkcolor" val="tx"/>
-                    </a:ext>
-                  </a:extLst>
-                </a:hlinkClick>
-              </a:rPr>
-              <a:t>Роспатент</a:t>
-            </a:r>
-            <a:endParaRPr lang="en-US" sz="1200" dirty="0"/>
-          </a:p>
-        </p:txBody>
-      </p:sp>
-      <p:sp>
-        <p:nvSpPr>
-          <p:cNvPr id="10" name="Shape 8"/>
-          <p:cNvSpPr/>
-          <p:nvPr/>
-        </p:nvSpPr>
-        <p:spPr>
-          <a:xfrm>
-            <a:off x="502920" y="4041648"/>
-            <a:ext cx="5394960" cy="2286000"/>
-          </a:xfrm>
-          <a:prstGeom prst="roundRect">
-            <a:avLst>
-              <a:gd name="adj" fmla="val 3600"/>
-            </a:avLst>
-          </a:prstGeom>
-          <a:solidFill>
-            <a:srgbClr val="FFFFFF"/>
-          </a:solidFill>
-          <a:ln w="12700">
-            <a:solidFill>
-              <a:srgbClr val="C9D3EA"/>
-            </a:solidFill>
-            <a:prstDash val="solid"/>
-          </a:ln>
-          <a:effectLst>
-            <a:outerShdw sx="100000" sy="100000" kx="0" ky="0" algn="bl" rotWithShape="0" blurRad="177800" dist="50800" dir="5400000">
-              <a:srgbClr val="7E88A8">
-                <a:alpha val="30000"/>
-              </a:srgbClr>
-            </a:outerShdw>
-          </a:effectLst>
-        </p:spPr>
-      </p:sp>
-      <p:sp>
-        <p:nvSpPr>
-          <p:cNvPr id="11" name="Shape 9"/>
-          <p:cNvSpPr/>
-          <p:nvPr/>
-        </p:nvSpPr>
-        <p:spPr>
-          <a:xfrm>
-            <a:off x="795528" y="4297680"/>
-            <a:ext cx="384048" cy="45720"/>
-          </a:xfrm>
-          <a:prstGeom prst="rect">
-            <a:avLst/>
-          </a:prstGeom>
-          <a:solidFill>
-            <a:srgbClr val="1E2761"/>
-          </a:solidFill>
-          <a:ln/>
-        </p:spPr>
-      </p:sp>
-      <p:sp>
-        <p:nvSpPr>
-          <p:cNvPr id="12" name="Text 10"/>
-          <p:cNvSpPr txBox="1"/>
-          <p:nvPr/>
-        </p:nvSpPr>
-        <p:spPr>
-          <a:xfrm>
-            <a:off x="795528" y="4370832"/>
-            <a:ext cx="4809744" cy="713232"/>
-          </a:xfrm>
-          <a:prstGeom prst="rect">
-            <a:avLst/>
-          </a:prstGeom>
-          <a:noFill/>
-          <a:ln/>
-        </p:spPr>
-        <p:txBody>
-          <a:bodyPr wrap="square" lIns="0" tIns="0" rIns="0" bIns="0" rtlCol="0" anchor="ctr"/>
-          <a:lstStyle/>
-          <a:p>
-            <a:pPr indent="0" marL="0">
-              <a:buNone/>
-            </a:pPr>
-            <a:r>
-              <a:rPr lang="en-US" sz="3200" dirty="0">
-                <a:solidFill>
-                  <a:srgbClr val="1E2761"/>
-                </a:solidFill>
-                <a:latin typeface="Segoe UI Semibold" pitchFamily="34" charset="0"/>
-                <a:ea typeface="Segoe UI Semibold" pitchFamily="34" charset="-122"/>
-                <a:cs typeface="Segoe UI Semibold" pitchFamily="34" charset="-120"/>
-              </a:rPr>
-              <a:t>Апрель 2024</a:t>
-            </a:r>
-            <a:endParaRPr lang="en-US" sz="3200" dirty="0"/>
-          </a:p>
-        </p:txBody>
-      </p:sp>
-      <p:sp>
-        <p:nvSpPr>
-          <p:cNvPr id="13" name="Text 11"/>
-          <p:cNvSpPr txBox="1"/>
-          <p:nvPr/>
-        </p:nvSpPr>
-        <p:spPr>
-          <a:xfrm>
-            <a:off x="795528" y="5102352"/>
-            <a:ext cx="4809744" cy="822960"/>
-          </a:xfrm>
-          <a:prstGeom prst="rect">
-            <a:avLst/>
-          </a:prstGeom>
-          <a:noFill/>
-          <a:ln/>
-        </p:spPr>
-        <p:txBody>
-          <a:bodyPr wrap="square" lIns="0" tIns="0" rIns="0" bIns="0" rtlCol="0" anchor="t"/>
-          <a:lstStyle/>
-          <a:p>
-            <a:pPr indent="0" marL="0">
-              <a:lnSpc>
-                <a:spcPct val="108000"/>
-              </a:lnSpc>
-              <a:buNone/>
-            </a:pPr>
-            <a:r>
-              <a:rPr lang="en-US" sz="1600" dirty="0">
-                <a:solidFill>
-                  <a:srgbClr val="1B2140"/>
-                </a:solidFill>
-                <a:latin typeface="Segoe UI" pitchFamily="34" charset="0"/>
-                <a:ea typeface="Segoe UI" pitchFamily="34" charset="-122"/>
-                <a:cs typeface="Segoe UI" pitchFamily="34" charset="-120"/>
-              </a:rPr>
-              <a:t>Роспатент открыл Центр поддержки коммерциализации: сопровождение вузов и корпораций</a:t>
-            </a:r>
-            <a:endParaRPr lang="en-US" sz="1600" dirty="0"/>
-          </a:p>
-        </p:txBody>
-      </p:sp>
-      <p:sp>
-        <p:nvSpPr>
-          <p:cNvPr id="14" name="Text 12"/>
-          <p:cNvSpPr txBox="1"/>
-          <p:nvPr/>
-        </p:nvSpPr>
-        <p:spPr>
-          <a:xfrm>
-            <a:off x="795528" y="5980176"/>
-            <a:ext cx="4809744" cy="237744"/>
-          </a:xfrm>
-          <a:prstGeom prst="rect">
-            <a:avLst/>
-          </a:prstGeom>
-          <a:noFill/>
-          <a:ln/>
-        </p:spPr>
-        <p:txBody>
-          <a:bodyPr wrap="square" lIns="0" tIns="0" rIns="0" bIns="0" rtlCol="0" anchor="ctr"/>
-          <a:lstStyle/>
-          <a:p>
-            <a:pPr indent="0" marL="0">
-              <a:buNone/>
-            </a:pPr>
-            <a:r>
-              <a:rPr lang="en-US" sz="1200" i="1" dirty="0">
-                <a:solidFill>
-                  <a:srgbClr val="6B7699"/>
-                </a:solidFill>
-                <a:latin typeface="Segoe UI" pitchFamily="34" charset="0"/>
-                <a:ea typeface="Segoe UI" pitchFamily="34" charset="-122"/>
-                <a:cs typeface="Segoe UI" pitchFamily="34" charset="-120"/>
-              </a:rPr>
-              <a:t>Источник: </a:t>
-            </a:r>
-            <a:pPr indent="0" marL="0">
-              <a:buNone/>
-            </a:pPr>
-            <a:r>
-              <a:rPr lang="en-US" sz="1200" i="1" u="sng" dirty="0">
-                <a:solidFill>
-                  <a:srgbClr val="6B7699"/>
-                </a:solidFill>
-                <a:latin typeface="Segoe UI" pitchFamily="34" charset="0"/>
-                <a:ea typeface="Segoe UI" pitchFamily="34" charset="-122"/>
-                <a:cs typeface="Segoe UI" pitchFamily="34" charset="-120"/>
-                <a:hlinkClick r:id="rId2" invalidUrl="" action="" tgtFrame="" tooltip="" history="1" highlightClick="0" endSnd="0">
-                  <a:extLst>
-                    <a:ext uri="{A12FA001-AC4F-418D-AE19-62706E023703}">
-                      <ahyp:hlinkClr xmlns:ahyp="http://schemas.microsoft.com/office/drawing/2018/hyperlinkcolor" val="tx"/>
-                    </a:ext>
-                  </a:extLst>
-                </a:hlinkClick>
-              </a:rPr>
-              <a:t>Роспатент</a:t>
-            </a:r>
-            <a:endParaRPr lang="en-US" sz="1200" dirty="0"/>
-          </a:p>
-        </p:txBody>
-      </p:sp>
-      <p:sp>
-        <p:nvSpPr>
-          <p:cNvPr id="15" name="Text 13"/>
-          <p:cNvSpPr txBox="1"/>
-          <p:nvPr/>
-        </p:nvSpPr>
-        <p:spPr>
-          <a:xfrm>
-            <a:off x="6446520" y="1737360"/>
-            <a:ext cx="5242255" cy="2743200"/>
-          </a:xfrm>
-          <a:prstGeom prst="rect">
-            <a:avLst/>
-          </a:prstGeom>
-          <a:noFill/>
-          <a:ln/>
-        </p:spPr>
-        <p:txBody>
-          <a:bodyPr wrap="square" lIns="0" tIns="0" rIns="0" bIns="0" rtlCol="0" anchor="t"/>
-          <a:lstStyle/>
-          <a:p>
-            <a:pPr indent="0" marL="0">
-              <a:lnSpc>
-                <a:spcPct val="120000"/>
-              </a:lnSpc>
-              <a:buNone/>
-            </a:pPr>
-            <a:r>
-              <a:rPr lang="en-US" sz="2400" dirty="0">
-                <a:solidFill>
-                  <a:srgbClr val="1E2761"/>
-                </a:solidFill>
-                <a:latin typeface="Segoe UI Semibold" pitchFamily="34" charset="0"/>
-                <a:ea typeface="Segoe UI Semibold" pitchFamily="34" charset="-122"/>
-                <a:cs typeface="Segoe UI Semibold" pitchFamily="34" charset="-120"/>
-              </a:rPr>
-              <a:t>Мы в начале, и в этом весь смысл разговора.</a:t>
-            </a:r>
-            <a:endParaRPr lang="en-US" sz="2400" dirty="0"/>
-          </a:p>
-          <a:p>
-            <a:pPr indent="0" marL="0">
-              <a:lnSpc>
-                <a:spcPct val="120000"/>
-              </a:lnSpc>
-              <a:buNone/>
-            </a:pPr>
-            <a:endParaRPr lang="en-US" sz="2400" dirty="0"/>
-          </a:p>
-          <a:p>
-            <a:pPr indent="0" marL="0">
-              <a:lnSpc>
-                <a:spcPct val="120000"/>
-              </a:lnSpc>
-              <a:buNone/>
-            </a:pPr>
-            <a:r>
-              <a:rPr lang="en-US" sz="2400" dirty="0">
-                <a:solidFill>
-                  <a:srgbClr val="1E2761"/>
-                </a:solidFill>
-                <a:latin typeface="Segoe UI Semibold" pitchFamily="34" charset="0"/>
-                <a:ea typeface="Segoe UI Semibold" pitchFamily="34" charset="-122"/>
-                <a:cs typeface="Segoe UI Semibold" pitchFamily="34" charset="-120"/>
-              </a:rPr>
-              <a:t>Регионы закрепляются по одному. Свердловская область и Югра уже в работе.</a:t>
-            </a:r>
-            <a:endParaRPr lang="en-US" sz="2400" dirty="0"/>
-          </a:p>
-        </p:txBody>
-      </p:sp>
-      <p:sp>
-        <p:nvSpPr>
-          <p:cNvPr id="16" name="Shape 14"/>
-          <p:cNvSpPr/>
-          <p:nvPr/>
-        </p:nvSpPr>
-        <p:spPr>
-          <a:xfrm>
-            <a:off x="6446520" y="4709160"/>
-            <a:ext cx="1371600" cy="82296"/>
-          </a:xfrm>
-          <a:prstGeom prst="rect">
-            <a:avLst/>
-          </a:prstGeom>
-          <a:solidFill>
-            <a:srgbClr val="B4552D"/>
-          </a:solidFill>
-          <a:ln/>
-        </p:spPr>
-      </p:sp>
-      <p:sp>
-        <p:nvSpPr>
-          <p:cNvPr id="17" name="Text 15"/>
-          <p:cNvSpPr txBox="1"/>
-          <p:nvPr/>
-        </p:nvSpPr>
-        <p:spPr>
-          <a:xfrm>
-            <a:off x="6446520" y="5029200"/>
-            <a:ext cx="5242255" cy="384048"/>
-          </a:xfrm>
-          <a:prstGeom prst="rect">
-            <a:avLst/>
-          </a:prstGeom>
-          <a:noFill/>
-          <a:ln/>
-        </p:spPr>
-        <p:txBody>
-          <a:bodyPr wrap="square" lIns="0" tIns="0" rIns="0" bIns="0" rtlCol="0" anchor="ctr"/>
-          <a:lstStyle/>
-          <a:p>
-            <a:pPr indent="0" marL="0">
-              <a:buNone/>
-            </a:pPr>
-            <a:r>
-              <a:rPr lang="en-US" sz="2000" dirty="0">
-                <a:solidFill>
-                  <a:srgbClr val="1E2761"/>
-                </a:solidFill>
-                <a:latin typeface="Segoe UI Semibold" pitchFamily="34" charset="0"/>
-                <a:ea typeface="Segoe UI Semibold" pitchFamily="34" charset="-122"/>
-                <a:cs typeface="Segoe UI Semibold" pitchFamily="34" charset="-120"/>
-              </a:rPr>
-              <a:t>Кирилл Уклонский</a:t>
-            </a:r>
-            <a:endParaRPr lang="en-US" sz="2000" dirty="0"/>
-          </a:p>
-        </p:txBody>
-      </p:sp>
-      <p:sp>
-        <p:nvSpPr>
-          <p:cNvPr id="18" name="Text 16"/>
-          <p:cNvSpPr txBox="1"/>
-          <p:nvPr/>
-        </p:nvSpPr>
-        <p:spPr>
-          <a:xfrm>
-            <a:off x="6446520" y="5440680"/>
-            <a:ext cx="5242255" cy="329184"/>
-          </a:xfrm>
-          <a:prstGeom prst="rect">
-            <a:avLst/>
-          </a:prstGeom>
-          <a:noFill/>
-          <a:ln/>
-        </p:spPr>
-        <p:txBody>
-          <a:bodyPr wrap="square" lIns="0" tIns="0" rIns="0" bIns="0" rtlCol="0" anchor="ctr"/>
-          <a:lstStyle/>
-          <a:p>
-            <a:pPr indent="0" marL="0">
-              <a:buNone/>
-            </a:pPr>
-            <a:r>
-              <a:rPr lang="en-US" sz="1800" dirty="0">
-                <a:solidFill>
-                  <a:srgbClr val="1B2140"/>
-                </a:solidFill>
-                <a:latin typeface="Segoe UI" pitchFamily="34" charset="0"/>
-                <a:ea typeface="Segoe UI" pitchFamily="34" charset="-122"/>
-                <a:cs typeface="Segoe UI" pitchFamily="34" charset="-120"/>
-              </a:rPr>
-              <a:t>uklonskiy.k@ya.ru</a:t>
-            </a:r>
-            <a:endParaRPr lang="en-US" sz="1800" dirty="0"/>
-          </a:p>
-        </p:txBody>
-      </p:sp>
-      <p:sp>
-        <p:nvSpPr>
-          <p:cNvPr id="19" name="Text 17"/>
-          <p:cNvSpPr txBox="1"/>
-          <p:nvPr/>
-        </p:nvSpPr>
-        <p:spPr>
-          <a:xfrm>
-            <a:off x="502920" y="6473952"/>
-            <a:ext cx="1828800" cy="274320"/>
-          </a:xfrm>
-          <a:prstGeom prst="rect">
-            <a:avLst/>
-          </a:prstGeom>
-          <a:noFill/>
-          <a:ln/>
-        </p:spPr>
-        <p:txBody>
-          <a:bodyPr wrap="square" lIns="0" tIns="0" rIns="0" bIns="0" rtlCol="0" anchor="ctr"/>
-          <a:lstStyle/>
-          <a:p>
-            <a:pPr indent="0" marL="0">
-              <a:buNone/>
-            </a:pPr>
-            <a:r>
-              <a:rPr lang="en-US" sz="1200" dirty="0">
-                <a:solidFill>
-                  <a:srgbClr val="6B7699"/>
-                </a:solidFill>
-                <a:latin typeface="Segoe UI" pitchFamily="34" charset="0"/>
-                <a:ea typeface="Segoe UI" pitchFamily="34" charset="-122"/>
-                <a:cs typeface="Segoe UI" pitchFamily="34" charset="-120"/>
-              </a:rPr>
-              <a:t>Ситалл</a:t>
-            </a:r>
-            <a:endParaRPr lang="en-US" sz="1200" dirty="0"/>
-          </a:p>
-        </p:txBody>
-      </p:sp>
-      <p:sp>
-        <p:nvSpPr>
-          <p:cNvPr id="20" name="Text 18"/>
-          <p:cNvSpPr txBox="1"/>
-          <p:nvPr/>
-        </p:nvSpPr>
-        <p:spPr>
-          <a:xfrm>
-            <a:off x="10774375" y="6473952"/>
-            <a:ext cx="914400" cy="274320"/>
-          </a:xfrm>
-          <a:prstGeom prst="rect">
-            <a:avLst/>
-          </a:prstGeom>
-          <a:noFill/>
-          <a:ln/>
-        </p:spPr>
-        <p:txBody>
-          <a:bodyPr wrap="square" lIns="0" tIns="0" rIns="0" bIns="0" rtlCol="0" anchor="ctr"/>
-          <a:lstStyle/>
-          <a:p>
-            <a:pPr algn="r" indent="0" marL="0">
-              <a:buNone/>
-            </a:pPr>
-            <a:r>
-              <a:rPr lang="en-US" sz="1200" dirty="0">
-                <a:solidFill>
-                  <a:srgbClr val="6B7699"/>
-                </a:solidFill>
-                <a:latin typeface="Segoe UI" pitchFamily="34" charset="0"/>
-                <a:ea typeface="Segoe UI" pitchFamily="34" charset="-122"/>
-                <a:cs typeface="Segoe UI" pitchFamily="34" charset="-120"/>
-              </a:rPr>
-              <a:t>12 / 12</a:t>
+              <a:t>11 / 12</a:t>
             </a:r>
             <a:endParaRPr lang="en-US" sz="1200" dirty="0"/>
           </a:p>
@@ -4751,11 +3564,11 @@
           <a:bodyPr wrap="square" lIns="0" tIns="0" rIns="0" bIns="0" rtlCol="0" anchor="ctr"/>
           <a:lstStyle/>
           <a:p>
-            <a:pPr indent="0" marL="0">
-              <a:buNone/>
-            </a:pPr>
-            <a:r>
-              <a:rPr lang="en-US" sz="1300" spc="300" kern="0" dirty="0">
+            <a:pPr marL="0" indent="0">
+              <a:buNone/>
+            </a:pPr>
+            <a:r>
+              <a:rPr lang="en-US" sz="1300" kern="0" spc="300" dirty="0">
                 <a:solidFill>
                   <a:srgbClr val="B4552D"/>
                 </a:solidFill>
@@ -4790,7 +3603,7 @@
           <a:bodyPr wrap="square" lIns="0" tIns="0" rIns="0" bIns="0" rtlCol="0" anchor="ctr"/>
           <a:lstStyle/>
           <a:p>
-            <a:pPr indent="0" marL="0">
+            <a:pPr marL="0" indent="0">
               <a:buNone/>
             </a:pPr>
             <a:r>
@@ -4854,7 +3667,7 @@
             <a:prstDash val="solid"/>
           </a:ln>
           <a:effectLst>
-            <a:outerShdw sx="100000" sy="100000" kx="0" ky="0" algn="bl" rotWithShape="0" blurRad="177800" dist="50800" dir="5400000">
+            <a:outerShdw blurRad="177800" dist="50800" dir="5400000" algn="bl" rotWithShape="0">
               <a:srgbClr val="7E88A8">
                 <a:alpha val="30000"/>
               </a:srgbClr>
@@ -4903,7 +3716,7 @@
           <a:bodyPr wrap="square" lIns="0" tIns="0" rIns="0" bIns="0" rtlCol="0" anchor="ctr"/>
           <a:lstStyle/>
           <a:p>
-            <a:pPr indent="0" marL="0">
+            <a:pPr marL="0" indent="0">
               <a:buNone/>
             </a:pPr>
             <a:r>
@@ -4942,7 +3755,7 @@
           <a:bodyPr wrap="square" lIns="0" tIns="0" rIns="0" bIns="0" rtlCol="0" anchor="t"/>
           <a:lstStyle/>
           <a:p>
-            <a:pPr indent="0" marL="0">
+            <a:pPr marL="0" indent="0">
               <a:lnSpc>
                 <a:spcPct val="108000"/>
               </a:lnSpc>
@@ -4984,7 +3797,7 @@
           <a:bodyPr wrap="square" lIns="0" tIns="0" rIns="0" bIns="0" rtlCol="0" anchor="ctr"/>
           <a:lstStyle/>
           <a:p>
-            <a:pPr indent="0" marL="0">
+            <a:pPr marL="0" indent="0">
               <a:buNone/>
             </a:pPr>
             <a:r>
@@ -4998,9 +3811,6 @@
               </a:rPr>
               <a:t>Источник: </a:t>
             </a:r>
-            <a:pPr indent="0" marL="0">
-              <a:buNone/>
-            </a:pPr>
             <a:r>
               <a:rPr lang="en-US" sz="1200" i="1" u="sng" dirty="0">
                 <a:solidFill>
@@ -5009,7 +3819,7 @@
                 <a:latin typeface="Segoe UI" pitchFamily="34" charset="0"/>
                 <a:ea typeface="Segoe UI" pitchFamily="34" charset="-122"/>
                 <a:cs typeface="Segoe UI" pitchFamily="34" charset="-120"/>
-                <a:hlinkClick r:id="rId1" invalidUrl="" action="" tgtFrame="" tooltip="" history="1" highlightClick="0" endSnd="0">
+                <a:hlinkClick r:id="rId3">
                   <a:extLst>
                     <a:ext uri="{A12FA001-AC4F-418D-AE19-62706E023703}">
                       <ahyp:hlinkClr xmlns:ahyp="http://schemas.microsoft.com/office/drawing/2018/hyperlinkcolor" val="tx"/>
@@ -5049,7 +3859,7 @@
             <a:prstDash val="solid"/>
           </a:ln>
           <a:effectLst>
-            <a:outerShdw sx="100000" sy="100000" kx="0" ky="0" algn="bl" rotWithShape="0" blurRad="177800" dist="50800" dir="5400000">
+            <a:outerShdw blurRad="177800" dist="50800" dir="5400000" algn="bl" rotWithShape="0">
               <a:srgbClr val="7E88A8">
                 <a:alpha val="30000"/>
               </a:srgbClr>
@@ -5098,7 +3908,7 @@
           <a:bodyPr wrap="square" lIns="0" tIns="0" rIns="0" bIns="0" rtlCol="0" anchor="ctr"/>
           <a:lstStyle/>
           <a:p>
-            <a:pPr indent="0" marL="0">
+            <a:pPr marL="0" indent="0">
               <a:buNone/>
             </a:pPr>
             <a:r>
@@ -5137,7 +3947,7 @@
           <a:bodyPr wrap="square" lIns="0" tIns="0" rIns="0" bIns="0" rtlCol="0" anchor="t"/>
           <a:lstStyle/>
           <a:p>
-            <a:pPr indent="0" marL="0">
+            <a:pPr marL="0" indent="0">
               <a:lnSpc>
                 <a:spcPct val="108000"/>
               </a:lnSpc>
@@ -5179,7 +3989,7 @@
           <a:bodyPr wrap="square" lIns="0" tIns="0" rIns="0" bIns="0" rtlCol="0" anchor="ctr"/>
           <a:lstStyle/>
           <a:p>
-            <a:pPr indent="0" marL="0">
+            <a:pPr marL="0" indent="0">
               <a:buNone/>
             </a:pPr>
             <a:r>
@@ -5193,9 +4003,6 @@
               </a:rPr>
               <a:t>Источник: </a:t>
             </a:r>
-            <a:pPr indent="0" marL="0">
-              <a:buNone/>
-            </a:pPr>
             <a:r>
               <a:rPr lang="en-US" sz="1200" i="1" u="sng" dirty="0">
                 <a:solidFill>
@@ -5204,7 +4011,7 @@
                 <a:latin typeface="Segoe UI" pitchFamily="34" charset="0"/>
                 <a:ea typeface="Segoe UI" pitchFamily="34" charset="-122"/>
                 <a:cs typeface="Segoe UI" pitchFamily="34" charset="-120"/>
-                <a:hlinkClick r:id="rId2" invalidUrl="" action="" tgtFrame="" tooltip="" history="1" highlightClick="0" endSnd="0">
+                <a:hlinkClick r:id="rId3">
                   <a:extLst>
                     <a:ext uri="{A12FA001-AC4F-418D-AE19-62706E023703}">
                       <ahyp:hlinkClr xmlns:ahyp="http://schemas.microsoft.com/office/drawing/2018/hyperlinkcolor" val="tx"/>
@@ -5244,7 +4051,7 @@
             <a:prstDash val="solid"/>
           </a:ln>
           <a:effectLst>
-            <a:outerShdw sx="100000" sy="100000" kx="0" ky="0" algn="bl" rotWithShape="0" blurRad="177800" dist="50800" dir="5400000">
+            <a:outerShdw blurRad="177800" dist="50800" dir="5400000" algn="bl" rotWithShape="0">
               <a:srgbClr val="7E88A8">
                 <a:alpha val="30000"/>
               </a:srgbClr>
@@ -5293,7 +4100,7 @@
           <a:bodyPr wrap="square" lIns="0" tIns="0" rIns="0" bIns="0" rtlCol="0" anchor="ctr"/>
           <a:lstStyle/>
           <a:p>
-            <a:pPr indent="0" marL="0">
+            <a:pPr marL="0" indent="0">
               <a:buNone/>
             </a:pPr>
             <a:r>
@@ -5332,7 +4139,7 @@
           <a:bodyPr wrap="square" lIns="0" tIns="0" rIns="0" bIns="0" rtlCol="0" anchor="t"/>
           <a:lstStyle/>
           <a:p>
-            <a:pPr indent="0" marL="0">
+            <a:pPr marL="0" indent="0">
               <a:lnSpc>
                 <a:spcPct val="108000"/>
               </a:lnSpc>
@@ -5374,7 +4181,7 @@
           <a:bodyPr wrap="square" lIns="0" tIns="0" rIns="0" bIns="0" rtlCol="0" anchor="ctr"/>
           <a:lstStyle/>
           <a:p>
-            <a:pPr indent="0" marL="0">
+            <a:pPr marL="0" indent="0">
               <a:buNone/>
             </a:pPr>
             <a:r>
@@ -5388,9 +4195,6 @@
               </a:rPr>
               <a:t>Источник: </a:t>
             </a:r>
-            <a:pPr indent="0" marL="0">
-              <a:buNone/>
-            </a:pPr>
             <a:r>
               <a:rPr lang="en-US" sz="1200" i="1" u="sng" dirty="0">
                 <a:solidFill>
@@ -5399,7 +4203,7 @@
                 <a:latin typeface="Segoe UI" pitchFamily="34" charset="0"/>
                 <a:ea typeface="Segoe UI" pitchFamily="34" charset="-122"/>
                 <a:cs typeface="Segoe UI" pitchFamily="34" charset="-120"/>
-                <a:hlinkClick r:id="rId3" invalidUrl="" action="" tgtFrame="" tooltip="" history="1" highlightClick="0" endSnd="0">
+                <a:hlinkClick r:id="rId4">
                   <a:extLst>
                     <a:ext uri="{A12FA001-AC4F-418D-AE19-62706E023703}">
                       <ahyp:hlinkClr xmlns:ahyp="http://schemas.microsoft.com/office/drawing/2018/hyperlinkcolor" val="tx"/>
@@ -5439,7 +4243,7 @@
             <a:prstDash val="solid"/>
           </a:ln>
           <a:effectLst>
-            <a:outerShdw sx="100000" sy="100000" kx="0" ky="0" algn="bl" rotWithShape="0" blurRad="177800" dist="50800" dir="5400000">
+            <a:outerShdw blurRad="177800" dist="50800" dir="5400000" algn="bl" rotWithShape="0">
               <a:srgbClr val="7E88A8">
                 <a:alpha val="30000"/>
               </a:srgbClr>
@@ -5488,7 +4292,7 @@
           <a:bodyPr wrap="square" lIns="0" tIns="0" rIns="0" bIns="0" rtlCol="0" anchor="ctr"/>
           <a:lstStyle/>
           <a:p>
-            <a:pPr indent="0" marL="0">
+            <a:pPr marL="0" indent="0">
               <a:buNone/>
             </a:pPr>
             <a:r>
@@ -5527,7 +4331,7 @@
           <a:bodyPr wrap="square" lIns="0" tIns="0" rIns="0" bIns="0" rtlCol="0" anchor="t"/>
           <a:lstStyle/>
           <a:p>
-            <a:pPr indent="0" marL="0">
+            <a:pPr marL="0" indent="0">
               <a:lnSpc>
                 <a:spcPct val="108000"/>
               </a:lnSpc>
@@ -5569,7 +4373,7 @@
           <a:bodyPr wrap="square" lIns="0" tIns="0" rIns="0" bIns="0" rtlCol="0" anchor="ctr"/>
           <a:lstStyle/>
           <a:p>
-            <a:pPr indent="0" marL="0">
+            <a:pPr marL="0" indent="0">
               <a:buNone/>
             </a:pPr>
             <a:r>
@@ -5583,9 +4387,6 @@
               </a:rPr>
               <a:t>Источник: </a:t>
             </a:r>
-            <a:pPr indent="0" marL="0">
-              <a:buNone/>
-            </a:pPr>
             <a:r>
               <a:rPr lang="en-US" sz="1200" i="1" u="sng" dirty="0">
                 <a:solidFill>
@@ -5594,7 +4395,7 @@
                 <a:latin typeface="Segoe UI" pitchFamily="34" charset="0"/>
                 <a:ea typeface="Segoe UI" pitchFamily="34" charset="-122"/>
                 <a:cs typeface="Segoe UI" pitchFamily="34" charset="-120"/>
-                <a:hlinkClick r:id="rId4" invalidUrl="" action="" tgtFrame="" tooltip="" history="1" highlightClick="0" endSnd="0">
+                <a:hlinkClick r:id="rId5">
                   <a:extLst>
                     <a:ext uri="{A12FA001-AC4F-418D-AE19-62706E023703}">
                       <ahyp:hlinkClr xmlns:ahyp="http://schemas.microsoft.com/office/drawing/2018/hyperlinkcolor" val="tx"/>
@@ -5629,7 +4430,7 @@
           <a:bodyPr wrap="square" lIns="0" tIns="0" rIns="0" bIns="0" rtlCol="0" anchor="ctr"/>
           <a:lstStyle/>
           <a:p>
-            <a:pPr indent="0" marL="0">
+            <a:pPr marL="0" indent="0">
               <a:buNone/>
             </a:pPr>
             <a:r>
@@ -5668,7 +4469,7 @@
           <a:bodyPr wrap="square" lIns="0" tIns="0" rIns="0" bIns="0" rtlCol="0" anchor="ctr"/>
           <a:lstStyle/>
           <a:p>
-            <a:pPr algn="r" indent="0" marL="0">
+            <a:pPr marL="0" indent="0" algn="r">
               <a:buNone/>
             </a:pPr>
             <a:r>
@@ -5732,11 +4533,11 @@
           <a:bodyPr wrap="square" lIns="0" tIns="0" rIns="0" bIns="0" rtlCol="0" anchor="ctr"/>
           <a:lstStyle/>
           <a:p>
-            <a:pPr indent="0" marL="0">
-              <a:buNone/>
-            </a:pPr>
-            <a:r>
-              <a:rPr lang="en-US" sz="1300" spc="300" kern="0" dirty="0">
+            <a:pPr marL="0" indent="0">
+              <a:buNone/>
+            </a:pPr>
+            <a:r>
+              <a:rPr lang="en-US" sz="1300" kern="0" spc="300" dirty="0">
                 <a:solidFill>
                   <a:srgbClr val="B4552D"/>
                 </a:solidFill>
@@ -5771,7 +4572,7 @@
           <a:bodyPr wrap="square" lIns="0" tIns="0" rIns="0" bIns="0" rtlCol="0" anchor="ctr"/>
           <a:lstStyle/>
           <a:p>
-            <a:pPr indent="0" marL="0">
+            <a:pPr marL="0" indent="0">
               <a:buNone/>
             </a:pPr>
             <a:r>
@@ -5835,7 +4636,7 @@
             <a:prstDash val="solid"/>
           </a:ln>
           <a:effectLst>
-            <a:outerShdw sx="100000" sy="100000" kx="0" ky="0" algn="bl" rotWithShape="0" blurRad="177800" dist="50800" dir="5400000">
+            <a:outerShdw blurRad="177800" dist="50800" dir="5400000" algn="bl" rotWithShape="0">
               <a:srgbClr val="7E88A8">
                 <a:alpha val="30000"/>
               </a:srgbClr>
@@ -5884,7 +4685,7 @@
           <a:bodyPr wrap="square" lIns="0" tIns="0" rIns="0" bIns="0" rtlCol="0" anchor="ctr"/>
           <a:lstStyle/>
           <a:p>
-            <a:pPr indent="0" marL="0">
+            <a:pPr marL="0" indent="0">
               <a:buNone/>
             </a:pPr>
             <a:r>
@@ -5923,7 +4724,7 @@
           <a:bodyPr wrap="square" lIns="0" tIns="0" rIns="0" bIns="0" rtlCol="0" anchor="t"/>
           <a:lstStyle/>
           <a:p>
-            <a:pPr indent="0" marL="0">
+            <a:pPr marL="0" indent="0">
               <a:lnSpc>
                 <a:spcPct val="108000"/>
               </a:lnSpc>
@@ -5965,7 +4766,7 @@
           <a:bodyPr wrap="square" lIns="0" tIns="0" rIns="0" bIns="0" rtlCol="0" anchor="ctr"/>
           <a:lstStyle/>
           <a:p>
-            <a:pPr indent="0" marL="0">
+            <a:pPr marL="0" indent="0">
               <a:buNone/>
             </a:pPr>
             <a:r>
@@ -5979,9 +4780,6 @@
               </a:rPr>
               <a:t>Источник: </a:t>
             </a:r>
-            <a:pPr indent="0" marL="0">
-              <a:buNone/>
-            </a:pPr>
             <a:r>
               <a:rPr lang="en-US" sz="1200" i="1" u="sng" dirty="0">
                 <a:solidFill>
@@ -5990,7 +4788,7 @@
                 <a:latin typeface="Segoe UI" pitchFamily="34" charset="0"/>
                 <a:ea typeface="Segoe UI" pitchFamily="34" charset="-122"/>
                 <a:cs typeface="Segoe UI" pitchFamily="34" charset="-120"/>
-                <a:hlinkClick r:id="rId1" invalidUrl="" action="" tgtFrame="" tooltip="" history="1" highlightClick="0" endSnd="0">
+                <a:hlinkClick r:id="rId3">
                   <a:extLst>
                     <a:ext uri="{A12FA001-AC4F-418D-AE19-62706E023703}">
                       <ahyp:hlinkClr xmlns:ahyp="http://schemas.microsoft.com/office/drawing/2018/hyperlinkcolor" val="tx"/>
@@ -6030,7 +4828,7 @@
             <a:prstDash val="solid"/>
           </a:ln>
           <a:effectLst>
-            <a:outerShdw sx="100000" sy="100000" kx="0" ky="0" algn="bl" rotWithShape="0" blurRad="177800" dist="50800" dir="5400000">
+            <a:outerShdw blurRad="177800" dist="50800" dir="5400000" algn="bl" rotWithShape="0">
               <a:srgbClr val="7E88A8">
                 <a:alpha val="30000"/>
               </a:srgbClr>
@@ -6079,7 +4877,7 @@
           <a:bodyPr wrap="square" lIns="0" tIns="0" rIns="0" bIns="0" rtlCol="0" anchor="ctr"/>
           <a:lstStyle/>
           <a:p>
-            <a:pPr indent="0" marL="0">
+            <a:pPr marL="0" indent="0">
               <a:buNone/>
             </a:pPr>
             <a:r>
@@ -6118,7 +4916,7 @@
           <a:bodyPr wrap="square" lIns="0" tIns="0" rIns="0" bIns="0" rtlCol="0" anchor="t"/>
           <a:lstStyle/>
           <a:p>
-            <a:pPr indent="0" marL="0">
+            <a:pPr marL="0" indent="0">
               <a:lnSpc>
                 <a:spcPct val="108000"/>
               </a:lnSpc>
@@ -6160,7 +4958,7 @@
           <a:bodyPr wrap="square" lIns="0" tIns="0" rIns="0" bIns="0" rtlCol="0" anchor="ctr"/>
           <a:lstStyle/>
           <a:p>
-            <a:pPr indent="0" marL="0">
+            <a:pPr marL="0" indent="0">
               <a:buNone/>
             </a:pPr>
             <a:r>
@@ -6174,9 +4972,6 @@
               </a:rPr>
               <a:t>Источник: </a:t>
             </a:r>
-            <a:pPr indent="0" marL="0">
-              <a:buNone/>
-            </a:pPr>
             <a:r>
               <a:rPr lang="en-US" sz="1200" i="1" u="sng" dirty="0">
                 <a:solidFill>
@@ -6185,7 +4980,7 @@
                 <a:latin typeface="Segoe UI" pitchFamily="34" charset="0"/>
                 <a:ea typeface="Segoe UI" pitchFamily="34" charset="-122"/>
                 <a:cs typeface="Segoe UI" pitchFamily="34" charset="-120"/>
-                <a:hlinkClick r:id="rId2" invalidUrl="" action="" tgtFrame="" tooltip="" history="1" highlightClick="0" endSnd="0">
+                <a:hlinkClick r:id="rId4">
                   <a:extLst>
                     <a:ext uri="{A12FA001-AC4F-418D-AE19-62706E023703}">
                       <ahyp:hlinkClr xmlns:ahyp="http://schemas.microsoft.com/office/drawing/2018/hyperlinkcolor" val="tx"/>
@@ -6225,7 +5020,7 @@
             <a:prstDash val="solid"/>
           </a:ln>
           <a:effectLst>
-            <a:outerShdw sx="100000" sy="100000" kx="0" ky="0" algn="bl" rotWithShape="0" blurRad="177800" dist="50800" dir="5400000">
+            <a:outerShdw blurRad="177800" dist="50800" dir="5400000" algn="bl" rotWithShape="0">
               <a:srgbClr val="7E88A8">
                 <a:alpha val="30000"/>
               </a:srgbClr>
@@ -6274,7 +5069,7 @@
           <a:bodyPr wrap="square" lIns="0" tIns="0" rIns="0" bIns="0" rtlCol="0" anchor="ctr"/>
           <a:lstStyle/>
           <a:p>
-            <a:pPr indent="0" marL="0">
+            <a:pPr marL="0" indent="0">
               <a:buNone/>
             </a:pPr>
             <a:r>
@@ -6313,7 +5108,7 @@
           <a:bodyPr wrap="square" lIns="0" tIns="0" rIns="0" bIns="0" rtlCol="0" anchor="t"/>
           <a:lstStyle/>
           <a:p>
-            <a:pPr indent="0" marL="0">
+            <a:pPr marL="0" indent="0">
               <a:lnSpc>
                 <a:spcPct val="108000"/>
               </a:lnSpc>
@@ -6355,7 +5150,7 @@
           <a:bodyPr wrap="square" lIns="0" tIns="0" rIns="0" bIns="0" rtlCol="0" anchor="ctr"/>
           <a:lstStyle/>
           <a:p>
-            <a:pPr indent="0" marL="0">
+            <a:pPr marL="0" indent="0">
               <a:buNone/>
             </a:pPr>
             <a:r>
@@ -6369,9 +5164,6 @@
               </a:rPr>
               <a:t>Источник: </a:t>
             </a:r>
-            <a:pPr indent="0" marL="0">
-              <a:buNone/>
-            </a:pPr>
             <a:r>
               <a:rPr lang="en-US" sz="1200" i="1" u="sng" dirty="0">
                 <a:solidFill>
@@ -6380,7 +5172,7 @@
                 <a:latin typeface="Segoe UI" pitchFamily="34" charset="0"/>
                 <a:ea typeface="Segoe UI" pitchFamily="34" charset="-122"/>
                 <a:cs typeface="Segoe UI" pitchFamily="34" charset="-120"/>
-                <a:hlinkClick r:id="rId3" invalidUrl="" action="" tgtFrame="" tooltip="" history="1" highlightClick="0" endSnd="0">
+                <a:hlinkClick r:id="rId5">
                   <a:extLst>
                     <a:ext uri="{A12FA001-AC4F-418D-AE19-62706E023703}">
                       <ahyp:hlinkClr xmlns:ahyp="http://schemas.microsoft.com/office/drawing/2018/hyperlinkcolor" val="tx"/>
@@ -6422,7 +5214,7 @@
         </p:nvSpPr>
         <p:spPr>
           <a:xfrm>
-            <a:off x="722376" y="4800600"/>
+            <a:off x="731825" y="4915775"/>
             <a:ext cx="640080" cy="822960"/>
           </a:xfrm>
           <a:prstGeom prst="rect">
@@ -6435,7 +5227,7 @@
           <a:bodyPr wrap="square" lIns="0" tIns="0" rIns="0" bIns="0" rtlCol="0" anchor="ctr"/>
           <a:lstStyle/>
           <a:p>
-            <a:pPr indent="0" marL="0">
+            <a:pPr marL="0" indent="0">
               <a:buNone/>
             </a:pPr>
             <a:r>
@@ -6474,7 +5266,7 @@
           <a:bodyPr wrap="square" lIns="0" tIns="0" rIns="0" bIns="0" rtlCol="0" anchor="ctr"/>
           <a:lstStyle/>
           <a:p>
-            <a:pPr indent="0" marL="0">
+            <a:pPr marL="0" indent="0">
               <a:lnSpc>
                 <a:spcPct val="112000"/>
               </a:lnSpc>
@@ -6489,19 +5281,10 @@
                 <a:ea typeface="Segoe UI" pitchFamily="34" charset="-122"/>
                 <a:cs typeface="Segoe UI" pitchFamily="34" charset="-120"/>
               </a:rPr>
-              <a:t>Чтобы наука и бизнес нашли друг друга,</a:t>
-            </a:r>
-            <a:endParaRPr lang="en-US" sz="2000" dirty="0"/>
-          </a:p>
-          <a:p>
-            <a:pPr indent="0" marL="0">
-              <a:lnSpc>
-                <a:spcPct val="112000"/>
-              </a:lnSpc>
-              <a:buNone/>
-            </a:pPr>
-            <a:r>
-              <a:rPr lang="en-US" sz="2000" i="1" dirty="0">
+              <a:t>Чтобы наука и бизнес нашли друг </a:t>
+            </a:r>
+            <a:r>
+              <a:rPr lang="en-US" sz="2000" i="1" dirty="0" err="1">
                 <a:solidFill>
                   <a:srgbClr val="1E2761"/>
                 </a:solidFill>
@@ -6509,47 +5292,58 @@
                 <a:ea typeface="Segoe UI" pitchFamily="34" charset="-122"/>
                 <a:cs typeface="Segoe UI" pitchFamily="34" charset="-120"/>
               </a:rPr>
-              <a:t>нужен технологический брокер»</a:t>
-            </a:r>
-            <a:endParaRPr lang="en-US" sz="2000" dirty="0"/>
-          </a:p>
-        </p:txBody>
-      </p:sp>
-      <p:sp>
-        <p:nvSpPr>
-          <p:cNvPr id="23" name="Text 21">
-            <a:hlinkClick r:id="rId4" tooltip=""/>
-          </p:cNvPr>
-          <p:cNvSpPr txBox="1"/>
-          <p:nvPr/>
-        </p:nvSpPr>
-        <p:spPr>
-          <a:xfrm>
-            <a:off x="1371600" y="5861304"/>
-            <a:ext cx="10088575" cy="292608"/>
-          </a:xfrm>
-          <a:prstGeom prst="rect">
-            <a:avLst/>
-          </a:prstGeom>
-          <a:noFill/>
-          <a:ln/>
-        </p:spPr>
-        <p:txBody>
-          <a:bodyPr wrap="square" lIns="0" tIns="0" rIns="0" bIns="0" rtlCol="0" anchor="ctr"/>
-          <a:lstStyle/>
-          <a:p>
-            <a:pPr indent="0" marL="0">
-              <a:buNone/>
-            </a:pPr>
-            <a:r>
-              <a:rPr lang="en-US" sz="1400" u="sng" dirty="0">
+              <a:t>друга,нужен</a:t>
+            </a:r>
+            <a:r>
+              <a:rPr lang="en-US" sz="2000" i="1" dirty="0">
                 <a:solidFill>
                   <a:srgbClr val="1E2761"/>
                 </a:solidFill>
                 <a:latin typeface="Segoe UI" pitchFamily="34" charset="0"/>
                 <a:ea typeface="Segoe UI" pitchFamily="34" charset="-122"/>
                 <a:cs typeface="Segoe UI" pitchFamily="34" charset="-120"/>
-                <a:hlinkClick r:id="rId4" invalidUrl="" action="" tgtFrame="" tooltip="" history="1" highlightClick="0" endSnd="0">
+              </a:rPr>
+              <a:t> технологический брокер»</a:t>
+            </a:r>
+            <a:endParaRPr lang="en-US" sz="2000" dirty="0"/>
+          </a:p>
+        </p:txBody>
+      </p:sp>
+      <p:sp>
+        <p:nvSpPr>
+          <p:cNvPr id="23" name="Text 21">
+            <a:hlinkClick r:id="rId6"/>
+          </p:cNvPr>
+          <p:cNvSpPr txBox="1"/>
+          <p:nvPr/>
+        </p:nvSpPr>
+        <p:spPr>
+          <a:xfrm>
+            <a:off x="1371600" y="5861304"/>
+            <a:ext cx="10088575" cy="292608"/>
+          </a:xfrm>
+          <a:prstGeom prst="rect">
+            <a:avLst/>
+          </a:prstGeom>
+          <a:noFill/>
+          <a:ln/>
+        </p:spPr>
+        <p:txBody>
+          <a:bodyPr wrap="square" lIns="0" tIns="0" rIns="0" bIns="0" rtlCol="0" anchor="ctr"/>
+          <a:lstStyle/>
+          <a:p>
+            <a:pPr marL="0" indent="0">
+              <a:buNone/>
+            </a:pPr>
+            <a:r>
+              <a:rPr lang="en-US" sz="1400" u="sng" dirty="0">
+                <a:solidFill>
+                  <a:srgbClr val="1E2761"/>
+                </a:solidFill>
+                <a:latin typeface="Segoe UI" pitchFamily="34" charset="0"/>
+                <a:ea typeface="Segoe UI" pitchFamily="34" charset="-122"/>
+                <a:cs typeface="Segoe UI" pitchFamily="34" charset="-120"/>
+                <a:hlinkClick r:id="rId6">
                   <a:extLst>
                     <a:ext uri="{A12FA001-AC4F-418D-AE19-62706E023703}">
                       <ahyp:hlinkClr xmlns:ahyp="http://schemas.microsoft.com/office/drawing/2018/hyperlinkcolor" val="tx"/>
@@ -6584,7 +5378,7 @@
           <a:bodyPr wrap="square" lIns="0" tIns="0" rIns="0" bIns="0" rtlCol="0" anchor="ctr"/>
           <a:lstStyle/>
           <a:p>
-            <a:pPr indent="0" marL="0">
+            <a:pPr marL="0" indent="0">
               <a:buNone/>
             </a:pPr>
             <a:r>
@@ -6623,7 +5417,7 @@
           <a:bodyPr wrap="square" lIns="0" tIns="0" rIns="0" bIns="0" rtlCol="0" anchor="ctr"/>
           <a:lstStyle/>
           <a:p>
-            <a:pPr algn="r" indent="0" marL="0">
+            <a:pPr marL="0" indent="0" algn="r">
               <a:buNone/>
             </a:pPr>
             <a:r>
@@ -6687,11 +5481,11 @@
           <a:bodyPr wrap="square" lIns="0" tIns="0" rIns="0" bIns="0" rtlCol="0" anchor="ctr"/>
           <a:lstStyle/>
           <a:p>
-            <a:pPr indent="0" marL="0">
-              <a:buNone/>
-            </a:pPr>
-            <a:r>
-              <a:rPr lang="en-US" sz="1300" spc="300" kern="0" dirty="0">
+            <a:pPr marL="0" indent="0">
+              <a:buNone/>
+            </a:pPr>
+            <a:r>
+              <a:rPr lang="en-US" sz="1300" kern="0" spc="300" dirty="0">
                 <a:solidFill>
                   <a:srgbClr val="B4552D"/>
                 </a:solidFill>
@@ -6726,7 +5520,7 @@
           <a:bodyPr wrap="square" lIns="0" tIns="0" rIns="0" bIns="0" rtlCol="0" anchor="ctr"/>
           <a:lstStyle/>
           <a:p>
-            <a:pPr indent="0" marL="0">
+            <a:pPr marL="0" indent="0">
               <a:buNone/>
             </a:pPr>
             <a:r>
@@ -6790,7 +5584,7 @@
             <a:prstDash val="solid"/>
           </a:ln>
           <a:effectLst>
-            <a:outerShdw sx="100000" sy="100000" kx="0" ky="0" algn="bl" rotWithShape="0" blurRad="177800" dist="50800" dir="5400000">
+            <a:outerShdw blurRad="177800" dist="50800" dir="5400000" algn="bl" rotWithShape="0">
               <a:srgbClr val="7E88A8">
                 <a:alpha val="30000"/>
               </a:srgbClr>
@@ -6839,7 +5633,7 @@
           <a:bodyPr wrap="square" lIns="0" tIns="0" rIns="0" bIns="0" rtlCol="0" anchor="ctr"/>
           <a:lstStyle/>
           <a:p>
-            <a:pPr algn="ctr" indent="0" marL="0">
+            <a:pPr marL="0" indent="0" algn="ctr">
               <a:buNone/>
             </a:pPr>
             <a:r>
@@ -6878,7 +5672,7 @@
           <a:bodyPr wrap="square" lIns="0" tIns="0" rIns="0" bIns="0" rtlCol="0" anchor="t"/>
           <a:lstStyle/>
           <a:p>
-            <a:pPr indent="0" marL="0">
+            <a:pPr marL="0" indent="0">
               <a:lnSpc>
                 <a:spcPct val="102000"/>
               </a:lnSpc>
@@ -6920,7 +5714,7 @@
           <a:bodyPr wrap="square" lIns="0" tIns="0" rIns="0" bIns="0" rtlCol="0" anchor="t"/>
           <a:lstStyle/>
           <a:p>
-            <a:pPr indent="0" marL="0">
+            <a:pPr marL="0" indent="0">
               <a:lnSpc>
                 <a:spcPct val="108000"/>
               </a:lnSpc>
@@ -6967,7 +5761,7 @@
             <a:prstDash val="solid"/>
           </a:ln>
           <a:effectLst>
-            <a:outerShdw sx="100000" sy="100000" kx="0" ky="0" algn="bl" rotWithShape="0" blurRad="177800" dist="50800" dir="5400000">
+            <a:outerShdw blurRad="177800" dist="50800" dir="5400000" algn="bl" rotWithShape="0">
               <a:srgbClr val="7E88A8">
                 <a:alpha val="30000"/>
               </a:srgbClr>
@@ -7016,7 +5810,7 @@
           <a:bodyPr wrap="square" lIns="0" tIns="0" rIns="0" bIns="0" rtlCol="0" anchor="ctr"/>
           <a:lstStyle/>
           <a:p>
-            <a:pPr algn="ctr" indent="0" marL="0">
+            <a:pPr marL="0" indent="0" algn="ctr">
               <a:buNone/>
             </a:pPr>
             <a:r>
@@ -7055,7 +5849,7 @@
           <a:bodyPr wrap="square" lIns="0" tIns="0" rIns="0" bIns="0" rtlCol="0" anchor="t"/>
           <a:lstStyle/>
           <a:p>
-            <a:pPr indent="0" marL="0">
+            <a:pPr marL="0" indent="0">
               <a:lnSpc>
                 <a:spcPct val="102000"/>
               </a:lnSpc>
@@ -7097,7 +5891,7 @@
           <a:bodyPr wrap="square" lIns="0" tIns="0" rIns="0" bIns="0" rtlCol="0" anchor="t"/>
           <a:lstStyle/>
           <a:p>
-            <a:pPr indent="0" marL="0">
+            <a:pPr marL="0" indent="0">
               <a:lnSpc>
                 <a:spcPct val="108000"/>
               </a:lnSpc>
@@ -7144,7 +5938,7 @@
             <a:prstDash val="solid"/>
           </a:ln>
           <a:effectLst>
-            <a:outerShdw sx="100000" sy="100000" kx="0" ky="0" algn="bl" rotWithShape="0" blurRad="177800" dist="50800" dir="5400000">
+            <a:outerShdw blurRad="177800" dist="50800" dir="5400000" algn="bl" rotWithShape="0">
               <a:srgbClr val="7E88A8">
                 <a:alpha val="30000"/>
               </a:srgbClr>
@@ -7193,7 +5987,7 @@
           <a:bodyPr wrap="square" lIns="0" tIns="0" rIns="0" bIns="0" rtlCol="0" anchor="ctr"/>
           <a:lstStyle/>
           <a:p>
-            <a:pPr algn="ctr" indent="0" marL="0">
+            <a:pPr marL="0" indent="0" algn="ctr">
               <a:buNone/>
             </a:pPr>
             <a:r>
@@ -7232,7 +6026,7 @@
           <a:bodyPr wrap="square" lIns="0" tIns="0" rIns="0" bIns="0" rtlCol="0" anchor="t"/>
           <a:lstStyle/>
           <a:p>
-            <a:pPr indent="0" marL="0">
+            <a:pPr marL="0" indent="0">
               <a:lnSpc>
                 <a:spcPct val="102000"/>
               </a:lnSpc>
@@ -7274,7 +6068,7 @@
           <a:bodyPr wrap="square" lIns="0" tIns="0" rIns="0" bIns="0" rtlCol="0" anchor="t"/>
           <a:lstStyle/>
           <a:p>
-            <a:pPr indent="0" marL="0">
+            <a:pPr marL="0" indent="0">
               <a:lnSpc>
                 <a:spcPct val="108000"/>
               </a:lnSpc>
@@ -7321,7 +6115,7 @@
             <a:prstDash val="solid"/>
           </a:ln>
           <a:effectLst>
-            <a:outerShdw sx="100000" sy="100000" kx="0" ky="0" algn="bl" rotWithShape="0" blurRad="177800" dist="50800" dir="5400000">
+            <a:outerShdw blurRad="177800" dist="50800" dir="5400000" algn="bl" rotWithShape="0">
               <a:srgbClr val="7E88A8">
                 <a:alpha val="30000"/>
               </a:srgbClr>
@@ -7370,7 +6164,7 @@
           <a:bodyPr wrap="square" lIns="0" tIns="0" rIns="0" bIns="0" rtlCol="0" anchor="ctr"/>
           <a:lstStyle/>
           <a:p>
-            <a:pPr algn="ctr" indent="0" marL="0">
+            <a:pPr marL="0" indent="0" algn="ctr">
               <a:buNone/>
             </a:pPr>
             <a:r>
@@ -7409,7 +6203,7 @@
           <a:bodyPr wrap="square" lIns="0" tIns="0" rIns="0" bIns="0" rtlCol="0" anchor="t"/>
           <a:lstStyle/>
           <a:p>
-            <a:pPr indent="0" marL="0">
+            <a:pPr marL="0" indent="0">
               <a:lnSpc>
                 <a:spcPct val="102000"/>
               </a:lnSpc>
@@ -7451,7 +6245,7 @@
           <a:bodyPr wrap="square" lIns="0" tIns="0" rIns="0" bIns="0" rtlCol="0" anchor="t"/>
           <a:lstStyle/>
           <a:p>
-            <a:pPr indent="0" marL="0">
+            <a:pPr marL="0" indent="0">
               <a:lnSpc>
                 <a:spcPct val="108000"/>
               </a:lnSpc>
@@ -7493,7 +6287,7 @@
           <a:bodyPr wrap="square" lIns="0" tIns="0" rIns="0" bIns="0" rtlCol="0" anchor="ctr"/>
           <a:lstStyle/>
           <a:p>
-            <a:pPr indent="0" marL="0">
+            <a:pPr marL="0" indent="0">
               <a:buNone/>
             </a:pPr>
             <a:r>
@@ -7532,7 +6326,7 @@
           <a:bodyPr wrap="square" lIns="0" tIns="0" rIns="0" bIns="0" rtlCol="0" anchor="ctr"/>
           <a:lstStyle/>
           <a:p>
-            <a:pPr algn="r" indent="0" marL="0">
+            <a:pPr marL="0" indent="0" algn="r">
               <a:buNone/>
             </a:pPr>
             <a:r>
@@ -7596,11 +6390,11 @@
           <a:bodyPr wrap="square" lIns="0" tIns="0" rIns="0" bIns="0" rtlCol="0" anchor="ctr"/>
           <a:lstStyle/>
           <a:p>
-            <a:pPr indent="0" marL="0">
-              <a:buNone/>
-            </a:pPr>
-            <a:r>
-              <a:rPr lang="en-US" sz="1300" spc="300" kern="0" dirty="0">
+            <a:pPr marL="0" indent="0">
+              <a:buNone/>
+            </a:pPr>
+            <a:r>
+              <a:rPr lang="en-US" sz="1300" kern="0" spc="300" dirty="0">
                 <a:solidFill>
                   <a:srgbClr val="B4552D"/>
                 </a:solidFill>
@@ -7635,7 +6429,7 @@
           <a:bodyPr wrap="square" lIns="0" tIns="0" rIns="0" bIns="0" rtlCol="0" anchor="ctr"/>
           <a:lstStyle/>
           <a:p>
-            <a:pPr indent="0" marL="0">
+            <a:pPr marL="0" indent="0">
               <a:buNone/>
             </a:pPr>
             <a:r>
@@ -7655,14 +6449,14 @@
       </p:sp>
       <p:sp>
         <p:nvSpPr>
-          <p:cNvPr id="4" name="Shape 2"/>
+          <p:cNvPr id="5" name="Shape 3"/>
           <p:cNvSpPr/>
           <p:nvPr/>
         </p:nvSpPr>
         <p:spPr>
           <a:xfrm>
-            <a:off x="502920" y="1133856"/>
-            <a:ext cx="1097280" cy="64008"/>
+            <a:off x="2331720" y="1444752"/>
+            <a:ext cx="2188388" cy="45720"/>
           </a:xfrm>
           <a:prstGeom prst="rect">
             <a:avLst/>
@@ -7675,13 +6469,52 @@
       </p:sp>
       <p:sp>
         <p:nvSpPr>
-          <p:cNvPr id="5" name="Shape 3"/>
+          <p:cNvPr id="6" name="Text 4"/>
+          <p:cNvSpPr txBox="1"/>
+          <p:nvPr/>
+        </p:nvSpPr>
+        <p:spPr>
+          <a:xfrm>
+            <a:off x="2331720" y="1554480"/>
+            <a:ext cx="2188388" cy="566928"/>
+          </a:xfrm>
+          <a:prstGeom prst="rect">
+            <a:avLst/>
+          </a:prstGeom>
+          <a:noFill/>
+          <a:ln/>
+        </p:spPr>
+        <p:txBody>
+          <a:bodyPr wrap="square" lIns="0" tIns="0" rIns="0" bIns="0" rtlCol="0" anchor="t"/>
+          <a:lstStyle/>
+          <a:p>
+            <a:pPr marL="0" indent="0">
+              <a:buNone/>
+            </a:pPr>
+            <a:r>
+              <a:rPr lang="en-US" sz="1600" dirty="0">
+                <a:solidFill>
+                  <a:srgbClr val="1E2761"/>
+                </a:solidFill>
+                <a:latin typeface="Segoe UI Semibold" pitchFamily="34" charset="0"/>
+                <a:ea typeface="Segoe UI Semibold" pitchFamily="34" charset="-122"/>
+                <a:cs typeface="Segoe UI Semibold" pitchFamily="34" charset="-120"/>
+              </a:rPr>
+              <a:t>1. Задача</a:t>
+            </a:r>
+            <a:endParaRPr lang="en-US" sz="1600" dirty="0"/>
+          </a:p>
+        </p:txBody>
+      </p:sp>
+      <p:sp>
+        <p:nvSpPr>
+          <p:cNvPr id="7" name="Shape 5"/>
           <p:cNvSpPr/>
           <p:nvPr/>
         </p:nvSpPr>
         <p:spPr>
           <a:xfrm>
-            <a:off x="2331720" y="1444752"/>
+            <a:off x="4721276" y="1444752"/>
             <a:ext cx="2188388" cy="45720"/>
           </a:xfrm>
           <a:prstGeom prst="rect">
@@ -7695,13 +6528,13 @@
       </p:sp>
       <p:sp>
         <p:nvSpPr>
-          <p:cNvPr id="6" name="Text 4"/>
-          <p:cNvSpPr txBox="1"/>
-          <p:nvPr/>
-        </p:nvSpPr>
-        <p:spPr>
-          <a:xfrm>
-            <a:off x="2331720" y="1554480"/>
+          <p:cNvPr id="8" name="Text 6"/>
+          <p:cNvSpPr txBox="1"/>
+          <p:nvPr/>
+        </p:nvSpPr>
+        <p:spPr>
+          <a:xfrm>
+            <a:off x="4721276" y="1554480"/>
             <a:ext cx="2188388" cy="566928"/>
           </a:xfrm>
           <a:prstGeom prst="rect">
@@ -7714,7 +6547,7 @@
           <a:bodyPr wrap="square" lIns="0" tIns="0" rIns="0" bIns="0" rtlCol="0" anchor="t"/>
           <a:lstStyle/>
           <a:p>
-            <a:pPr indent="0" marL="0">
+            <a:pPr marL="0" indent="0">
               <a:buNone/>
             </a:pPr>
             <a:r>
@@ -7726,7 +6559,7 @@
                 <a:ea typeface="Segoe UI Semibold" pitchFamily="34" charset="-122"/>
                 <a:cs typeface="Segoe UI Semibold" pitchFamily="34" charset="-120"/>
               </a:rPr>
-              <a:t>1. Задача</a:t>
+              <a:t>2. Поиск и проверка</a:t>
             </a:r>
             <a:endParaRPr lang="en-US" sz="1600" dirty="0"/>
           </a:p>
@@ -7734,13 +6567,13 @@
       </p:sp>
       <p:sp>
         <p:nvSpPr>
-          <p:cNvPr id="7" name="Shape 5"/>
+          <p:cNvPr id="9" name="Shape 7"/>
           <p:cNvSpPr/>
           <p:nvPr/>
         </p:nvSpPr>
         <p:spPr>
           <a:xfrm>
-            <a:off x="4721276" y="1444752"/>
+            <a:off x="7110832" y="1444752"/>
             <a:ext cx="2188388" cy="45720"/>
           </a:xfrm>
           <a:prstGeom prst="rect">
@@ -7754,13 +6587,13 @@
       </p:sp>
       <p:sp>
         <p:nvSpPr>
-          <p:cNvPr id="8" name="Text 6"/>
-          <p:cNvSpPr txBox="1"/>
-          <p:nvPr/>
-        </p:nvSpPr>
-        <p:spPr>
-          <a:xfrm>
-            <a:off x="4721276" y="1554480"/>
+          <p:cNvPr id="10" name="Text 8"/>
+          <p:cNvSpPr txBox="1"/>
+          <p:nvPr/>
+        </p:nvSpPr>
+        <p:spPr>
+          <a:xfrm>
+            <a:off x="7110832" y="1554480"/>
             <a:ext cx="2188388" cy="566928"/>
           </a:xfrm>
           <a:prstGeom prst="rect">
@@ -7773,7 +6606,7 @@
           <a:bodyPr wrap="square" lIns="0" tIns="0" rIns="0" bIns="0" rtlCol="0" anchor="t"/>
           <a:lstStyle/>
           <a:p>
-            <a:pPr indent="0" marL="0">
+            <a:pPr marL="0" indent="0">
               <a:buNone/>
             </a:pPr>
             <a:r>
@@ -7785,7 +6618,7 @@
                 <a:ea typeface="Segoe UI Semibold" pitchFamily="34" charset="-122"/>
                 <a:cs typeface="Segoe UI Semibold" pitchFamily="34" charset="-120"/>
               </a:rPr>
-              <a:t>2. Поиск и проверка</a:t>
+              <a:t>3. Сделка и поддержка</a:t>
             </a:r>
             <a:endParaRPr lang="en-US" sz="1600" dirty="0"/>
           </a:p>
@@ -7793,13 +6626,13 @@
       </p:sp>
       <p:sp>
         <p:nvSpPr>
-          <p:cNvPr id="9" name="Shape 7"/>
+          <p:cNvPr id="11" name="Shape 9"/>
           <p:cNvSpPr/>
           <p:nvPr/>
         </p:nvSpPr>
         <p:spPr>
           <a:xfrm>
-            <a:off x="7110832" y="1444752"/>
+            <a:off x="9500387" y="1444752"/>
             <a:ext cx="2188388" cy="45720"/>
           </a:xfrm>
           <a:prstGeom prst="rect">
@@ -7813,13 +6646,13 @@
       </p:sp>
       <p:sp>
         <p:nvSpPr>
-          <p:cNvPr id="10" name="Text 8"/>
-          <p:cNvSpPr txBox="1"/>
-          <p:nvPr/>
-        </p:nvSpPr>
-        <p:spPr>
-          <a:xfrm>
-            <a:off x="7110832" y="1554480"/>
+          <p:cNvPr id="12" name="Text 10"/>
+          <p:cNvSpPr txBox="1"/>
+          <p:nvPr/>
+        </p:nvSpPr>
+        <p:spPr>
+          <a:xfrm>
+            <a:off x="9500387" y="1554480"/>
             <a:ext cx="2188388" cy="566928"/>
           </a:xfrm>
           <a:prstGeom prst="rect">
@@ -7832,7 +6665,7 @@
           <a:bodyPr wrap="square" lIns="0" tIns="0" rIns="0" bIns="0" rtlCol="0" anchor="t"/>
           <a:lstStyle/>
           <a:p>
-            <a:pPr indent="0" marL="0">
+            <a:pPr marL="0" indent="0">
               <a:buNone/>
             </a:pPr>
             <a:r>
@@ -7844,65 +6677,6 @@
                 <a:ea typeface="Segoe UI Semibold" pitchFamily="34" charset="-122"/>
                 <a:cs typeface="Segoe UI Semibold" pitchFamily="34" charset="-120"/>
               </a:rPr>
-              <a:t>3. Сделка и поддержка</a:t>
-            </a:r>
-            <a:endParaRPr lang="en-US" sz="1600" dirty="0"/>
-          </a:p>
-        </p:txBody>
-      </p:sp>
-      <p:sp>
-        <p:nvSpPr>
-          <p:cNvPr id="11" name="Shape 9"/>
-          <p:cNvSpPr/>
-          <p:nvPr/>
-        </p:nvSpPr>
-        <p:spPr>
-          <a:xfrm>
-            <a:off x="9500387" y="1444752"/>
-            <a:ext cx="2188388" cy="45720"/>
-          </a:xfrm>
-          <a:prstGeom prst="rect">
-            <a:avLst/>
-          </a:prstGeom>
-          <a:solidFill>
-            <a:srgbClr val="B4552D"/>
-          </a:solidFill>
-          <a:ln/>
-        </p:spPr>
-      </p:sp>
-      <p:sp>
-        <p:nvSpPr>
-          <p:cNvPr id="12" name="Text 10"/>
-          <p:cNvSpPr txBox="1"/>
-          <p:nvPr/>
-        </p:nvSpPr>
-        <p:spPr>
-          <a:xfrm>
-            <a:off x="9500387" y="1554480"/>
-            <a:ext cx="2188388" cy="566928"/>
-          </a:xfrm>
-          <a:prstGeom prst="rect">
-            <a:avLst/>
-          </a:prstGeom>
-          <a:noFill/>
-          <a:ln/>
-        </p:spPr>
-        <p:txBody>
-          <a:bodyPr wrap="square" lIns="0" tIns="0" rIns="0" bIns="0" rtlCol="0" anchor="t"/>
-          <a:lstStyle/>
-          <a:p>
-            <a:pPr indent="0" marL="0">
-              <a:buNone/>
-            </a:pPr>
-            <a:r>
-              <a:rPr lang="en-US" sz="1600" dirty="0">
-                <a:solidFill>
-                  <a:srgbClr val="1E2761"/>
-                </a:solidFill>
-                <a:latin typeface="Segoe UI Semibold" pitchFamily="34" charset="0"/>
-                <a:ea typeface="Segoe UI Semibold" pitchFamily="34" charset="-122"/>
-                <a:cs typeface="Segoe UI Semibold" pitchFamily="34" charset="-120"/>
-              </a:rPr>
               <a:t>4. Внедрение</a:t>
             </a:r>
             <a:endParaRPr lang="en-US" sz="1600" dirty="0"/>
@@ -7930,11 +6704,11 @@
           <a:bodyPr wrap="square" lIns="0" tIns="0" rIns="0" bIns="0" rtlCol="0" anchor="ctr"/>
           <a:lstStyle/>
           <a:p>
-            <a:pPr indent="0" marL="0">
-              <a:buNone/>
-            </a:pPr>
-            <a:r>
-              <a:rPr lang="en-US" sz="1400" spc="200" kern="0" dirty="0">
+            <a:pPr marL="0" indent="0">
+              <a:buNone/>
+            </a:pPr>
+            <a:r>
+              <a:rPr lang="en-US" sz="1400" kern="0" spc="200" dirty="0">
                 <a:solidFill>
                   <a:srgbClr val="6B7699"/>
                 </a:solidFill>
@@ -7974,7 +6748,7 @@
             <a:prstDash val="solid"/>
           </a:ln>
           <a:effectLst>
-            <a:outerShdw sx="100000" sy="100000" kx="0" ky="0" algn="bl" rotWithShape="0" blurRad="177800" dist="50800" dir="5400000">
+            <a:outerShdw blurRad="177800" dist="50800" dir="5400000" algn="bl" rotWithShape="0">
               <a:srgbClr val="7E88A8">
                 <a:alpha val="30000"/>
               </a:srgbClr>
@@ -8003,7 +6777,7 @@
           <a:bodyPr wrap="square" lIns="0" tIns="0" rIns="0" bIns="0" rtlCol="0" anchor="ctr"/>
           <a:lstStyle/>
           <a:p>
-            <a:pPr indent="0" marL="0">
+            <a:pPr marL="0" indent="0">
               <a:lnSpc>
                 <a:spcPct val="105000"/>
               </a:lnSpc>
@@ -8023,7 +6797,7 @@
             <a:endParaRPr lang="en-US" sz="1600" dirty="0"/>
           </a:p>
           <a:p>
-            <a:pPr indent="0" marL="0">
+            <a:pPr marL="0" indent="0">
               <a:lnSpc>
                 <a:spcPct val="105000"/>
               </a:lnSpc>
@@ -8070,7 +6844,7 @@
             <a:prstDash val="solid"/>
           </a:ln>
           <a:effectLst>
-            <a:outerShdw sx="100000" sy="100000" kx="0" ky="0" algn="bl" rotWithShape="0" blurRad="177800" dist="50800" dir="5400000">
+            <a:outerShdw blurRad="177800" dist="50800" dir="5400000" algn="bl" rotWithShape="0">
               <a:srgbClr val="7E88A8">
                 <a:alpha val="30000"/>
               </a:srgbClr>
@@ -8099,7 +6873,7 @@
           <a:bodyPr wrap="square" lIns="0" tIns="0" rIns="0" bIns="0" rtlCol="0" anchor="ctr"/>
           <a:lstStyle/>
           <a:p>
-            <a:pPr indent="0" marL="0">
+            <a:pPr marL="0" indent="0">
               <a:lnSpc>
                 <a:spcPct val="105000"/>
               </a:lnSpc>
@@ -8146,7 +6920,7 @@
             <a:prstDash val="solid"/>
           </a:ln>
           <a:effectLst>
-            <a:outerShdw sx="100000" sy="100000" kx="0" ky="0" algn="bl" rotWithShape="0" blurRad="177800" dist="50800" dir="5400000">
+            <a:outerShdw blurRad="177800" dist="50800" dir="5400000" algn="bl" rotWithShape="0">
               <a:srgbClr val="7E88A8">
                 <a:alpha val="30000"/>
               </a:srgbClr>
@@ -8175,7 +6949,7 @@
           <a:bodyPr wrap="square" lIns="0" tIns="0" rIns="0" bIns="0" rtlCol="0" anchor="ctr"/>
           <a:lstStyle/>
           <a:p>
-            <a:pPr indent="0" marL="0">
+            <a:pPr marL="0" indent="0">
               <a:lnSpc>
                 <a:spcPct val="105000"/>
               </a:lnSpc>
@@ -8222,7 +6996,7 @@
             <a:prstDash val="solid"/>
           </a:ln>
           <a:effectLst>
-            <a:outerShdw sx="100000" sy="100000" kx="0" ky="0" algn="bl" rotWithShape="0" blurRad="177800" dist="50800" dir="5400000">
+            <a:outerShdw blurRad="177800" dist="50800" dir="5400000" algn="bl" rotWithShape="0">
               <a:srgbClr val="7E88A8">
                 <a:alpha val="30000"/>
               </a:srgbClr>
@@ -8251,7 +7025,7 @@
           <a:bodyPr wrap="square" lIns="0" tIns="0" rIns="0" bIns="0" rtlCol="0" anchor="ctr"/>
           <a:lstStyle/>
           <a:p>
-            <a:pPr indent="0" marL="0">
+            <a:pPr marL="0" indent="0">
               <a:lnSpc>
                 <a:spcPct val="105000"/>
               </a:lnSpc>
@@ -8271,7 +7045,7 @@
             <a:endParaRPr lang="en-US" sz="1600" dirty="0"/>
           </a:p>
           <a:p>
-            <a:pPr indent="0" marL="0">
+            <a:pPr marL="0" indent="0">
               <a:lnSpc>
                 <a:spcPct val="105000"/>
               </a:lnSpc>
@@ -8313,11 +7087,11 @@
           <a:bodyPr wrap="square" lIns="0" tIns="0" rIns="0" bIns="0" rtlCol="0" anchor="ctr"/>
           <a:lstStyle/>
           <a:p>
-            <a:pPr indent="0" marL="0">
-              <a:buNone/>
-            </a:pPr>
-            <a:r>
-              <a:rPr lang="en-US" sz="1400" spc="200" kern="0" dirty="0">
+            <a:pPr marL="0" indent="0">
+              <a:buNone/>
+            </a:pPr>
+            <a:r>
+              <a:rPr lang="en-US" sz="1400" kern="0" spc="200" dirty="0">
                 <a:solidFill>
                   <a:srgbClr val="1E2761"/>
                 </a:solidFill>
@@ -8357,7 +7131,7 @@
             <a:prstDash val="solid"/>
           </a:ln>
           <a:effectLst>
-            <a:outerShdw sx="100000" sy="100000" kx="0" ky="0" algn="bl" rotWithShape="0" blurRad="177800" dist="50800" dir="5400000">
+            <a:outerShdw blurRad="177800" dist="50800" dir="5400000" algn="bl" rotWithShape="0">
               <a:srgbClr val="7E88A8">
                 <a:alpha val="30000"/>
               </a:srgbClr>
@@ -8386,7 +7160,7 @@
           <a:bodyPr wrap="square" lIns="0" tIns="0" rIns="0" bIns="0" rtlCol="0" anchor="ctr"/>
           <a:lstStyle/>
           <a:p>
-            <a:pPr indent="0" marL="0">
+            <a:pPr marL="0" indent="0">
               <a:lnSpc>
                 <a:spcPct val="105000"/>
               </a:lnSpc>
@@ -8406,7 +7180,7 @@
             <a:endParaRPr lang="en-US" sz="1600" dirty="0"/>
           </a:p>
           <a:p>
-            <a:pPr indent="0" marL="0">
+            <a:pPr marL="0" indent="0">
               <a:lnSpc>
                 <a:spcPct val="105000"/>
               </a:lnSpc>
@@ -8453,7 +7227,7 @@
             <a:prstDash val="solid"/>
           </a:ln>
           <a:effectLst>
-            <a:outerShdw sx="100000" sy="100000" kx="0" ky="0" algn="bl" rotWithShape="0" blurRad="177800" dist="50800" dir="5400000">
+            <a:outerShdw blurRad="177800" dist="50800" dir="5400000" algn="bl" rotWithShape="0">
               <a:srgbClr val="7E88A8">
                 <a:alpha val="30000"/>
               </a:srgbClr>
@@ -8482,7 +7256,7 @@
           <a:bodyPr wrap="square" lIns="0" tIns="0" rIns="0" bIns="0" rtlCol="0" anchor="ctr"/>
           <a:lstStyle/>
           <a:p>
-            <a:pPr indent="0" marL="0">
+            <a:pPr marL="0" indent="0">
               <a:lnSpc>
                 <a:spcPct val="105000"/>
               </a:lnSpc>
@@ -8502,7 +7276,7 @@
             <a:endParaRPr lang="en-US" sz="1600" dirty="0"/>
           </a:p>
           <a:p>
-            <a:pPr indent="0" marL="0">
+            <a:pPr marL="0" indent="0">
               <a:lnSpc>
                 <a:spcPct val="105000"/>
               </a:lnSpc>
@@ -8549,7 +7323,7 @@
             <a:prstDash val="solid"/>
           </a:ln>
           <a:effectLst>
-            <a:outerShdw sx="100000" sy="100000" kx="0" ky="0" algn="bl" rotWithShape="0" blurRad="177800" dist="50800" dir="5400000">
+            <a:outerShdw blurRad="177800" dist="50800" dir="5400000" algn="bl" rotWithShape="0">
               <a:srgbClr val="7E88A8">
                 <a:alpha val="30000"/>
               </a:srgbClr>
@@ -8578,7 +7352,7 @@
           <a:bodyPr wrap="square" lIns="0" tIns="0" rIns="0" bIns="0" rtlCol="0" anchor="ctr"/>
           <a:lstStyle/>
           <a:p>
-            <a:pPr indent="0" marL="0">
+            <a:pPr marL="0" indent="0">
               <a:lnSpc>
                 <a:spcPct val="105000"/>
               </a:lnSpc>
@@ -8598,7 +7372,7 @@
             <a:endParaRPr lang="en-US" sz="1600" dirty="0"/>
           </a:p>
           <a:p>
-            <a:pPr indent="0" marL="0">
+            <a:pPr marL="0" indent="0">
               <a:lnSpc>
                 <a:spcPct val="105000"/>
               </a:lnSpc>
@@ -8645,7 +7419,7 @@
             <a:prstDash val="solid"/>
           </a:ln>
           <a:effectLst>
-            <a:outerShdw sx="100000" sy="100000" kx="0" ky="0" algn="bl" rotWithShape="0" blurRad="177800" dist="50800" dir="5400000">
+            <a:outerShdw blurRad="177800" dist="50800" dir="5400000" algn="bl" rotWithShape="0">
               <a:srgbClr val="7E88A8">
                 <a:alpha val="30000"/>
               </a:srgbClr>
@@ -8674,7 +7448,7 @@
           <a:bodyPr wrap="square" lIns="0" tIns="0" rIns="0" bIns="0" rtlCol="0" anchor="ctr"/>
           <a:lstStyle/>
           <a:p>
-            <a:pPr indent="0" marL="0">
+            <a:pPr marL="0" indent="0">
               <a:lnSpc>
                 <a:spcPct val="105000"/>
               </a:lnSpc>
@@ -8694,7 +7468,7 @@
             <a:endParaRPr lang="en-US" sz="1600" dirty="0"/>
           </a:p>
           <a:p>
-            <a:pPr indent="0" marL="0">
+            <a:pPr marL="0" indent="0">
               <a:lnSpc>
                 <a:spcPct val="105000"/>
               </a:lnSpc>
@@ -8736,11 +7510,11 @@
           <a:bodyPr wrap="square" lIns="0" tIns="0" rIns="0" bIns="0" rtlCol="0" anchor="ctr"/>
           <a:lstStyle/>
           <a:p>
-            <a:pPr indent="0" marL="0">
-              <a:buNone/>
-            </a:pPr>
-            <a:r>
-              <a:rPr lang="en-US" sz="1400" spc="200" kern="0" dirty="0">
+            <a:pPr marL="0" indent="0">
+              <a:buNone/>
+            </a:pPr>
+            <a:r>
+              <a:rPr lang="en-US" sz="1400" kern="0" spc="200" dirty="0">
                 <a:solidFill>
                   <a:srgbClr val="6B7699"/>
                 </a:solidFill>
@@ -8780,7 +7554,7 @@
             <a:prstDash val="solid"/>
           </a:ln>
           <a:effectLst>
-            <a:outerShdw sx="100000" sy="100000" kx="0" ky="0" algn="bl" rotWithShape="0" blurRad="177800" dist="50800" dir="5400000">
+            <a:outerShdw blurRad="177800" dist="50800" dir="5400000" algn="bl" rotWithShape="0">
               <a:srgbClr val="7E88A8">
                 <a:alpha val="30000"/>
               </a:srgbClr>
@@ -8809,7 +7583,7 @@
           <a:bodyPr wrap="square" lIns="0" tIns="0" rIns="0" bIns="0" rtlCol="0" anchor="ctr"/>
           <a:lstStyle/>
           <a:p>
-            <a:pPr indent="0" marL="0">
+            <a:pPr marL="0" indent="0">
               <a:lnSpc>
                 <a:spcPct val="105000"/>
               </a:lnSpc>
@@ -8856,7 +7630,7 @@
             <a:prstDash val="solid"/>
           </a:ln>
           <a:effectLst>
-            <a:outerShdw sx="100000" sy="100000" kx="0" ky="0" algn="bl" rotWithShape="0" blurRad="177800" dist="50800" dir="5400000">
+            <a:outerShdw blurRad="177800" dist="50800" dir="5400000" algn="bl" rotWithShape="0">
               <a:srgbClr val="7E88A8">
                 <a:alpha val="30000"/>
               </a:srgbClr>
@@ -8885,7 +7659,7 @@
           <a:bodyPr wrap="square" lIns="0" tIns="0" rIns="0" bIns="0" rtlCol="0" anchor="ctr"/>
           <a:lstStyle/>
           <a:p>
-            <a:pPr indent="0" marL="0">
+            <a:pPr marL="0" indent="0">
               <a:lnSpc>
                 <a:spcPct val="105000"/>
               </a:lnSpc>
@@ -8932,7 +7706,7 @@
             <a:prstDash val="solid"/>
           </a:ln>
           <a:effectLst>
-            <a:outerShdw sx="100000" sy="100000" kx="0" ky="0" algn="bl" rotWithShape="0" blurRad="177800" dist="50800" dir="5400000">
+            <a:outerShdw blurRad="177800" dist="50800" dir="5400000" algn="bl" rotWithShape="0">
               <a:srgbClr val="7E88A8">
                 <a:alpha val="30000"/>
               </a:srgbClr>
@@ -8961,7 +7735,7 @@
           <a:bodyPr wrap="square" lIns="0" tIns="0" rIns="0" bIns="0" rtlCol="0" anchor="ctr"/>
           <a:lstStyle/>
           <a:p>
-            <a:pPr indent="0" marL="0">
+            <a:pPr marL="0" indent="0">
               <a:lnSpc>
                 <a:spcPct val="105000"/>
               </a:lnSpc>
@@ -8981,7 +7755,7 @@
             <a:endParaRPr lang="en-US" sz="1600" dirty="0"/>
           </a:p>
           <a:p>
-            <a:pPr indent="0" marL="0">
+            <a:pPr marL="0" indent="0">
               <a:lnSpc>
                 <a:spcPct val="105000"/>
               </a:lnSpc>
@@ -9023,7 +7797,7 @@
           <a:bodyPr wrap="square" lIns="0" tIns="0" rIns="0" bIns="0" rtlCol="0" anchor="ctr"/>
           <a:lstStyle/>
           <a:p>
-            <a:pPr indent="0" marL="0">
+            <a:pPr marL="0" indent="0">
               <a:buNone/>
             </a:pPr>
             <a:r>
@@ -9062,7 +7836,7 @@
           <a:bodyPr wrap="square" lIns="0" tIns="0" rIns="0" bIns="0" rtlCol="0" anchor="ctr"/>
           <a:lstStyle/>
           <a:p>
-            <a:pPr algn="r" indent="0" marL="0">
+            <a:pPr marL="0" indent="0" algn="r">
               <a:buNone/>
             </a:pPr>
             <a:r>
@@ -9126,11 +7900,11 @@
           <a:bodyPr wrap="square" lIns="0" tIns="0" rIns="0" bIns="0" rtlCol="0" anchor="ctr"/>
           <a:lstStyle/>
           <a:p>
-            <a:pPr indent="0" marL="0">
-              <a:buNone/>
-            </a:pPr>
-            <a:r>
-              <a:rPr lang="en-US" sz="1300" spc="300" kern="0" dirty="0">
+            <a:pPr marL="0" indent="0">
+              <a:buNone/>
+            </a:pPr>
+            <a:r>
+              <a:rPr lang="en-US" sz="1300" kern="0" spc="300" dirty="0">
                 <a:solidFill>
                   <a:srgbClr val="B4552D"/>
                 </a:solidFill>
@@ -9165,7 +7939,7 @@
           <a:bodyPr wrap="square" lIns="0" tIns="0" rIns="0" bIns="0" rtlCol="0" anchor="ctr"/>
           <a:lstStyle/>
           <a:p>
-            <a:pPr indent="0" marL="0">
+            <a:pPr marL="0" indent="0">
               <a:buNone/>
             </a:pPr>
             <a:r>
@@ -9229,7 +8003,7 @@
             <a:prstDash val="solid"/>
           </a:ln>
           <a:effectLst>
-            <a:outerShdw sx="100000" sy="100000" kx="0" ky="0" algn="bl" rotWithShape="0" blurRad="177800" dist="50800" dir="5400000">
+            <a:outerShdw blurRad="177800" dist="50800" dir="5400000" algn="bl" rotWithShape="0">
               <a:srgbClr val="7E88A8">
                 <a:alpha val="30000"/>
               </a:srgbClr>
@@ -9278,7 +8052,7 @@
           <a:bodyPr wrap="square" lIns="0" tIns="0" rIns="0" bIns="0" rtlCol="0" anchor="ctr"/>
           <a:lstStyle/>
           <a:p>
-            <a:pPr indent="0" marL="0">
+            <a:pPr marL="0" indent="0">
               <a:buNone/>
             </a:pPr>
             <a:r>
@@ -9317,7 +8091,7 @@
           <a:bodyPr wrap="square" lIns="0" tIns="0" rIns="0" bIns="0" rtlCol="0" anchor="ctr"/>
           <a:lstStyle/>
           <a:p>
-            <a:pPr indent="0" marL="0">
+            <a:pPr marL="0" indent="0">
               <a:lnSpc>
                 <a:spcPct val="118000"/>
               </a:lnSpc>
@@ -9337,7 +8111,7 @@
             <a:endParaRPr lang="en-US" sz="1800" dirty="0"/>
           </a:p>
           <a:p>
-            <a:pPr indent="0" marL="0">
+            <a:pPr marL="0" indent="0">
               <a:lnSpc>
                 <a:spcPct val="118000"/>
               </a:lnSpc>
@@ -9357,7 +8131,7 @@
             <a:endParaRPr lang="en-US" sz="1800" dirty="0"/>
           </a:p>
           <a:p>
-            <a:pPr indent="0" marL="0">
+            <a:pPr marL="0" indent="0">
               <a:lnSpc>
                 <a:spcPct val="118000"/>
               </a:lnSpc>
@@ -9404,7 +8178,7 @@
             <a:prstDash val="solid"/>
           </a:ln>
           <a:effectLst>
-            <a:outerShdw sx="100000" sy="100000" kx="0" ky="0" algn="bl" rotWithShape="0" blurRad="177800" dist="50800" dir="5400000">
+            <a:outerShdw blurRad="177800" dist="50800" dir="5400000" algn="bl" rotWithShape="0">
               <a:srgbClr val="7E88A8">
                 <a:alpha val="30000"/>
               </a:srgbClr>
@@ -9453,7 +8227,7 @@
           <a:bodyPr wrap="square" lIns="0" tIns="0" rIns="0" bIns="0" rtlCol="0" anchor="ctr"/>
           <a:lstStyle/>
           <a:p>
-            <a:pPr indent="0" marL="0">
+            <a:pPr marL="0" indent="0">
               <a:buNone/>
             </a:pPr>
             <a:r>
@@ -9492,7 +8266,7 @@
           <a:bodyPr wrap="square" lIns="0" tIns="0" rIns="0" bIns="0" rtlCol="0" anchor="t"/>
           <a:lstStyle/>
           <a:p>
-            <a:pPr indent="0" marL="0">
+            <a:pPr marL="0" indent="0">
               <a:lnSpc>
                 <a:spcPct val="105000"/>
               </a:lnSpc>
@@ -9539,7 +8313,7 @@
             <a:prstDash val="solid"/>
           </a:ln>
           <a:effectLst>
-            <a:outerShdw sx="100000" sy="100000" kx="0" ky="0" algn="bl" rotWithShape="0" blurRad="177800" dist="50800" dir="5400000">
+            <a:outerShdw blurRad="177800" dist="50800" dir="5400000" algn="bl" rotWithShape="0">
               <a:srgbClr val="7E88A8">
                 <a:alpha val="30000"/>
               </a:srgbClr>
@@ -9588,7 +8362,7 @@
           <a:bodyPr wrap="square" lIns="0" tIns="0" rIns="0" bIns="0" rtlCol="0" anchor="ctr"/>
           <a:lstStyle/>
           <a:p>
-            <a:pPr indent="0" marL="0">
+            <a:pPr marL="0" indent="0">
               <a:buNone/>
             </a:pPr>
             <a:r>
@@ -9627,7 +8401,7 @@
           <a:bodyPr wrap="square" lIns="0" tIns="0" rIns="0" bIns="0" rtlCol="0" anchor="t"/>
           <a:lstStyle/>
           <a:p>
-            <a:pPr indent="0" marL="0">
+            <a:pPr marL="0" indent="0">
               <a:lnSpc>
                 <a:spcPct val="105000"/>
               </a:lnSpc>
@@ -9674,7 +8448,7 @@
             <a:prstDash val="solid"/>
           </a:ln>
           <a:effectLst>
-            <a:outerShdw sx="100000" sy="100000" kx="0" ky="0" algn="bl" rotWithShape="0" blurRad="177800" dist="50800" dir="5400000">
+            <a:outerShdw blurRad="177800" dist="50800" dir="5400000" algn="bl" rotWithShape="0">
               <a:srgbClr val="7E88A8">
                 <a:alpha val="30000"/>
               </a:srgbClr>
@@ -9723,7 +8497,7 @@
           <a:bodyPr wrap="square" lIns="0" tIns="0" rIns="0" bIns="0" rtlCol="0" anchor="ctr"/>
           <a:lstStyle/>
           <a:p>
-            <a:pPr indent="0" marL="0">
+            <a:pPr marL="0" indent="0">
               <a:buNone/>
             </a:pPr>
             <a:r>
@@ -9762,7 +8536,7 @@
           <a:bodyPr wrap="square" lIns="0" tIns="0" rIns="0" bIns="0" rtlCol="0" anchor="t"/>
           <a:lstStyle/>
           <a:p>
-            <a:pPr indent="0" marL="0">
+            <a:pPr marL="0" indent="0">
               <a:lnSpc>
                 <a:spcPct val="105000"/>
               </a:lnSpc>
@@ -9804,7 +8578,7 @@
           <a:bodyPr wrap="square" lIns="0" tIns="0" rIns="0" bIns="0" rtlCol="0" anchor="ctr"/>
           <a:lstStyle/>
           <a:p>
-            <a:pPr indent="0" marL="0">
+            <a:pPr marL="0" indent="0">
               <a:buNone/>
             </a:pPr>
             <a:r>
@@ -9843,7 +8617,7 @@
           <a:bodyPr wrap="square" lIns="0" tIns="0" rIns="0" bIns="0" rtlCol="0" anchor="ctr"/>
           <a:lstStyle/>
           <a:p>
-            <a:pPr algn="r" indent="0" marL="0">
+            <a:pPr marL="0" indent="0" algn="r">
               <a:buNone/>
             </a:pPr>
             <a:r>
@@ -9907,11 +8681,11 @@
           <a:bodyPr wrap="square" lIns="0" tIns="0" rIns="0" bIns="0" rtlCol="0" anchor="ctr"/>
           <a:lstStyle/>
           <a:p>
-            <a:pPr indent="0" marL="0">
-              <a:buNone/>
-            </a:pPr>
-            <a:r>
-              <a:rPr lang="en-US" sz="1300" spc="300" kern="0" dirty="0">
+            <a:pPr marL="0" indent="0">
+              <a:buNone/>
+            </a:pPr>
+            <a:r>
+              <a:rPr lang="en-US" sz="1300" kern="0" spc="300" dirty="0">
                 <a:solidFill>
                   <a:srgbClr val="B4552D"/>
                 </a:solidFill>
@@ -9946,7 +8720,7 @@
           <a:bodyPr wrap="square" lIns="0" tIns="0" rIns="0" bIns="0" rtlCol="0" anchor="ctr"/>
           <a:lstStyle/>
           <a:p>
-            <a:pPr indent="0" marL="0">
+            <a:pPr marL="0" indent="0">
               <a:buNone/>
             </a:pPr>
             <a:r>
@@ -10010,7 +8784,7 @@
             <a:prstDash val="solid"/>
           </a:ln>
           <a:effectLst>
-            <a:outerShdw sx="100000" sy="100000" kx="0" ky="0" algn="bl" rotWithShape="0" blurRad="177800" dist="50800" dir="5400000">
+            <a:outerShdw blurRad="177800" dist="50800" dir="5400000" algn="bl" rotWithShape="0">
               <a:srgbClr val="7E88A8">
                 <a:alpha val="30000"/>
               </a:srgbClr>
@@ -10059,7 +8833,7 @@
           <a:bodyPr wrap="square" lIns="0" tIns="0" rIns="0" bIns="0" rtlCol="0" anchor="ctr"/>
           <a:lstStyle/>
           <a:p>
-            <a:pPr indent="0" marL="0">
+            <a:pPr marL="0" indent="0">
               <a:buNone/>
             </a:pPr>
             <a:r>
@@ -10098,7 +8872,7 @@
           <a:bodyPr wrap="square" lIns="0" tIns="0" rIns="0" bIns="0" rtlCol="0" anchor="t"/>
           <a:lstStyle/>
           <a:p>
-            <a:pPr indent="0" marL="0">
+            <a:pPr marL="0" indent="0">
               <a:lnSpc>
                 <a:spcPct val="108000"/>
               </a:lnSpc>
@@ -10113,7 +8887,62 @@
                 <a:ea typeface="Segoe UI" pitchFamily="34" charset="-122"/>
                 <a:cs typeface="Segoe UI" pitchFamily="34" charset="-120"/>
               </a:rPr>
-              <a:t>внедрённых проектов. Первых клиентов ещё нет</a:t>
+              <a:t>внедрённых проектов. </a:t>
+            </a:r>
+            <a:r>
+              <a:rPr lang="en-US" sz="1600" dirty="0" err="1">
+                <a:solidFill>
+                  <a:srgbClr val="1B2140"/>
+                </a:solidFill>
+                <a:latin typeface="Segoe UI" pitchFamily="34" charset="0"/>
+                <a:ea typeface="Segoe UI" pitchFamily="34" charset="-122"/>
+                <a:cs typeface="Segoe UI" pitchFamily="34" charset="-120"/>
+              </a:rPr>
+              <a:t>Первых</a:t>
+            </a:r>
+            <a:r>
+              <a:rPr lang="en-US" sz="1600" dirty="0">
+                <a:solidFill>
+                  <a:srgbClr val="1B2140"/>
+                </a:solidFill>
+                <a:latin typeface="Segoe UI" pitchFamily="34" charset="0"/>
+                <a:ea typeface="Segoe UI" pitchFamily="34" charset="-122"/>
+                <a:cs typeface="Segoe UI" pitchFamily="34" charset="-120"/>
+              </a:rPr>
+              <a:t> </a:t>
+            </a:r>
+            <a:r>
+              <a:rPr lang="ru-RU" sz="1600" dirty="0">
+                <a:solidFill>
+                  <a:srgbClr val="1B2140"/>
+                </a:solidFill>
+                <a:latin typeface="Segoe UI" pitchFamily="34" charset="0"/>
+                <a:ea typeface="Segoe UI" pitchFamily="34" charset="-122"/>
+                <a:cs typeface="Segoe UI" pitchFamily="34" charset="-120"/>
+              </a:rPr>
+              <a:t>платящих </a:t>
+            </a:r>
+            <a:r>
+              <a:rPr lang="en-US" sz="1600" dirty="0" err="1">
+                <a:solidFill>
+                  <a:srgbClr val="1B2140"/>
+                </a:solidFill>
+                <a:latin typeface="Segoe UI" pitchFamily="34" charset="0"/>
+                <a:ea typeface="Segoe UI" pitchFamily="34" charset="-122"/>
+                <a:cs typeface="Segoe UI" pitchFamily="34" charset="-120"/>
+              </a:rPr>
+              <a:t>клиентов</a:t>
+            </a:r>
+            <a:r>
+              <a:rPr lang="en-US" sz="1600" dirty="0">
+                <a:solidFill>
+                  <a:srgbClr val="1B2140"/>
+                </a:solidFill>
+                <a:latin typeface="Segoe UI" pitchFamily="34" charset="0"/>
+                <a:ea typeface="Segoe UI" pitchFamily="34" charset="-122"/>
+                <a:cs typeface="Segoe UI" pitchFamily="34" charset="-120"/>
+              </a:rPr>
+              <a:t> ещё нет</a:t>
             </a:r>
             <a:endParaRPr lang="en-US" sz="1600" dirty="0"/>
           </a:p>
@@ -10145,7 +8974,7 @@
             <a:prstDash val="solid"/>
           </a:ln>
           <a:effectLst>
-            <a:outerShdw sx="100000" sy="100000" kx="0" ky="0" algn="bl" rotWithShape="0" blurRad="177800" dist="50800" dir="5400000">
+            <a:outerShdw blurRad="177800" dist="50800" dir="5400000" algn="bl" rotWithShape="0">
               <a:srgbClr val="7E88A8">
                 <a:alpha val="30000"/>
               </a:srgbClr>
@@ -10194,19 +9023,18 @@
           <a:bodyPr wrap="square" lIns="0" tIns="0" rIns="0" bIns="0" rtlCol="0" anchor="ctr"/>
           <a:lstStyle/>
           <a:p>
-            <a:pPr indent="0" marL="0">
-              <a:buNone/>
-            </a:pPr>
-            <a:r>
-              <a:rPr lang="en-US" sz="4400" dirty="0">
+            <a:pPr marL="0" indent="0">
+              <a:buNone/>
+            </a:pPr>
+            <a:r>
+              <a:rPr lang="ru-RU" sz="4400" dirty="0">
                 <a:solidFill>
                   <a:srgbClr val="1E2761"/>
                 </a:solidFill>
                 <a:latin typeface="Segoe UI Semibold" pitchFamily="34" charset="0"/>
-                <a:ea typeface="Segoe UI Semibold" pitchFamily="34" charset="-122"/>
                 <a:cs typeface="Segoe UI Semibold" pitchFamily="34" charset="-120"/>
               </a:rPr>
-              <a:t>Два</a:t>
+              <a:t>Три</a:t>
             </a:r>
             <a:endParaRPr lang="en-US" sz="4400" dirty="0"/>
           </a:p>
@@ -10233,7 +9061,7 @@
           <a:bodyPr wrap="square" lIns="0" tIns="0" rIns="0" bIns="0" rtlCol="0" anchor="t"/>
           <a:lstStyle/>
           <a:p>
-            <a:pPr indent="0" marL="0">
+            <a:pPr marL="0" indent="0">
               <a:lnSpc>
                 <a:spcPct val="108000"/>
               </a:lnSpc>
@@ -10248,7 +9076,73 @@
                 <a:ea typeface="Segoe UI" pitchFamily="34" charset="-122"/>
                 <a:cs typeface="Segoe UI" pitchFamily="34" charset="-120"/>
               </a:rPr>
-              <a:t>региона в работе: Свердловская область и Югра</a:t>
+              <a:t>региона в работе: </a:t>
+            </a:r>
+            <a:r>
+              <a:rPr lang="ru-RU" sz="1600" dirty="0">
+                <a:solidFill>
+                  <a:srgbClr val="1B2140"/>
+                </a:solidFill>
+                <a:latin typeface="Segoe UI" pitchFamily="34" charset="0"/>
+                <a:ea typeface="Segoe UI" pitchFamily="34" charset="-122"/>
+                <a:cs typeface="Segoe UI" pitchFamily="34" charset="-120"/>
+              </a:rPr>
+              <a:t>Москва, </a:t>
+            </a:r>
+            <a:r>
+              <a:rPr lang="en-US" sz="1600" dirty="0" err="1">
+                <a:solidFill>
+                  <a:srgbClr val="1B2140"/>
+                </a:solidFill>
+                <a:latin typeface="Segoe UI" pitchFamily="34" charset="0"/>
+                <a:ea typeface="Segoe UI" pitchFamily="34" charset="-122"/>
+                <a:cs typeface="Segoe UI" pitchFamily="34" charset="-120"/>
+              </a:rPr>
+              <a:t>Свердловская</a:t>
+            </a:r>
+            <a:r>
+              <a:rPr lang="en-US" sz="1600" dirty="0">
+                <a:solidFill>
+                  <a:srgbClr val="1B2140"/>
+                </a:solidFill>
+                <a:latin typeface="Segoe UI" pitchFamily="34" charset="0"/>
+                <a:ea typeface="Segoe UI" pitchFamily="34" charset="-122"/>
+                <a:cs typeface="Segoe UI" pitchFamily="34" charset="-120"/>
+              </a:rPr>
+              <a:t> </a:t>
+            </a:r>
+            <a:r>
+              <a:rPr lang="en-US" sz="1600" dirty="0" err="1">
+                <a:solidFill>
+                  <a:srgbClr val="1B2140"/>
+                </a:solidFill>
+                <a:latin typeface="Segoe UI" pitchFamily="34" charset="0"/>
+                <a:ea typeface="Segoe UI" pitchFamily="34" charset="-122"/>
+                <a:cs typeface="Segoe UI" pitchFamily="34" charset="-120"/>
+              </a:rPr>
+              <a:t>область</a:t>
+            </a:r>
+            <a:r>
+              <a:rPr lang="ru-RU" sz="1600" dirty="0">
+                <a:solidFill>
+                  <a:srgbClr val="1B2140"/>
+                </a:solidFill>
+                <a:latin typeface="Segoe UI" pitchFamily="34" charset="0"/>
+                <a:ea typeface="Segoe UI" pitchFamily="34" charset="-122"/>
+                <a:cs typeface="Segoe UI" pitchFamily="34" charset="-120"/>
+              </a:rPr>
+              <a:t>, </a:t>
+            </a:r>
+            <a:r>
+              <a:rPr lang="en-US" sz="1600" dirty="0" err="1">
+                <a:solidFill>
+                  <a:srgbClr val="1B2140"/>
+                </a:solidFill>
+                <a:latin typeface="Segoe UI" pitchFamily="34" charset="0"/>
+                <a:ea typeface="Segoe UI" pitchFamily="34" charset="-122"/>
+                <a:cs typeface="Segoe UI" pitchFamily="34" charset="-120"/>
+              </a:rPr>
+              <a:t>Югра</a:t>
             </a:r>
             <a:endParaRPr lang="en-US" sz="1600" dirty="0"/>
           </a:p>
@@ -10280,7 +9174,7 @@
             <a:prstDash val="solid"/>
           </a:ln>
           <a:effectLst>
-            <a:outerShdw sx="100000" sy="100000" kx="0" ky="0" algn="bl" rotWithShape="0" blurRad="177800" dist="50800" dir="5400000">
+            <a:outerShdw blurRad="177800" dist="50800" dir="5400000" algn="bl" rotWithShape="0">
               <a:srgbClr val="7E88A8">
                 <a:alpha val="30000"/>
               </a:srgbClr>
@@ -10329,7 +9223,7 @@
           <a:bodyPr wrap="square" lIns="0" tIns="0" rIns="0" bIns="0" rtlCol="0" anchor="ctr"/>
           <a:lstStyle/>
           <a:p>
-            <a:pPr indent="0" marL="0">
+            <a:pPr marL="0" indent="0">
               <a:buNone/>
             </a:pPr>
             <a:r>
@@ -10355,8 +9249,8 @@
         </p:nvSpPr>
         <p:spPr>
           <a:xfrm>
-            <a:off x="795528" y="4828032"/>
-            <a:ext cx="4852264" cy="512064"/>
+            <a:off x="795527" y="4828032"/>
+            <a:ext cx="4852265" cy="512064"/>
           </a:xfrm>
           <a:prstGeom prst="rect">
             <a:avLst/>
@@ -10368,14 +9262,14 @@
           <a:bodyPr wrap="square" lIns="0" tIns="0" rIns="0" bIns="0" rtlCol="0" anchor="t"/>
           <a:lstStyle/>
           <a:p>
-            <a:pPr indent="0" marL="0">
+            <a:pPr marL="0" indent="0">
               <a:lnSpc>
                 <a:spcPct val="108000"/>
               </a:lnSpc>
               <a:buNone/>
             </a:pPr>
             <a:r>
-              <a:rPr lang="en-US" sz="1600" dirty="0">
+              <a:rPr lang="ru-RU" sz="1600" dirty="0">
                 <a:solidFill>
                   <a:srgbClr val="1B2140"/>
                 </a:solidFill>
@@ -10383,7 +9277,28 @@
                 <a:ea typeface="Segoe UI" pitchFamily="34" charset="-122"/>
                 <a:cs typeface="Segoe UI" pitchFamily="34" charset="-120"/>
               </a:rPr>
-              <a:t>инструмент подбора. Это действующая система, а не слайд о планах</a:t>
+              <a:t>собственная поисковая система решений </a:t>
+            </a:r>
+            <a:br>
+              <a:rPr lang="ru-RU" sz="1600" dirty="0">
+                <a:solidFill>
+                  <a:srgbClr val="1B2140"/>
+                </a:solidFill>
+                <a:latin typeface="Segoe UI" pitchFamily="34" charset="0"/>
+                <a:ea typeface="Segoe UI" pitchFamily="34" charset="-122"/>
+                <a:cs typeface="Segoe UI" pitchFamily="34" charset="-120"/>
+              </a:rPr>
+            </a:br>
+            <a:r>
+              <a:rPr lang="ru-RU" sz="1600" dirty="0">
+                <a:solidFill>
+                  <a:srgbClr val="1B2140"/>
+                </a:solidFill>
+                <a:latin typeface="Segoe UI" pitchFamily="34" charset="0"/>
+                <a:ea typeface="Segoe UI" pitchFamily="34" charset="-122"/>
+                <a:cs typeface="Segoe UI" pitchFamily="34" charset="-120"/>
+              </a:rPr>
+              <a:t>«Ситалл Скаут»</a:t>
             </a:r>
             <a:endParaRPr lang="en-US" sz="1600" dirty="0"/>
           </a:p>
@@ -10391,13 +9306,97 @@
       </p:sp>
       <p:sp>
         <p:nvSpPr>
-          <p:cNvPr id="17" name="Shape 15"/>
+          <p:cNvPr id="23" name="Text 21"/>
+          <p:cNvSpPr txBox="1"/>
+          <p:nvPr/>
+        </p:nvSpPr>
+        <p:spPr>
+          <a:xfrm>
+            <a:off x="502920" y="6473952"/>
+            <a:ext cx="1828800" cy="274320"/>
+          </a:xfrm>
+          <a:prstGeom prst="rect">
+            <a:avLst/>
+          </a:prstGeom>
+          <a:noFill/>
+          <a:ln/>
+        </p:spPr>
+        <p:txBody>
+          <a:bodyPr wrap="square" lIns="0" tIns="0" rIns="0" bIns="0" rtlCol="0" anchor="ctr"/>
+          <a:lstStyle/>
+          <a:p>
+            <a:pPr marL="0" indent="0">
+              <a:buNone/>
+            </a:pPr>
+            <a:r>
+              <a:rPr lang="en-US" sz="1200" dirty="0">
+                <a:solidFill>
+                  <a:srgbClr val="6B7699"/>
+                </a:solidFill>
+                <a:latin typeface="Segoe UI" pitchFamily="34" charset="0"/>
+                <a:ea typeface="Segoe UI" pitchFamily="34" charset="-122"/>
+                <a:cs typeface="Segoe UI" pitchFamily="34" charset="-120"/>
+              </a:rPr>
+              <a:t>Ситалл</a:t>
+            </a:r>
+            <a:endParaRPr lang="en-US" sz="1200" dirty="0"/>
+          </a:p>
+        </p:txBody>
+      </p:sp>
+      <p:sp>
+        <p:nvSpPr>
+          <p:cNvPr id="24" name="Text 22"/>
+          <p:cNvSpPr txBox="1"/>
+          <p:nvPr/>
+        </p:nvSpPr>
+        <p:spPr>
+          <a:xfrm>
+            <a:off x="10774375" y="6473952"/>
+            <a:ext cx="914400" cy="274320"/>
+          </a:xfrm>
+          <a:prstGeom prst="rect">
+            <a:avLst/>
+          </a:prstGeom>
+          <a:noFill/>
+          <a:ln/>
+        </p:spPr>
+        <p:txBody>
+          <a:bodyPr wrap="square" lIns="0" tIns="0" rIns="0" bIns="0" rtlCol="0" anchor="ctr"/>
+          <a:lstStyle/>
+          <a:p>
+            <a:pPr marL="0" indent="0" algn="r">
+              <a:buNone/>
+            </a:pPr>
+            <a:r>
+              <a:rPr lang="en-US" sz="1200" dirty="0">
+                <a:solidFill>
+                  <a:srgbClr val="6B7699"/>
+                </a:solidFill>
+                <a:latin typeface="Segoe UI" pitchFamily="34" charset="0"/>
+                <a:ea typeface="Segoe UI" pitchFamily="34" charset="-122"/>
+                <a:cs typeface="Segoe UI" pitchFamily="34" charset="-120"/>
+              </a:rPr>
+              <a:t>07 / 12</a:t>
+            </a:r>
+            <a:endParaRPr lang="en-US" sz="1200" dirty="0"/>
+          </a:p>
+        </p:txBody>
+      </p:sp>
+      <p:sp>
+        <p:nvSpPr>
+          <p:cNvPr id="37" name="Shape 3">
+            <a:extLst>
+              <a:ext uri="{FF2B5EF4-FFF2-40B4-BE49-F238E27FC236}">
+                <a16:creationId xmlns:a16="http://schemas.microsoft.com/office/drawing/2014/main" id="{E23AF286-789D-13F6-C18E-FEFF86E1ED5F}"/>
+              </a:ext>
+            </a:extLst>
+          </p:cNvPr>
           <p:cNvSpPr/>
           <p:nvPr/>
         </p:nvSpPr>
         <p:spPr>
           <a:xfrm>
-            <a:off x="6251296" y="3767328"/>
+            <a:off x="6251295" y="3767328"/>
             <a:ext cx="5437480" cy="1975104"/>
           </a:xfrm>
           <a:prstGeom prst="roundRect">
@@ -10415,7 +9414,7 @@
             <a:prstDash val="solid"/>
           </a:ln>
           <a:effectLst>
-            <a:outerShdw sx="100000" sy="100000" kx="0" ky="0" algn="bl" rotWithShape="0" blurRad="177800" dist="50800" dir="5400000">
+            <a:outerShdw blurRad="177800" dist="50800" dir="5400000" algn="bl" rotWithShape="0">
               <a:srgbClr val="7E88A8">
                 <a:alpha val="30000"/>
               </a:srgbClr>
@@ -10425,13 +9424,19 @@
       </p:sp>
       <p:sp>
         <p:nvSpPr>
-          <p:cNvPr id="18" name="Shape 16"/>
+          <p:cNvPr id="39" name="Shape 4">
+            <a:extLst>
+              <a:ext uri="{FF2B5EF4-FFF2-40B4-BE49-F238E27FC236}">
+                <a16:creationId xmlns:a16="http://schemas.microsoft.com/office/drawing/2014/main" id="{130D81FD-367A-42B9-9961-8F449F64FD29}"/>
+              </a:ext>
+            </a:extLst>
+          </p:cNvPr>
           <p:cNvSpPr/>
           <p:nvPr/>
         </p:nvSpPr>
         <p:spPr>
           <a:xfrm>
-            <a:off x="6543904" y="4023360"/>
+            <a:off x="6543903" y="4023360"/>
             <a:ext cx="384048" cy="45720"/>
           </a:xfrm>
           <a:prstGeom prst="rect">
@@ -10445,13 +9450,19 @@
       </p:sp>
       <p:sp>
         <p:nvSpPr>
-          <p:cNvPr id="19" name="Text 17"/>
-          <p:cNvSpPr txBox="1"/>
-          <p:nvPr/>
-        </p:nvSpPr>
-        <p:spPr>
-          <a:xfrm>
-            <a:off x="6543904" y="4096512"/>
+          <p:cNvPr id="41" name="Text 5">
+            <a:extLst>
+              <a:ext uri="{FF2B5EF4-FFF2-40B4-BE49-F238E27FC236}">
+                <a16:creationId xmlns:a16="http://schemas.microsoft.com/office/drawing/2014/main" id="{B3EF0234-1D07-4AA9-B4DE-3955535D21BD}"/>
+              </a:ext>
+            </a:extLst>
+          </p:cNvPr>
+          <p:cNvSpPr txBox="1"/>
+          <p:nvPr/>
+        </p:nvSpPr>
+        <p:spPr>
+          <a:xfrm>
+            <a:off x="6543903" y="4096512"/>
             <a:ext cx="4852264" cy="713232"/>
           </a:xfrm>
           <a:prstGeom prst="rect">
@@ -10464,11 +9475,11 @@
           <a:bodyPr wrap="square" lIns="0" tIns="0" rIns="0" bIns="0" rtlCol="0" anchor="ctr"/>
           <a:lstStyle/>
           <a:p>
-            <a:pPr indent="0" marL="0">
-              <a:buNone/>
-            </a:pPr>
-            <a:r>
-              <a:rPr lang="en-US" sz="3400" dirty="0">
+            <a:pPr marL="0" indent="0">
+              <a:buNone/>
+            </a:pPr>
+            <a:r>
+              <a:rPr lang="ru-RU" sz="4400" dirty="0">
                 <a:solidFill>
                   <a:srgbClr val="B4552D"/>
                 </a:solidFill>
@@ -10476,21 +9487,27 @@
                 <a:ea typeface="Segoe UI Semibold" pitchFamily="34" charset="-122"/>
                 <a:cs typeface="Segoe UI Semibold" pitchFamily="34" charset="-120"/>
               </a:rPr>
-              <a:t>Проверьте</a:t>
-            </a:r>
-            <a:endParaRPr lang="en-US" sz="3400" dirty="0"/>
-          </a:p>
-        </p:txBody>
-      </p:sp>
-      <p:sp>
-        <p:nvSpPr>
-          <p:cNvPr id="20" name="Text 18"/>
-          <p:cNvSpPr txBox="1"/>
-          <p:nvPr/>
-        </p:nvSpPr>
-        <p:spPr>
-          <a:xfrm>
-            <a:off x="6543904" y="4828032"/>
+              <a:t>Понимаем</a:t>
+            </a:r>
+            <a:endParaRPr lang="en-US" sz="4400" dirty="0"/>
+          </a:p>
+        </p:txBody>
+      </p:sp>
+      <p:sp>
+        <p:nvSpPr>
+          <p:cNvPr id="43" name="Text 6">
+            <a:extLst>
+              <a:ext uri="{FF2B5EF4-FFF2-40B4-BE49-F238E27FC236}">
+                <a16:creationId xmlns:a16="http://schemas.microsoft.com/office/drawing/2014/main" id="{C8A4807D-7971-A668-60D0-10B11BC35B11}"/>
+              </a:ext>
+            </a:extLst>
+          </p:cNvPr>
+          <p:cNvSpPr txBox="1"/>
+          <p:nvPr/>
+        </p:nvSpPr>
+        <p:spPr>
+          <a:xfrm>
+            <a:off x="6543903" y="4828032"/>
             <a:ext cx="4852264" cy="512064"/>
           </a:xfrm>
           <a:prstGeom prst="rect">
@@ -10503,164 +9520,23 @@
           <a:bodyPr wrap="square" lIns="0" tIns="0" rIns="0" bIns="0" rtlCol="0" anchor="t"/>
           <a:lstStyle/>
           <a:p>
-            <a:pPr indent="0" marL="0">
+            <a:pPr marL="0" indent="0">
               <a:lnSpc>
                 <a:spcPct val="108000"/>
               </a:lnSpc>
               <a:buNone/>
             </a:pPr>
             <a:r>
-              <a:rPr lang="en-US" sz="1600" dirty="0">
+              <a:rPr lang="ru-RU" sz="1600" dirty="0">
                 <a:solidFill>
                   <a:srgbClr val="1B2140"/>
                 </a:solidFill>
                 <a:latin typeface="Segoe UI" pitchFamily="34" charset="0"/>
-                <a:ea typeface="Segoe UI" pitchFamily="34" charset="-122"/>
                 <a:cs typeface="Segoe UI" pitchFamily="34" charset="-120"/>
               </a:rPr>
-              <a:t>назовите задачу знакомого предприятия — сделаем подбор за свой счёт</a:t>
+              <a:t>делали и умеем руками все этапы производственного цикла внедрения</a:t>
             </a:r>
             <a:endParaRPr lang="en-US" sz="1600" dirty="0"/>
-          </a:p>
-        </p:txBody>
-      </p:sp>
-      <p:sp>
-        <p:nvSpPr>
-          <p:cNvPr id="21" name="Shape 19"/>
-          <p:cNvSpPr/>
-          <p:nvPr/>
-        </p:nvSpPr>
-        <p:spPr>
-          <a:xfrm>
-            <a:off x="502920" y="5925312"/>
-            <a:ext cx="64008" cy="548640"/>
-          </a:xfrm>
-          <a:prstGeom prst="rect">
-            <a:avLst/>
-          </a:prstGeom>
-          <a:solidFill>
-            <a:srgbClr val="1E2761"/>
-          </a:solidFill>
-          <a:ln/>
-        </p:spPr>
-      </p:sp>
-      <p:sp>
-        <p:nvSpPr>
-          <p:cNvPr id="22" name="Text 20"/>
-          <p:cNvSpPr txBox="1"/>
-          <p:nvPr/>
-        </p:nvSpPr>
-        <p:spPr>
-          <a:xfrm>
-            <a:off x="758952" y="5897880"/>
-            <a:ext cx="10820095" cy="603504"/>
-          </a:xfrm>
-          <a:prstGeom prst="rect">
-            <a:avLst/>
-          </a:prstGeom>
-          <a:noFill/>
-          <a:ln/>
-        </p:spPr>
-        <p:txBody>
-          <a:bodyPr wrap="square" lIns="0" tIns="0" rIns="0" bIns="0" rtlCol="0" anchor="ctr"/>
-          <a:lstStyle/>
-          <a:p>
-            <a:pPr indent="0" marL="0">
-              <a:lnSpc>
-                <a:spcPct val="105000"/>
-              </a:lnSpc>
-              <a:buNone/>
-            </a:pPr>
-            <a:r>
-              <a:rPr lang="en-US" sz="2000" dirty="0">
-                <a:solidFill>
-                  <a:srgbClr val="1E2761"/>
-                </a:solidFill>
-                <a:latin typeface="Segoe UI Semibold" pitchFamily="34" charset="0"/>
-                <a:ea typeface="Segoe UI Semibold" pitchFamily="34" charset="-122"/>
-                <a:cs typeface="Segoe UI Semibold" pitchFamily="34" charset="-120"/>
-              </a:rPr>
-              <a:t>Лучше проверить нас на живой задаче, чем поверить на слово</a:t>
-            </a:r>
-            <a:endParaRPr lang="en-US" sz="2000" dirty="0"/>
-          </a:p>
-        </p:txBody>
-      </p:sp>
-      <p:sp>
-        <p:nvSpPr>
-          <p:cNvPr id="23" name="Text 21"/>
-          <p:cNvSpPr txBox="1"/>
-          <p:nvPr/>
-        </p:nvSpPr>
-        <p:spPr>
-          <a:xfrm>
-            <a:off x="502920" y="6473952"/>
-            <a:ext cx="1828800" cy="274320"/>
-          </a:xfrm>
-          <a:prstGeom prst="rect">
-            <a:avLst/>
-          </a:prstGeom>
-          <a:noFill/>
-          <a:ln/>
-        </p:spPr>
-        <p:txBody>
-          <a:bodyPr wrap="square" lIns="0" tIns="0" rIns="0" bIns="0" rtlCol="0" anchor="ctr"/>
-          <a:lstStyle/>
-          <a:p>
-            <a:pPr indent="0" marL="0">
-              <a:buNone/>
-            </a:pPr>
-            <a:r>
-              <a:rPr lang="en-US" sz="1200" dirty="0">
-                <a:solidFill>
-                  <a:srgbClr val="6B7699"/>
-                </a:solidFill>
-                <a:latin typeface="Segoe UI" pitchFamily="34" charset="0"/>
-                <a:ea typeface="Segoe UI" pitchFamily="34" charset="-122"/>
-                <a:cs typeface="Segoe UI" pitchFamily="34" charset="-120"/>
-              </a:rPr>
-              <a:t>Ситалл</a:t>
-            </a:r>
-            <a:endParaRPr lang="en-US" sz="1200" dirty="0"/>
-          </a:p>
-        </p:txBody>
-      </p:sp>
-      <p:sp>
-        <p:nvSpPr>
-          <p:cNvPr id="24" name="Text 22"/>
-          <p:cNvSpPr txBox="1"/>
-          <p:nvPr/>
-        </p:nvSpPr>
-        <p:spPr>
-          <a:xfrm>
-            <a:off x="10774375" y="6473952"/>
-            <a:ext cx="914400" cy="274320"/>
-          </a:xfrm>
-          <a:prstGeom prst="rect">
-            <a:avLst/>
-          </a:prstGeom>
-          <a:noFill/>
-          <a:ln/>
-        </p:spPr>
-        <p:txBody>
-          <a:bodyPr wrap="square" lIns="0" tIns="0" rIns="0" bIns="0" rtlCol="0" anchor="ctr"/>
-          <a:lstStyle/>
-          <a:p>
-            <a:pPr algn="r" indent="0" marL="0">
-              <a:buNone/>
-            </a:pPr>
-            <a:r>
-              <a:rPr lang="en-US" sz="1200" dirty="0">
-                <a:solidFill>
-                  <a:srgbClr val="6B7699"/>
-                </a:solidFill>
-                <a:latin typeface="Segoe UI" pitchFamily="34" charset="0"/>
-                <a:ea typeface="Segoe UI" pitchFamily="34" charset="-122"/>
-                <a:cs typeface="Segoe UI" pitchFamily="34" charset="-120"/>
-              </a:rPr>
-              <a:t>07 / 12</a:t>
-            </a:r>
-            <a:endParaRPr lang="en-US" sz="1200" dirty="0"/>
           </a:p>
         </p:txBody>
       </p:sp>
@@ -10710,11 +9586,11 @@
           <a:bodyPr wrap="square" lIns="0" tIns="0" rIns="0" bIns="0" rtlCol="0" anchor="ctr"/>
           <a:lstStyle/>
           <a:p>
-            <a:pPr indent="0" marL="0">
-              <a:buNone/>
-            </a:pPr>
-            <a:r>
-              <a:rPr lang="en-US" sz="1300" spc="300" kern="0" dirty="0">
+            <a:pPr marL="0" indent="0">
+              <a:buNone/>
+            </a:pPr>
+            <a:r>
+              <a:rPr lang="en-US" sz="1300" kern="0" spc="300" dirty="0">
                 <a:solidFill>
                   <a:srgbClr val="B4552D"/>
                 </a:solidFill>
@@ -10749,7 +9625,7 @@
           <a:bodyPr wrap="square" lIns="0" tIns="0" rIns="0" bIns="0" rtlCol="0" anchor="ctr"/>
           <a:lstStyle/>
           <a:p>
-            <a:pPr indent="0" marL="0">
+            <a:pPr marL="0" indent="0">
               <a:buNone/>
             </a:pPr>
             <a:r>
@@ -10813,7 +9689,7 @@
             <a:prstDash val="solid"/>
           </a:ln>
           <a:effectLst>
-            <a:outerShdw sx="100000" sy="100000" kx="0" ky="0" algn="bl" rotWithShape="0" blurRad="177800" dist="50800" dir="5400000">
+            <a:outerShdw blurRad="177800" dist="50800" dir="5400000" algn="bl" rotWithShape="0">
               <a:srgbClr val="7E88A8">
                 <a:alpha val="30000"/>
               </a:srgbClr>
@@ -10862,7 +9738,7 @@
           <a:bodyPr wrap="square" lIns="0" tIns="0" rIns="0" bIns="0" rtlCol="0" anchor="t"/>
           <a:lstStyle/>
           <a:p>
-            <a:pPr indent="0" marL="0">
+            <a:pPr marL="0" indent="0">
               <a:lnSpc>
                 <a:spcPct val="100000"/>
               </a:lnSpc>
@@ -10882,7 +9758,7 @@
             <a:endParaRPr lang="en-US" sz="2200" dirty="0"/>
           </a:p>
           <a:p>
-            <a:pPr indent="0" marL="0">
+            <a:pPr marL="0" indent="0">
               <a:lnSpc>
                 <a:spcPct val="100000"/>
               </a:lnSpc>
@@ -10924,11 +9800,11 @@
           <a:bodyPr wrap="square" lIns="0" tIns="0" rIns="0" bIns="0" rtlCol="0" anchor="ctr"/>
           <a:lstStyle/>
           <a:p>
-            <a:pPr indent="0" marL="0">
-              <a:buNone/>
-            </a:pPr>
-            <a:r>
-              <a:rPr lang="en-US" sz="1300" spc="200" kern="0" dirty="0">
+            <a:pPr marL="0" indent="0">
+              <a:buNone/>
+            </a:pPr>
+            <a:r>
+              <a:rPr lang="en-US" sz="1300" kern="0" spc="200" dirty="0">
                 <a:solidFill>
                   <a:srgbClr val="B4552D"/>
                 </a:solidFill>
@@ -11062,7 +9938,7 @@
             <a:prstDash val="solid"/>
           </a:ln>
           <a:effectLst>
-            <a:outerShdw sx="100000" sy="100000" kx="0" ky="0" algn="bl" rotWithShape="0" blurRad="177800" dist="50800" dir="5400000">
+            <a:outerShdw blurRad="177800" dist="50800" dir="5400000" algn="bl" rotWithShape="0">
               <a:srgbClr val="7E88A8">
                 <a:alpha val="30000"/>
               </a:srgbClr>
@@ -11111,7 +9987,7 @@
           <a:bodyPr wrap="square" lIns="0" tIns="0" rIns="0" bIns="0" rtlCol="0" anchor="t"/>
           <a:lstStyle/>
           <a:p>
-            <a:pPr indent="0" marL="0">
+            <a:pPr marL="0" indent="0">
               <a:lnSpc>
                 <a:spcPct val="100000"/>
               </a:lnSpc>
@@ -11131,7 +10007,7 @@
             <a:endParaRPr lang="en-US" sz="2200" dirty="0"/>
           </a:p>
           <a:p>
-            <a:pPr indent="0" marL="0">
+            <a:pPr marL="0" indent="0">
               <a:lnSpc>
                 <a:spcPct val="100000"/>
               </a:lnSpc>
@@ -11173,11 +10049,11 @@
           <a:bodyPr wrap="square" lIns="0" tIns="0" rIns="0" bIns="0" rtlCol="0" anchor="ctr"/>
           <a:lstStyle/>
           <a:p>
-            <a:pPr indent="0" marL="0">
-              <a:buNone/>
-            </a:pPr>
-            <a:r>
-              <a:rPr lang="en-US" sz="1300" spc="200" kern="0" dirty="0">
+            <a:pPr marL="0" indent="0">
+              <a:buNone/>
+            </a:pPr>
+            <a:r>
+              <a:rPr lang="en-US" sz="1300" kern="0" spc="200" dirty="0">
                 <a:solidFill>
                   <a:srgbClr val="B4552D"/>
                 </a:solidFill>
@@ -11311,7 +10187,7 @@
             <a:prstDash val="solid"/>
           </a:ln>
           <a:effectLst>
-            <a:outerShdw sx="100000" sy="100000" kx="0" ky="0" algn="bl" rotWithShape="0" blurRad="177800" dist="50800" dir="5400000">
+            <a:outerShdw blurRad="177800" dist="50800" dir="5400000" algn="bl" rotWithShape="0">
               <a:srgbClr val="7E88A8">
                 <a:alpha val="30000"/>
               </a:srgbClr>
@@ -11360,81 +10236,71 @@
           <a:bodyPr wrap="square" lIns="0" tIns="0" rIns="0" bIns="0" rtlCol="0" anchor="t"/>
           <a:lstStyle/>
           <a:p>
-            <a:pPr indent="0" marL="0">
+            <a:pPr marL="0" indent="0">
               <a:lnSpc>
                 <a:spcPct val="100000"/>
               </a:lnSpc>
               <a:buNone/>
             </a:pPr>
             <a:r>
-              <a:rPr lang="en-US" sz="2200" dirty="0">
+              <a:rPr lang="ru-RU" sz="2200" dirty="0">
                 <a:solidFill>
                   <a:srgbClr val="1E2761"/>
+                </a:solidFill>
+                <a:latin typeface="Segoe UI Semibold" pitchFamily="34" charset="0"/>
+                <a:cs typeface="Segoe UI Semibold" pitchFamily="34" charset="-120"/>
+              </a:rPr>
+              <a:t>ФИО</a:t>
+            </a:r>
+            <a:endParaRPr lang="en-US" sz="2200" dirty="0"/>
+          </a:p>
+        </p:txBody>
+      </p:sp>
+      <p:sp>
+        <p:nvSpPr>
+          <p:cNvPr id="18" name="Text 16"/>
+          <p:cNvSpPr txBox="1"/>
+          <p:nvPr/>
+        </p:nvSpPr>
+        <p:spPr>
+          <a:xfrm>
+            <a:off x="8460029" y="2651760"/>
+            <a:ext cx="2936138" cy="274320"/>
+          </a:xfrm>
+          <a:prstGeom prst="rect">
+            <a:avLst/>
+          </a:prstGeom>
+          <a:noFill/>
+          <a:ln/>
+        </p:spPr>
+        <p:txBody>
+          <a:bodyPr wrap="square" lIns="0" tIns="0" rIns="0" bIns="0" rtlCol="0" anchor="ctr"/>
+          <a:lstStyle/>
+          <a:p>
+            <a:pPr marL="0" indent="0">
+              <a:buNone/>
+            </a:pPr>
+            <a:r>
+              <a:rPr lang="en-US" sz="1300" kern="0" spc="200" dirty="0">
+                <a:solidFill>
+                  <a:srgbClr val="B4552D"/>
                 </a:solidFill>
                 <a:latin typeface="Segoe UI Semibold" pitchFamily="34" charset="0"/>
                 <a:ea typeface="Segoe UI Semibold" pitchFamily="34" charset="-122"/>
                 <a:cs typeface="Segoe UI Semibold" pitchFamily="34" charset="-120"/>
               </a:rPr>
-              <a:t>Дмитрий</a:t>
-            </a:r>
-            <a:endParaRPr lang="en-US" sz="2200" dirty="0"/>
-          </a:p>
-          <a:p>
-            <a:pPr indent="0" marL="0">
-              <a:lnSpc>
-                <a:spcPct val="100000"/>
-              </a:lnSpc>
-              <a:buNone/>
-            </a:pPr>
-            <a:r>
-              <a:rPr lang="en-US" sz="2200" dirty="0">
-                <a:solidFill>
-                  <a:srgbClr val="1E2761"/>
+              <a:t>РЕГИОНАЛЬНЫЙ ПАРТНЁР, </a:t>
+            </a:r>
+            <a:r>
+              <a:rPr lang="ru-RU" sz="1300" kern="0" spc="200" dirty="0">
+                <a:solidFill>
+                  <a:srgbClr val="B4552D"/>
                 </a:solidFill>
                 <a:latin typeface="Segoe UI Semibold" pitchFamily="34" charset="0"/>
                 <a:ea typeface="Segoe UI Semibold" pitchFamily="34" charset="-122"/>
                 <a:cs typeface="Segoe UI Semibold" pitchFamily="34" charset="-120"/>
               </a:rPr>
-              <a:t>Пересторонин</a:t>
-            </a:r>
-            <a:endParaRPr lang="en-US" sz="2200" dirty="0"/>
-          </a:p>
-        </p:txBody>
-      </p:sp>
-      <p:sp>
-        <p:nvSpPr>
-          <p:cNvPr id="18" name="Text 16"/>
-          <p:cNvSpPr txBox="1"/>
-          <p:nvPr/>
-        </p:nvSpPr>
-        <p:spPr>
-          <a:xfrm>
-            <a:off x="8460029" y="2651760"/>
-            <a:ext cx="2936138" cy="274320"/>
-          </a:xfrm>
-          <a:prstGeom prst="rect">
-            <a:avLst/>
-          </a:prstGeom>
-          <a:noFill/>
-          <a:ln/>
-        </p:spPr>
-        <p:txBody>
-          <a:bodyPr wrap="square" lIns="0" tIns="0" rIns="0" bIns="0" rtlCol="0" anchor="ctr"/>
-          <a:lstStyle/>
-          <a:p>
-            <a:pPr indent="0" marL="0">
-              <a:buNone/>
-            </a:pPr>
-            <a:r>
-              <a:rPr lang="en-US" sz="1300" spc="200" kern="0" dirty="0">
-                <a:solidFill>
-                  <a:srgbClr val="B4552D"/>
-                </a:solidFill>
-                <a:latin typeface="Segoe UI Semibold" pitchFamily="34" charset="0"/>
-                <a:ea typeface="Segoe UI Semibold" pitchFamily="34" charset="-122"/>
-                <a:cs typeface="Segoe UI Semibold" pitchFamily="34" charset="-120"/>
-              </a:rPr>
-              <a:t>РЕГИОНАЛЬНЫЙ ПАРТНЁР, СВЕРДЛОВСКАЯ ОБЛАСТЬ</a:t>
+              <a:t>СОЧИ</a:t>
             </a:r>
             <a:endParaRPr lang="en-US" sz="1300" dirty="0"/>
           </a:p>
@@ -11472,17 +10338,9 @@
               <a:buChar char="•"/>
             </a:pPr>
             <a:r>
-              <a:rPr lang="en-US" sz="1600" dirty="0">
-                <a:solidFill>
-                  <a:srgbClr val="1B2140"/>
-                </a:solidFill>
-                <a:latin typeface="Segoe UI" pitchFamily="34" charset="0"/>
-                <a:ea typeface="Segoe UI" pitchFamily="34" charset="-122"/>
-                <a:cs typeface="Segoe UI" pitchFamily="34" charset="-120"/>
-              </a:rPr>
-              <a:t>Привлечение спонсирования для спортивных мероприятий федерального и международного уровня</a:t>
-            </a:r>
-            <a:endParaRPr lang="en-US" sz="1600" dirty="0"/>
+              <a:rPr lang="ru-RU" sz="1600" dirty="0"/>
+              <a:t>Место для вашей рекламы</a:t>
+            </a:r>
           </a:p>
           <a:p>
             <a:pPr marL="152400" indent="-152400">
@@ -11495,54 +10353,43 @@
               <a:buSzPct val="100000"/>
               <a:buChar char="•"/>
             </a:pPr>
-            <a:r>
-              <a:rPr lang="en-US" sz="1600" dirty="0">
-                <a:solidFill>
-                  <a:srgbClr val="1B2140"/>
+            <a:endParaRPr lang="ru-RU" sz="1600" dirty="0"/>
+          </a:p>
+        </p:txBody>
+      </p:sp>
+      <p:sp>
+        <p:nvSpPr>
+          <p:cNvPr id="20" name="Text 18"/>
+          <p:cNvSpPr txBox="1"/>
+          <p:nvPr/>
+        </p:nvSpPr>
+        <p:spPr>
+          <a:xfrm>
+            <a:off x="502920" y="6473952"/>
+            <a:ext cx="1828800" cy="274320"/>
+          </a:xfrm>
+          <a:prstGeom prst="rect">
+            <a:avLst/>
+          </a:prstGeom>
+          <a:noFill/>
+          <a:ln/>
+        </p:spPr>
+        <p:txBody>
+          <a:bodyPr wrap="square" lIns="0" tIns="0" rIns="0" bIns="0" rtlCol="0" anchor="ctr"/>
+          <a:lstStyle/>
+          <a:p>
+            <a:pPr marL="0" indent="0">
+              <a:buNone/>
+            </a:pPr>
+            <a:r>
+              <a:rPr lang="en-US" sz="1200" dirty="0">
+                <a:solidFill>
+                  <a:srgbClr val="6B7699"/>
                 </a:solidFill>
                 <a:latin typeface="Segoe UI" pitchFamily="34" charset="0"/>
                 <a:ea typeface="Segoe UI" pitchFamily="34" charset="-122"/>
                 <a:cs typeface="Segoe UI" pitchFamily="34" charset="-120"/>
               </a:rPr>
-              <a:t>Инициатор проектов по созданию и развитию индустриальных парков в Свердловской области</a:t>
-            </a:r>
-            <a:endParaRPr lang="en-US" sz="1600" dirty="0"/>
-          </a:p>
-        </p:txBody>
-      </p:sp>
-      <p:sp>
-        <p:nvSpPr>
-          <p:cNvPr id="20" name="Text 18"/>
-          <p:cNvSpPr txBox="1"/>
-          <p:nvPr/>
-        </p:nvSpPr>
-        <p:spPr>
-          <a:xfrm>
-            <a:off x="502920" y="6473952"/>
-            <a:ext cx="1828800" cy="274320"/>
-          </a:xfrm>
-          <a:prstGeom prst="rect">
-            <a:avLst/>
-          </a:prstGeom>
-          <a:noFill/>
-          <a:ln/>
-        </p:spPr>
-        <p:txBody>
-          <a:bodyPr wrap="square" lIns="0" tIns="0" rIns="0" bIns="0" rtlCol="0" anchor="ctr"/>
-          <a:lstStyle/>
-          <a:p>
-            <a:pPr indent="0" marL="0">
-              <a:buNone/>
-            </a:pPr>
-            <a:r>
-              <a:rPr lang="en-US" sz="1200" dirty="0">
-                <a:solidFill>
-                  <a:srgbClr val="6B7699"/>
-                </a:solidFill>
-                <a:latin typeface="Segoe UI" pitchFamily="34" charset="0"/>
-                <a:ea typeface="Segoe UI" pitchFamily="34" charset="-122"/>
-                <a:cs typeface="Segoe UI" pitchFamily="34" charset="-120"/>
-              </a:rPr>
               <a:t>Ситалл</a:t>
             </a:r>
             <a:endParaRPr lang="en-US" sz="1200" dirty="0"/>
@@ -11570,7 +10417,7 @@
           <a:bodyPr wrap="square" lIns="0" tIns="0" rIns="0" bIns="0" rtlCol="0" anchor="ctr"/>
           <a:lstStyle/>
           <a:p>
-            <a:pPr algn="r" indent="0" marL="0">
+            <a:pPr marL="0" indent="0" algn="r">
               <a:buNone/>
             </a:pPr>
             <a:r>
@@ -11634,11 +10481,11 @@
           <a:bodyPr wrap="square" lIns="0" tIns="0" rIns="0" bIns="0" rtlCol="0" anchor="ctr"/>
           <a:lstStyle/>
           <a:p>
-            <a:pPr indent="0" marL="0">
-              <a:buNone/>
-            </a:pPr>
-            <a:r>
-              <a:rPr lang="en-US" sz="1300" spc="300" kern="0" dirty="0">
+            <a:pPr marL="0" indent="0">
+              <a:buNone/>
+            </a:pPr>
+            <a:r>
+              <a:rPr lang="en-US" sz="1300" kern="0" spc="300" dirty="0">
                 <a:solidFill>
                   <a:srgbClr val="B4552D"/>
                 </a:solidFill>
@@ -11673,7 +10520,7 @@
           <a:bodyPr wrap="square" lIns="0" tIns="0" rIns="0" bIns="0" rtlCol="0" anchor="ctr"/>
           <a:lstStyle/>
           <a:p>
-            <a:pPr indent="0" marL="0">
+            <a:pPr marL="0" indent="0">
               <a:buNone/>
             </a:pPr>
             <a:r>
@@ -11737,7 +10584,7 @@
             <a:prstDash val="solid"/>
           </a:ln>
           <a:effectLst>
-            <a:outerShdw sx="100000" sy="100000" kx="0" ky="0" algn="bl" rotWithShape="0" blurRad="177800" dist="50800" dir="5400000">
+            <a:outerShdw blurRad="177800" dist="50800" dir="5400000" algn="bl" rotWithShape="0">
               <a:srgbClr val="7E88A8">
                 <a:alpha val="30000"/>
               </a:srgbClr>
@@ -11786,7 +10633,7 @@
           <a:bodyPr wrap="square" lIns="0" tIns="0" rIns="0" bIns="0" rtlCol="0" anchor="ctr"/>
           <a:lstStyle/>
           <a:p>
-            <a:pPr algn="ctr" indent="0" marL="0">
+            <a:pPr marL="0" indent="0" algn="ctr">
               <a:buNone/>
             </a:pPr>
             <a:r>
@@ -11825,7 +10672,7 @@
           <a:bodyPr wrap="square" lIns="0" tIns="0" rIns="0" bIns="0" rtlCol="0" anchor="t"/>
           <a:lstStyle/>
           <a:p>
-            <a:pPr indent="0" marL="0">
+            <a:pPr marL="0" indent="0">
               <a:lnSpc>
                 <a:spcPct val="102000"/>
               </a:lnSpc>
@@ -11867,7 +10714,7 @@
           <a:bodyPr wrap="square" lIns="0" tIns="0" rIns="0" bIns="0" rtlCol="0" anchor="t"/>
           <a:lstStyle/>
           <a:p>
-            <a:pPr indent="0" marL="0">
+            <a:pPr marL="0" indent="0">
               <a:lnSpc>
                 <a:spcPct val="108000"/>
               </a:lnSpc>
@@ -11914,7 +10761,7 @@
             <a:prstDash val="solid"/>
           </a:ln>
           <a:effectLst>
-            <a:outerShdw sx="100000" sy="100000" kx="0" ky="0" algn="bl" rotWithShape="0" blurRad="177800" dist="50800" dir="5400000">
+            <a:outerShdw blurRad="177800" dist="50800" dir="5400000" algn="bl" rotWithShape="0">
               <a:srgbClr val="7E88A8">
                 <a:alpha val="30000"/>
               </a:srgbClr>
@@ -11963,7 +10810,7 @@
           <a:bodyPr wrap="square" lIns="0" tIns="0" rIns="0" bIns="0" rtlCol="0" anchor="ctr"/>
           <a:lstStyle/>
           <a:p>
-            <a:pPr algn="ctr" indent="0" marL="0">
+            <a:pPr marL="0" indent="0" algn="ctr">
               <a:buNone/>
             </a:pPr>
             <a:r>
@@ -12002,7 +10849,7 @@
           <a:bodyPr wrap="square" lIns="0" tIns="0" rIns="0" bIns="0" rtlCol="0" anchor="t"/>
           <a:lstStyle/>
           <a:p>
-            <a:pPr indent="0" marL="0">
+            <a:pPr marL="0" indent="0">
               <a:lnSpc>
                 <a:spcPct val="102000"/>
               </a:lnSpc>
@@ -12044,7 +10891,7 @@
           <a:bodyPr wrap="square" lIns="0" tIns="0" rIns="0" bIns="0" rtlCol="0" anchor="t"/>
           <a:lstStyle/>
           <a:p>
-            <a:pPr indent="0" marL="0">
+            <a:pPr marL="0" indent="0">
               <a:lnSpc>
                 <a:spcPct val="108000"/>
               </a:lnSpc>
@@ -12074,7 +10921,7 @@
         <p:spPr>
           <a:xfrm>
             <a:off x="502920" y="4096512"/>
-            <a:ext cx="5437480" cy="2304288"/>
+            <a:ext cx="11185856" cy="1851952"/>
           </a:xfrm>
           <a:prstGeom prst="roundRect">
             <a:avLst>
@@ -12091,7 +10938,7 @@
             <a:prstDash val="solid"/>
           </a:ln>
           <a:effectLst>
-            <a:outerShdw sx="100000" sy="100000" kx="0" ky="0" algn="bl" rotWithShape="0" blurRad="177800" dist="50800" dir="5400000">
+            <a:outerShdw blurRad="177800" dist="50800" dir="5400000" algn="bl" rotWithShape="0">
               <a:srgbClr val="7E88A8">
                 <a:alpha val="30000"/>
               </a:srgbClr>
@@ -12140,7 +10987,7 @@
           <a:bodyPr wrap="square" lIns="0" tIns="0" rIns="0" bIns="0" rtlCol="0" anchor="ctr"/>
           <a:lstStyle/>
           <a:p>
-            <a:pPr algn="ctr" indent="0" marL="0">
+            <a:pPr marL="0" indent="0" algn="ctr">
               <a:buNone/>
             </a:pPr>
             <a:r>
@@ -12179,7 +11026,7 @@
           <a:bodyPr wrap="square" lIns="0" tIns="0" rIns="0" bIns="0" rtlCol="0" anchor="t"/>
           <a:lstStyle/>
           <a:p>
-            <a:pPr indent="0" marL="0">
+            <a:pPr marL="0" indent="0">
               <a:lnSpc>
                 <a:spcPct val="102000"/>
               </a:lnSpc>
@@ -12209,7 +11056,7 @@
         <p:spPr>
           <a:xfrm>
             <a:off x="795528" y="5248656"/>
-            <a:ext cx="4852264" cy="1005840"/>
+            <a:ext cx="10600640" cy="1005840"/>
           </a:xfrm>
           <a:prstGeom prst="rect">
             <a:avLst/>
@@ -12221,7 +11068,7 @@
           <a:bodyPr wrap="square" lIns="0" tIns="0" rIns="0" bIns="0" rtlCol="0" anchor="t"/>
           <a:lstStyle/>
           <a:p>
-            <a:pPr indent="0" marL="0">
+            <a:pPr marL="0" indent="0">
               <a:lnSpc>
                 <a:spcPct val="108000"/>
               </a:lnSpc>
@@ -12244,68 +11091,14 @@
       </p:sp>
       <p:sp>
         <p:nvSpPr>
-          <p:cNvPr id="20" name="Shape 18"/>
-          <p:cNvSpPr/>
-          <p:nvPr/>
-        </p:nvSpPr>
-        <p:spPr>
-          <a:xfrm>
-            <a:off x="6251296" y="4096512"/>
-            <a:ext cx="5437480" cy="2304288"/>
-          </a:xfrm>
-          <a:prstGeom prst="roundRect">
-            <a:avLst>
-              <a:gd name="adj" fmla="val 3571"/>
-            </a:avLst>
-          </a:prstGeom>
-          <a:solidFill>
-            <a:srgbClr val="FFFFFF"/>
-          </a:solidFill>
-          <a:ln w="22225">
-            <a:solidFill>
-              <a:srgbClr val="B4552D"/>
-            </a:solidFill>
-            <a:prstDash val="solid"/>
-          </a:ln>
-          <a:effectLst>
-            <a:outerShdw sx="100000" sy="100000" kx="0" ky="0" algn="bl" rotWithShape="0" blurRad="177800" dist="50800" dir="5400000">
-              <a:srgbClr val="7E88A8">
-                <a:alpha val="30000"/>
-              </a:srgbClr>
-            </a:outerShdw>
-          </a:effectLst>
-        </p:spPr>
-      </p:sp>
-      <p:sp>
-        <p:nvSpPr>
-          <p:cNvPr id="21" name="Shape 19"/>
-          <p:cNvSpPr/>
-          <p:nvPr/>
-        </p:nvSpPr>
-        <p:spPr>
-          <a:xfrm>
-            <a:off x="6543904" y="4334256"/>
-            <a:ext cx="384048" cy="384048"/>
-          </a:xfrm>
-          <a:prstGeom prst="ellipse">
-            <a:avLst/>
-          </a:prstGeom>
-          <a:solidFill>
-            <a:srgbClr val="B4552D"/>
-          </a:solidFill>
-          <a:ln/>
-        </p:spPr>
-      </p:sp>
-      <p:sp>
-        <p:nvSpPr>
-          <p:cNvPr id="22" name="Text 20"/>
-          <p:cNvSpPr txBox="1"/>
-          <p:nvPr/>
-        </p:nvSpPr>
-        <p:spPr>
-          <a:xfrm>
-            <a:off x="6543904" y="4334256"/>
-            <a:ext cx="384048" cy="384048"/>
+          <p:cNvPr id="25" name="Text 23"/>
+          <p:cNvSpPr txBox="1"/>
+          <p:nvPr/>
+        </p:nvSpPr>
+        <p:spPr>
+          <a:xfrm>
+            <a:off x="502920" y="6473952"/>
+            <a:ext cx="1828800" cy="274320"/>
           </a:xfrm>
           <a:prstGeom prst="rect">
             <a:avLst/>
@@ -12317,141 +11110,18 @@
           <a:bodyPr wrap="square" lIns="0" tIns="0" rIns="0" bIns="0" rtlCol="0" anchor="ctr"/>
           <a:lstStyle/>
           <a:p>
-            <a:pPr algn="ctr" indent="0" marL="0">
-              <a:buNone/>
-            </a:pPr>
-            <a:r>
-              <a:rPr lang="en-US" sz="1600" dirty="0">
-                <a:solidFill>
-                  <a:srgbClr val="FFFFFF"/>
-                </a:solidFill>
-                <a:latin typeface="Segoe UI Semibold" pitchFamily="34" charset="0"/>
-                <a:ea typeface="Segoe UI Semibold" pitchFamily="34" charset="-122"/>
-                <a:cs typeface="Segoe UI Semibold" pitchFamily="34" charset="-120"/>
-              </a:rPr>
-              <a:t>4</a:t>
-            </a:r>
-            <a:endParaRPr lang="en-US" sz="1600" dirty="0"/>
-          </a:p>
-        </p:txBody>
-      </p:sp>
-      <p:sp>
-        <p:nvSpPr>
-          <p:cNvPr id="23" name="Text 21"/>
-          <p:cNvSpPr txBox="1"/>
-          <p:nvPr/>
-        </p:nvSpPr>
-        <p:spPr>
-          <a:xfrm>
-            <a:off x="6543904" y="4809744"/>
-            <a:ext cx="4852264" cy="365760"/>
-          </a:xfrm>
-          <a:prstGeom prst="rect">
-            <a:avLst/>
-          </a:prstGeom>
-          <a:noFill/>
-          <a:ln/>
-        </p:spPr>
-        <p:txBody>
-          <a:bodyPr wrap="square" lIns="0" tIns="0" rIns="0" bIns="0" rtlCol="0" anchor="t"/>
-          <a:lstStyle/>
-          <a:p>
-            <a:pPr indent="0" marL="0">
-              <a:lnSpc>
-                <a:spcPct val="102000"/>
-              </a:lnSpc>
-              <a:buNone/>
-            </a:pPr>
-            <a:r>
-              <a:rPr lang="en-US" sz="2000" dirty="0">
-                <a:solidFill>
-                  <a:srgbClr val="1E2761"/>
-                </a:solidFill>
-                <a:latin typeface="Segoe UI Semibold" pitchFamily="34" charset="0"/>
-                <a:ea typeface="Segoe UI Semibold" pitchFamily="34" charset="-122"/>
-                <a:cs typeface="Segoe UI Semibold" pitchFamily="34" charset="-120"/>
-              </a:rPr>
-              <a:t>Полномочия описаны письменно</a:t>
-            </a:r>
-            <a:endParaRPr lang="en-US" sz="2000" dirty="0"/>
-          </a:p>
-        </p:txBody>
-      </p:sp>
-      <p:sp>
-        <p:nvSpPr>
-          <p:cNvPr id="24" name="Text 22"/>
-          <p:cNvSpPr txBox="1"/>
-          <p:nvPr/>
-        </p:nvSpPr>
-        <p:spPr>
-          <a:xfrm>
-            <a:off x="6543904" y="5248656"/>
-            <a:ext cx="4852264" cy="1005840"/>
-          </a:xfrm>
-          <a:prstGeom prst="rect">
-            <a:avLst/>
-          </a:prstGeom>
-          <a:noFill/>
-          <a:ln/>
-        </p:spPr>
-        <p:txBody>
-          <a:bodyPr wrap="square" lIns="0" tIns="0" rIns="0" bIns="0" rtlCol="0" anchor="t"/>
-          <a:lstStyle/>
-          <a:p>
-            <a:pPr indent="0" marL="0">
-              <a:lnSpc>
-                <a:spcPct val="108000"/>
-              </a:lnSpc>
-              <a:buNone/>
-            </a:pPr>
-            <a:r>
-              <a:rPr lang="en-US" sz="1600" dirty="0">
-                <a:solidFill>
-                  <a:srgbClr val="1B2140"/>
+            <a:pPr marL="0" indent="0">
+              <a:buNone/>
+            </a:pPr>
+            <a:r>
+              <a:rPr lang="en-US" sz="1200" dirty="0">
+                <a:solidFill>
+                  <a:srgbClr val="6B7699"/>
                 </a:solidFill>
                 <a:latin typeface="Segoe UI" pitchFamily="34" charset="0"/>
                 <a:ea typeface="Segoe UI" pitchFamily="34" charset="-122"/>
                 <a:cs typeface="Segoe UI" pitchFamily="34" charset="-120"/>
               </a:rPr>
-              <a:t>В соглашении сказано, что вы можете обещать от лица компании, а что решает компания</a:t>
-            </a:r>
-            <a:endParaRPr lang="en-US" sz="1600" dirty="0"/>
-          </a:p>
-        </p:txBody>
-      </p:sp>
-      <p:sp>
-        <p:nvSpPr>
-          <p:cNvPr id="25" name="Text 23"/>
-          <p:cNvSpPr txBox="1"/>
-          <p:nvPr/>
-        </p:nvSpPr>
-        <p:spPr>
-          <a:xfrm>
-            <a:off x="502920" y="6473952"/>
-            <a:ext cx="1828800" cy="274320"/>
-          </a:xfrm>
-          <a:prstGeom prst="rect">
-            <a:avLst/>
-          </a:prstGeom>
-          <a:noFill/>
-          <a:ln/>
-        </p:spPr>
-        <p:txBody>
-          <a:bodyPr wrap="square" lIns="0" tIns="0" rIns="0" bIns="0" rtlCol="0" anchor="ctr"/>
-          <a:lstStyle/>
-          <a:p>
-            <a:pPr indent="0" marL="0">
-              <a:buNone/>
-            </a:pPr>
-            <a:r>
-              <a:rPr lang="en-US" sz="1200" dirty="0">
-                <a:solidFill>
-                  <a:srgbClr val="6B7699"/>
-                </a:solidFill>
-                <a:latin typeface="Segoe UI" pitchFamily="34" charset="0"/>
-                <a:ea typeface="Segoe UI" pitchFamily="34" charset="-122"/>
-                <a:cs typeface="Segoe UI" pitchFamily="34" charset="-120"/>
-              </a:rPr>
               <a:t>Ситалл</a:t>
             </a:r>
             <a:endParaRPr lang="en-US" sz="1200" dirty="0"/>
@@ -12479,7 +11149,7 @@
           <a:bodyPr wrap="square" lIns="0" tIns="0" rIns="0" bIns="0" rtlCol="0" anchor="ctr"/>
           <a:lstStyle/>
           <a:p>
-            <a:pPr algn="r" indent="0" marL="0">
+            <a:pPr marL="0" indent="0" algn="r">
               <a:buNone/>
             </a:pPr>
             <a:r>
@@ -12798,4 +11468,299 @@
     </a:ext>
   </a:extLst>
 </a:theme>
+</file>
+
+<file path=ppt/theme/theme2.xml><?xml version="1.0" encoding="utf-8"?>
+<a:theme xmlns:a="http://schemas.openxmlformats.org/drawingml/2006/main" name="Тема Office">
+  <a:themeElements>
+    <a:clrScheme name="Стандартная">
+      <a:dk1>
+        <a:sysClr val="windowText" lastClr="000000"/>
+      </a:dk1>
+      <a:lt1>
+        <a:sysClr val="window" lastClr="FFFFFF"/>
+      </a:lt1>
+      <a:dk2>
+        <a:srgbClr val="44546A"/>
+      </a:dk2>
+      <a:lt2>
+        <a:srgbClr val="E7E6E6"/>
+      </a:lt2>
+      <a:accent1>
+        <a:srgbClr val="4472C4"/>
+      </a:accent1>
+      <a:accent2>
+        <a:srgbClr val="ED7D31"/>
+      </a:accent2>
+      <a:accent3>
+        <a:srgbClr val="A5A5A5"/>
+      </a:accent3>
+      <a:accent4>
+        <a:srgbClr val="FFC000"/>
+      </a:accent4>
+      <a:accent5>
+        <a:srgbClr val="5B9BD5"/>
+      </a:accent5>
+      <a:accent6>
+        <a:srgbClr val="70AD47"/>
+      </a:accent6>
+      <a:hlink>
+        <a:srgbClr val="0563C1"/>
+      </a:hlink>
+      <a:folHlink>
+        <a:srgbClr val="954F72"/>
+      </a:folHlink>
+    </a:clrScheme>
+    <a:fontScheme name="Стандартная">
+      <a:majorFont>
+        <a:latin typeface="Calibri Light" panose="020F0302020204030204"/>
+        <a:ea typeface=""/>
+        <a:cs typeface=""/>
+        <a:font script="Jpan" typeface="游ゴシック Light"/>
+        <a:font script="Hang" typeface="맑은 고딕"/>
+        <a:font script="Hans" typeface="等线 Light"/>
+        <a:font script="Hant" typeface="新細明體"/>
+        <a:font script="Arab" typeface="Times New Roman"/>
+        <a:font script="Hebr" typeface="Times New Roman"/>
+        <a:font script="Thai" typeface="Angsana New"/>
+        <a:font script="Ethi" typeface="Nyala"/>
+        <a:font script="Beng" typeface="Vrinda"/>
+        <a:font script="Gujr" typeface="Shruti"/>
+        <a:font script="Khmr" typeface="MoolBoran"/>
+        <a:font script="Knda" typeface="Tunga"/>
+        <a:font script="Guru" typeface="Raavi"/>
+        <a:font script="Cans" typeface="Euphemia"/>
+        <a:font script="Cher" typeface="Plantagenet Cherokee"/>
+        <a:font script="Yiii" typeface="Microsoft Yi Baiti"/>
+        <a:font script="Tibt" typeface="Microsoft Himalaya"/>
+        <a:font script="Thaa" typeface="MV Boli"/>
+        <a:font script="Deva" typeface="Mangal"/>
+        <a:font script="Telu" typeface="Gautami"/>
+        <a:font script="Taml" typeface="Latha"/>
+        <a:font script="Syrc" typeface="Estrangelo Edessa"/>
+        <a:font script="Orya" typeface="Kalinga"/>
+        <a:font script="Mlym" typeface="Kartika"/>
+        <a:font script="Laoo" typeface="DokChampa"/>
+        <a:font script="Sinh" typeface="Iskoola Pota"/>
+        <a:font script="Mong" typeface="Mongolian Baiti"/>
+        <a:font script="Viet" typeface="Times New Roman"/>
+        <a:font script="Uigh" typeface="Microsoft Uighur"/>
+        <a:font script="Geor" typeface="Sylfaen"/>
+        <a:font script="Armn" typeface="Arial"/>
+        <a:font script="Bugi" typeface="Leelawadee UI"/>
+        <a:font script="Bopo" typeface="Microsoft JhengHei"/>
+        <a:font script="Java" typeface="Javanese Text"/>
+        <a:font script="Lisu" typeface="Segoe UI"/>
+        <a:font script="Mymr" typeface="Myanmar Text"/>
+        <a:font script="Nkoo" typeface="Ebrima"/>
+        <a:font script="Olck" typeface="Nirmala UI"/>
+        <a:font script="Osma" typeface="Ebrima"/>
+        <a:font script="Phag" typeface="Phagspa"/>
+        <a:font script="Syrn" typeface="Estrangelo Edessa"/>
+        <a:font script="Syrj" typeface="Estrangelo Edessa"/>
+        <a:font script="Syre" typeface="Estrangelo Edessa"/>
+        <a:font script="Sora" typeface="Nirmala UI"/>
+        <a:font script="Tale" typeface="Microsoft Tai Le"/>
+        <a:font script="Talu" typeface="Microsoft New Tai Lue"/>
+        <a:font script="Tfng" typeface="Ebrima"/>
+      </a:majorFont>
+      <a:minorFont>
+        <a:latin typeface="Calibri" panose="020F0502020204030204"/>
+        <a:ea typeface=""/>
+        <a:cs typeface=""/>
+        <a:font script="Jpan" typeface="游ゴシック"/>
+        <a:font script="Hang" typeface="맑은 고딕"/>
+        <a:font script="Hans" typeface="等线"/>
+        <a:font script="Hant" typeface="新細明體"/>
+        <a:font script="Arab" typeface="Arial"/>
+        <a:font script="Hebr" typeface="Arial"/>
+        <a:font script="Thai" typeface="Cordia New"/>
+        <a:font script="Ethi" typeface="Nyala"/>
+        <a:font script="Beng" typeface="Vrinda"/>
+        <a:font script="Gujr" typeface="Shruti"/>
+        <a:font script="Khmr" typeface="DaunPenh"/>
+        <a:font script="Knda" typeface="Tunga"/>
+        <a:font script="Guru" typeface="Raavi"/>
+        <a:font script="Cans" typeface="Euphemia"/>
+        <a:font script="Cher" typeface="Plantagenet Cherokee"/>
+        <a:font script="Yiii" typeface="Microsoft Yi Baiti"/>
+        <a:font script="Tibt" typeface="Microsoft Himalaya"/>
+        <a:font script="Thaa" typeface="MV Boli"/>
+        <a:font script="Deva" typeface="Mangal"/>
+        <a:font script="Telu" typeface="Gautami"/>
+        <a:font script="Taml" typeface="Latha"/>
+        <a:font script="Syrc" typeface="Estrangelo Edessa"/>
+        <a:font script="Orya" typeface="Kalinga"/>
+        <a:font script="Mlym" typeface="Kartika"/>
+        <a:font script="Laoo" typeface="DokChampa"/>
+        <a:font script="Sinh" typeface="Iskoola Pota"/>
+        <a:font script="Mong" typeface="Mongolian Baiti"/>
+        <a:font script="Viet" typeface="Arial"/>
+        <a:font script="Uigh" typeface="Microsoft Uighur"/>
+        <a:font script="Geor" typeface="Sylfaen"/>
+        <a:font script="Armn" typeface="Arial"/>
+        <a:font script="Bugi" typeface="Leelawadee UI"/>
+        <a:font script="Bopo" typeface="Microsoft JhengHei"/>
+        <a:font script="Java" typeface="Javanese Text"/>
+        <a:font script="Lisu" typeface="Segoe UI"/>
+        <a:font script="Mymr" typeface="Myanmar Text"/>
+        <a:font script="Nkoo" typeface="Ebrima"/>
+        <a:font script="Olck" typeface="Nirmala UI"/>
+        <a:font script="Osma" typeface="Ebrima"/>
+        <a:font script="Phag" typeface="Phagspa"/>
+        <a:font script="Syrn" typeface="Estrangelo Edessa"/>
+        <a:font script="Syrj" typeface="Estrangelo Edessa"/>
+        <a:font script="Syre" typeface="Estrangelo Edessa"/>
+        <a:font script="Sora" typeface="Nirmala UI"/>
+        <a:font script="Tale" typeface="Microsoft Tai Le"/>
+        <a:font script="Talu" typeface="Microsoft New Tai Lue"/>
+        <a:font script="Tfng" typeface="Ebrima"/>
+      </a:minorFont>
+    </a:fontScheme>
+    <a:fmtScheme name="Стандартная">
+      <a:fillStyleLst>
+        <a:solidFill>
+          <a:schemeClr val="phClr"/>
+        </a:solidFill>
+        <a:gradFill rotWithShape="1">
+          <a:gsLst>
+            <a:gs pos="0">
+              <a:schemeClr val="phClr">
+                <a:lumMod val="110000"/>
+                <a:satMod val="105000"/>
+                <a:tint val="67000"/>
+              </a:schemeClr>
+            </a:gs>
+            <a:gs pos="50000">
+              <a:schemeClr val="phClr">
+                <a:lumMod val="105000"/>
+                <a:satMod val="103000"/>
+                <a:tint val="73000"/>
+              </a:schemeClr>
+            </a:gs>
+            <a:gs pos="100000">
+              <a:schemeClr val="phClr">
+                <a:lumMod val="105000"/>
+                <a:satMod val="109000"/>
+                <a:tint val="81000"/>
+              </a:schemeClr>
+            </a:gs>
+          </a:gsLst>
+          <a:lin ang="5400000" scaled="0"/>
+        </a:gradFill>
+        <a:gradFill rotWithShape="1">
+          <a:gsLst>
+            <a:gs pos="0">
+              <a:schemeClr val="phClr">
+                <a:satMod val="103000"/>
+                <a:lumMod val="102000"/>
+                <a:tint val="94000"/>
+              </a:schemeClr>
+            </a:gs>
+            <a:gs pos="50000">
+              <a:schemeClr val="phClr">
+                <a:satMod val="110000"/>
+                <a:lumMod val="100000"/>
+                <a:shade val="100000"/>
+              </a:schemeClr>
+            </a:gs>
+            <a:gs pos="100000">
+              <a:schemeClr val="phClr">
+                <a:lumMod val="99000"/>
+                <a:satMod val="120000"/>
+                <a:shade val="78000"/>
+              </a:schemeClr>
+            </a:gs>
+          </a:gsLst>
+          <a:lin ang="5400000" scaled="0"/>
+        </a:gradFill>
+      </a:fillStyleLst>
+      <a:lnStyleLst>
+        <a:ln w="6350" cap="flat" cmpd="sng" algn="ctr">
+          <a:solidFill>
+            <a:schemeClr val="phClr"/>
+          </a:solidFill>
+          <a:prstDash val="solid"/>
+          <a:miter lim="800000"/>
+        </a:ln>
+        <a:ln w="12700" cap="flat" cmpd="sng" algn="ctr">
+          <a:solidFill>
+            <a:schemeClr val="phClr"/>
+          </a:solidFill>
+          <a:prstDash val="solid"/>
+          <a:miter lim="800000"/>
+        </a:ln>
+        <a:ln w="19050" cap="flat" cmpd="sng" algn="ctr">
+          <a:solidFill>
+            <a:schemeClr val="phClr"/>
+          </a:solidFill>
+          <a:prstDash val="solid"/>
+          <a:miter lim="800000"/>
+        </a:ln>
+      </a:lnStyleLst>
+      <a:effectStyleLst>
+        <a:effectStyle>
+          <a:effectLst/>
+        </a:effectStyle>
+        <a:effectStyle>
+          <a:effectLst/>
+        </a:effectStyle>
+        <a:effectStyle>
+          <a:effectLst>
+            <a:outerShdw blurRad="57150" dist="19050" dir="5400000" algn="ctr" rotWithShape="0">
+              <a:srgbClr val="000000">
+                <a:alpha val="63000"/>
+              </a:srgbClr>
+            </a:outerShdw>
+          </a:effectLst>
+        </a:effectStyle>
+      </a:effectStyleLst>
+      <a:bgFillStyleLst>
+        <a:solidFill>
+          <a:schemeClr val="phClr"/>
+        </a:solidFill>
+        <a:solidFill>
+          <a:schemeClr val="phClr">
+            <a:tint val="95000"/>
+            <a:satMod val="170000"/>
+          </a:schemeClr>
+        </a:solidFill>
+        <a:gradFill rotWithShape="1">
+          <a:gsLst>
+            <a:gs pos="0">
+              <a:schemeClr val="phClr">
+                <a:tint val="93000"/>
+                <a:satMod val="150000"/>
+                <a:shade val="98000"/>
+                <a:lumMod val="102000"/>
+              </a:schemeClr>
+            </a:gs>
+            <a:gs pos="50000">
+              <a:schemeClr val="phClr">
+                <a:tint val="98000"/>
+                <a:satMod val="130000"/>
+                <a:shade val="90000"/>
+                <a:lumMod val="103000"/>
+              </a:schemeClr>
+            </a:gs>
+            <a:gs pos="100000">
+              <a:schemeClr val="phClr">
+                <a:shade val="63000"/>
+                <a:satMod val="120000"/>
+              </a:schemeClr>
+            </a:gs>
+          </a:gsLst>
+          <a:lin ang="5400000" scaled="0"/>
+        </a:gradFill>
+      </a:bgFillStyleLst>
+    </a:fmtScheme>
+  </a:themeElements>
+  <a:objectDefaults/>
+  <a:extraClrSchemeLst/>
+  <a:extLst>
+    <a:ext uri="{05A4C25C-085E-4340-85A3-A5531E510DB2}">
+      <thm15:themeFamily xmlns:thm15="http://schemas.microsoft.com/office/thememl/2012/main" name="Office Theme" id="{62F939B6-93AF-4DB8-9C6B-D6C7DFDC589F}" vid="{4A3C46E8-61CC-4603-A589-7422A47A8E4A}"/>
+    </a:ext>
+  </a:extLst>
+</a:theme>
 </file>
--- a/marketing/partners/sitall-deck-partner.pptx
+++ b/marketing/partners/sitall-deck-partner.pptx
@@ -2642,7 +2642,18 @@
                 <a:ea typeface="Segoe UI" pitchFamily="34" charset="-122"/>
                 <a:cs typeface="Segoe UI" pitchFamily="34" charset="-120"/>
               </a:rPr>
-              <a:t>10 / 12</a:t>
+              <a:t>10 / 1</a:t>
+            </a:r>
+            <a:r>
+              <a:rPr lang="ru-RU" sz="1200" dirty="0">
+                <a:solidFill>
+                  <a:srgbClr val="6B7699"/>
+                </a:solidFill>
+                <a:latin typeface="Segoe UI" pitchFamily="34" charset="0"/>
+                <a:ea typeface="Segoe UI" pitchFamily="34" charset="-122"/>
+                <a:cs typeface="Segoe UI" pitchFamily="34" charset="-120"/>
+              </a:rPr>
+              <a:t>1</a:t>
             </a:r>
             <a:endParaRPr lang="en-US" sz="1200" dirty="0"/>
           </a:p>
@@ -3060,7 +3071,7 @@
               <a:buNone/>
             </a:pPr>
             <a:r>
-              <a:rPr lang="en-US" sz="1600" dirty="0">
+              <a:rPr lang="ru-RU" sz="1600" dirty="0">
                 <a:solidFill>
                   <a:srgbClr val="FFFFFF"/>
                 </a:solidFill>
@@ -3068,7 +3079,7 @@
                 <a:ea typeface="Segoe UI Semibold" pitchFamily="34" charset="-122"/>
                 <a:cs typeface="Segoe UI Semibold" pitchFamily="34" charset="-120"/>
               </a:rPr>
-              <a:t>3</a:t>
+              <a:t>2</a:t>
             </a:r>
             <a:endParaRPr lang="en-US" sz="1600" dirty="0"/>
           </a:p>
@@ -3512,7 +3523,18 @@
                 <a:ea typeface="Segoe UI" pitchFamily="34" charset="-122"/>
                 <a:cs typeface="Segoe UI" pitchFamily="34" charset="-120"/>
               </a:rPr>
-              <a:t>11 / 12</a:t>
+              <a:t>11 / 1</a:t>
+            </a:r>
+            <a:r>
+              <a:rPr lang="ru-RU" sz="1200" dirty="0">
+                <a:solidFill>
+                  <a:srgbClr val="6B7699"/>
+                </a:solidFill>
+                <a:latin typeface="Segoe UI" pitchFamily="34" charset="0"/>
+                <a:ea typeface="Segoe UI" pitchFamily="34" charset="-122"/>
+                <a:cs typeface="Segoe UI" pitchFamily="34" charset="-120"/>
+              </a:rPr>
+              <a:t>1</a:t>
             </a:r>
             <a:endParaRPr lang="en-US" sz="1200" dirty="0"/>
           </a:p>
@@ -4481,7 +4503,18 @@
                 <a:ea typeface="Segoe UI" pitchFamily="34" charset="-122"/>
                 <a:cs typeface="Segoe UI" pitchFamily="34" charset="-120"/>
               </a:rPr>
-              <a:t>02 / 12</a:t>
+              <a:t>02 / 1</a:t>
+            </a:r>
+            <a:r>
+              <a:rPr lang="ru-RU" sz="1200" dirty="0">
+                <a:solidFill>
+                  <a:srgbClr val="6B7699"/>
+                </a:solidFill>
+                <a:latin typeface="Segoe UI" pitchFamily="34" charset="0"/>
+                <a:ea typeface="Segoe UI" pitchFamily="34" charset="-122"/>
+                <a:cs typeface="Segoe UI" pitchFamily="34" charset="-120"/>
+              </a:rPr>
+              <a:t>1</a:t>
             </a:r>
             <a:endParaRPr lang="en-US" sz="1200" dirty="0"/>
           </a:p>
@@ -5429,7 +5462,18 @@
                 <a:ea typeface="Segoe UI" pitchFamily="34" charset="-122"/>
                 <a:cs typeface="Segoe UI" pitchFamily="34" charset="-120"/>
               </a:rPr>
-              <a:t>03 / 12</a:t>
+              <a:t>03 / 1</a:t>
+            </a:r>
+            <a:r>
+              <a:rPr lang="ru-RU" sz="1200" dirty="0">
+                <a:solidFill>
+                  <a:srgbClr val="6B7699"/>
+                </a:solidFill>
+                <a:latin typeface="Segoe UI" pitchFamily="34" charset="0"/>
+                <a:ea typeface="Segoe UI" pitchFamily="34" charset="-122"/>
+                <a:cs typeface="Segoe UI" pitchFamily="34" charset="-120"/>
+              </a:rPr>
+              <a:t>1</a:t>
             </a:r>
             <a:endParaRPr lang="en-US" sz="1200" dirty="0"/>
           </a:p>
@@ -6338,7 +6382,18 @@
                 <a:ea typeface="Segoe UI" pitchFamily="34" charset="-122"/>
                 <a:cs typeface="Segoe UI" pitchFamily="34" charset="-120"/>
               </a:rPr>
-              <a:t>04 / 12</a:t>
+              <a:t>04 / 1</a:t>
+            </a:r>
+            <a:r>
+              <a:rPr lang="ru-RU" sz="1200" dirty="0">
+                <a:solidFill>
+                  <a:srgbClr val="6B7699"/>
+                </a:solidFill>
+                <a:latin typeface="Segoe UI" pitchFamily="34" charset="0"/>
+                <a:ea typeface="Segoe UI" pitchFamily="34" charset="-122"/>
+                <a:cs typeface="Segoe UI" pitchFamily="34" charset="-120"/>
+              </a:rPr>
+              <a:t>1</a:t>
             </a:r>
             <a:endParaRPr lang="en-US" sz="1200" dirty="0"/>
           </a:p>
@@ -7848,7 +7903,18 @@
                 <a:ea typeface="Segoe UI" pitchFamily="34" charset="-122"/>
                 <a:cs typeface="Segoe UI" pitchFamily="34" charset="-120"/>
               </a:rPr>
-              <a:t>05 / 12</a:t>
+              <a:t>05 / </a:t>
+            </a:r>
+            <a:r>
+              <a:rPr lang="ru-RU" sz="1200" dirty="0">
+                <a:solidFill>
+                  <a:srgbClr val="6B7699"/>
+                </a:solidFill>
+                <a:latin typeface="Segoe UI" pitchFamily="34" charset="0"/>
+                <a:ea typeface="Segoe UI" pitchFamily="34" charset="-122"/>
+                <a:cs typeface="Segoe UI" pitchFamily="34" charset="-120"/>
+              </a:rPr>
+              <a:t>11</a:t>
             </a:r>
             <a:endParaRPr lang="en-US" sz="1200" dirty="0"/>
           </a:p>
@@ -8629,7 +8695,18 @@
                 <a:ea typeface="Segoe UI" pitchFamily="34" charset="-122"/>
                 <a:cs typeface="Segoe UI" pitchFamily="34" charset="-120"/>
               </a:rPr>
-              <a:t>06 / 12</a:t>
+              <a:t>06 / </a:t>
+            </a:r>
+            <a:r>
+              <a:rPr lang="ru-RU" sz="1200" dirty="0">
+                <a:solidFill>
+                  <a:srgbClr val="6B7699"/>
+                </a:solidFill>
+                <a:latin typeface="Segoe UI" pitchFamily="34" charset="0"/>
+                <a:ea typeface="Segoe UI" pitchFamily="34" charset="-122"/>
+                <a:cs typeface="Segoe UI" pitchFamily="34" charset="-120"/>
+              </a:rPr>
+              <a:t>11</a:t>
             </a:r>
             <a:endParaRPr lang="en-US" sz="1200" dirty="0"/>
           </a:p>
@@ -9376,7 +9453,18 @@
                 <a:ea typeface="Segoe UI" pitchFamily="34" charset="-122"/>
                 <a:cs typeface="Segoe UI" pitchFamily="34" charset="-120"/>
               </a:rPr>
-              <a:t>07 / 12</a:t>
+              <a:t>07 / 1</a:t>
+            </a:r>
+            <a:r>
+              <a:rPr lang="ru-RU" sz="1200" dirty="0">
+                <a:solidFill>
+                  <a:srgbClr val="6B7699"/>
+                </a:solidFill>
+                <a:latin typeface="Segoe UI" pitchFamily="34" charset="0"/>
+                <a:ea typeface="Segoe UI" pitchFamily="34" charset="-122"/>
+                <a:cs typeface="Segoe UI" pitchFamily="34" charset="-120"/>
+              </a:rPr>
+              <a:t>1</a:t>
             </a:r>
             <a:endParaRPr lang="en-US" sz="1200" dirty="0"/>
           </a:p>
@@ -10429,7 +10517,18 @@
                 <a:ea typeface="Segoe UI" pitchFamily="34" charset="-122"/>
                 <a:cs typeface="Segoe UI" pitchFamily="34" charset="-120"/>
               </a:rPr>
-              <a:t>08 / 12</a:t>
+              <a:t>08 / 1</a:t>
+            </a:r>
+            <a:r>
+              <a:rPr lang="ru-RU" sz="1200" dirty="0">
+                <a:solidFill>
+                  <a:srgbClr val="6B7699"/>
+                </a:solidFill>
+                <a:latin typeface="Segoe UI" pitchFamily="34" charset="0"/>
+                <a:ea typeface="Segoe UI" pitchFamily="34" charset="-122"/>
+                <a:cs typeface="Segoe UI" pitchFamily="34" charset="-120"/>
+              </a:rPr>
+              <a:t>1</a:t>
             </a:r>
             <a:endParaRPr lang="en-US" sz="1200" dirty="0"/>
           </a:p>
@@ -11161,7 +11260,18 @@
                 <a:ea typeface="Segoe UI" pitchFamily="34" charset="-122"/>
                 <a:cs typeface="Segoe UI" pitchFamily="34" charset="-120"/>
               </a:rPr>
-              <a:t>09 / 12</a:t>
+              <a:t>09 / 1</a:t>
+            </a:r>
+            <a:r>
+              <a:rPr lang="ru-RU" sz="1200" dirty="0">
+                <a:solidFill>
+                  <a:srgbClr val="6B7699"/>
+                </a:solidFill>
+                <a:latin typeface="Segoe UI" pitchFamily="34" charset="0"/>
+                <a:ea typeface="Segoe UI" pitchFamily="34" charset="-122"/>
+                <a:cs typeface="Segoe UI" pitchFamily="34" charset="-120"/>
+              </a:rPr>
+              <a:t>1</a:t>
             </a:r>
             <a:endParaRPr lang="en-US" sz="1200" dirty="0"/>
           </a:p>
